--- a/TaskFlow_Screens.pptx
+++ b/TaskFlow_Screens.pptx
@@ -10,14 +10,12 @@
     <p:sldId id="258" r:id="rId4"/>
     <p:sldId id="259" r:id="rId5"/>
     <p:sldId id="260" r:id="rId6"/>
-    <p:sldId id="261" r:id="rId7"/>
-    <p:sldId id="262" r:id="rId8"/>
   </p:sldIdLst>
   <p:notesMasterIdLst>
-    <p:notesMasterId r:id="rId9"/>
+    <p:notesMasterId r:id="rId7"/>
   </p:notesMasterIdLst>
-  <p:sldSz cx="18288000" cy="10287000"/>
-  <p:notesSz cx="10287000" cy="18288000"/>
+  <p:sldSz cx="12192000" cy="6858000"/>
+  <p:notesSz cx="6858000" cy="12192000"/>
   <p:defaultTextStyle>
     <a:lvl1pPr marL="0" algn="l" defTabSz="914400" rtl="0" eaLnBrk="1" latinLnBrk="0" hangingPunct="1">
       <a:defRPr sz="1800" kern="1200">
@@ -508,7 +506,7 @@
           <a:p>
             <a:r>
               <a:rPr lang="en-US" dirty="0"/>
-              <a:t>TaskFlow for Android — a polished recreation of the current screens, restyled for a household. Same structure and flows, no new features.</a:t>
+              <a:t>Deck rebuilt for phase 4b. The previous version showed the pre-pivot v1 app.</a:t>
             </a:r>
             <a:endParaRPr lang="en-US" dirty="0"/>
           </a:p>
@@ -596,7 +594,7 @@
           <a:p>
             <a:r>
               <a:rPr lang="en-US" dirty="0"/>
-              <a:t>Auth screen. Email + password, brand mark, sign in, and a toggle to register. Register signs you straight in.</a:t>
+              <a:t/>
             </a:r>
             <a:endParaRPr lang="en-US" dirty="0"/>
           </a:p>
@@ -684,7 +682,7 @@
           <a:p>
             <a:r>
               <a:rPr lang="en-US" dirty="0"/>
-              <a:t>Dashboard. Your households as cards; a badged invite inbox appears only when something is waiting; FAB creates a new group; overflow has join-by-code and sign-out.</a:t>
+              <a:t/>
             </a:r>
             <a:endParaRPr lang="en-US" dirty="0"/>
           </a:p>
@@ -772,7 +770,7 @@
           <a:p>
             <a:r>
               <a:rPr lang="en-US" dirty="0"/>
-              <a:t>Group detail, Tasks tab. Progress header, three tabs, chores grouped To do / In progress / Done so finished work sinks. Tap a card for detail; checkboxes enter bulk multi-select.</a:t>
+              <a:t/>
             </a:r>
             <a:endParaRPr lang="en-US" dirty="0"/>
           </a:p>
@@ -860,7 +858,7 @@
           <a:p>
             <a:r>
               <a:rPr lang="en-US" dirty="0"/>
-              <a:t>Activity tab — the shared-awareness feed, polled every 5s. Developer strings are humanised: 'moved it to Done', '2 tasks → Done'. Colored dots key the event type.</a:t>
+              <a:t/>
             </a:r>
             <a:endParaRPr lang="en-US" dirty="0"/>
           </a:p>
@@ -884,182 +882,6 @@
             <a:fld id="{F7021451-1387-4CA6-816F-3879F97B5CBC}" type="slidenum">
               <a:rPr lang="en-US"/>
               <a:t>5</a:t>
-            </a:fld>
-            <a:endParaRPr lang="en-US"/>
-          </a:p>
-        </p:txBody>
-      </p:sp>
-    </p:spTree>
-    <p:extLst>
-      <p:ext uri="{BB962C8B-B14F-4D97-AF65-F5344CB8AC3E}">
-        <p14:creationId xmlns:p14="http://schemas.microsoft.com/office/powerpoint/2010/main" val="1024086991"/>
-      </p:ext>
-    </p:extLst>
-  </p:cSld>
-  <p:clrMapOvr>
-    <a:masterClrMapping/>
-  </p:clrMapOvr>
-</p:notes>
-</file>
-
-<file path=ppt/notesSlides/notesSlide6.xml><?xml version="1.0" encoding="utf-8"?>
-<p:notes xmlns:a="http://schemas.openxmlformats.org/drawingml/2006/main" xmlns:r="http://schemas.openxmlformats.org/officeDocument/2006/relationships" xmlns:p="http://schemas.openxmlformats.org/presentationml/2006/main">
-  <p:cSld>
-    <p:spTree>
-      <p:nvGrpSpPr>
-        <p:cNvPr id="1" name=""/>
-        <p:cNvGrpSpPr/>
-        <p:nvPr/>
-      </p:nvGrpSpPr>
-      <p:grpSpPr>
-        <a:xfrm>
-          <a:off x="0" y="0"/>
-          <a:ext cx="0" cy="0"/>
-          <a:chOff x="0" y="0"/>
-          <a:chExt cx="0" cy="0"/>
-        </a:xfrm>
-      </p:grpSpPr>
-      <p:sp>
-        <p:nvSpPr>
-          <p:cNvPr id="2" name="Slide Image Placeholder 1"/>
-          <p:cNvSpPr>
-            <a:spLocks noGrp="1" noRot="1" noChangeAspect="1"/>
-          </p:cNvSpPr>
-          <p:nvPr>
-            <p:ph type="sldImg"/>
-          </p:nvPr>
-        </p:nvSpPr>
-        <p:spPr/>
-      </p:sp>
-      <p:sp>
-        <p:nvSpPr>
-          <p:cNvPr id="3" name="Notes Placeholder 2"/>
-          <p:cNvSpPr>
-            <a:spLocks noGrp="1"/>
-          </p:cNvSpPr>
-          <p:nvPr>
-            <p:ph type="body" idx="1"/>
-          </p:nvPr>
-        </p:nvSpPr>
-        <p:spPr/>
-        <p:txBody>
-          <a:bodyPr/>
-          <a:lstStyle/>
-          <a:p>
-            <a:r>
-              <a:rPr lang="en-US" dirty="0"/>
-              <a:t>Members tab. The roster with role badges — owner, admin, member. Invite-by-username and shareable invite codes live in the overflow menu.</a:t>
-            </a:r>
-            <a:endParaRPr lang="en-US" dirty="0"/>
-          </a:p>
-        </p:txBody>
-      </p:sp>
-      <p:sp>
-        <p:nvSpPr>
-          <p:cNvPr id="4" name="Slide Number Placeholder 3"/>
-          <p:cNvSpPr>
-            <a:spLocks noGrp="1"/>
-          </p:cNvSpPr>
-          <p:nvPr>
-            <p:ph type="sldNum" sz="quarter" idx="10"/>
-          </p:nvPr>
-        </p:nvSpPr>
-        <p:spPr/>
-        <p:txBody>
-          <a:bodyPr/>
-          <a:lstStyle/>
-          <a:p>
-            <a:fld id="{F7021451-1387-4CA6-816F-3879F97B5CBC}" type="slidenum">
-              <a:rPr lang="en-US"/>
-              <a:t>6</a:t>
-            </a:fld>
-            <a:endParaRPr lang="en-US"/>
-          </a:p>
-        </p:txBody>
-      </p:sp>
-    </p:spTree>
-    <p:extLst>
-      <p:ext uri="{BB962C8B-B14F-4D97-AF65-F5344CB8AC3E}">
-        <p14:creationId xmlns:p14="http://schemas.microsoft.com/office/powerpoint/2010/main" val="1024086991"/>
-      </p:ext>
-    </p:extLst>
-  </p:cSld>
-  <p:clrMapOvr>
-    <a:masterClrMapping/>
-  </p:clrMapOvr>
-</p:notes>
-</file>
-
-<file path=ppt/notesSlides/notesSlide7.xml><?xml version="1.0" encoding="utf-8"?>
-<p:notes xmlns:a="http://schemas.openxmlformats.org/drawingml/2006/main" xmlns:r="http://schemas.openxmlformats.org/officeDocument/2006/relationships" xmlns:p="http://schemas.openxmlformats.org/presentationml/2006/main">
-  <p:cSld>
-    <p:spTree>
-      <p:nvGrpSpPr>
-        <p:cNvPr id="1" name=""/>
-        <p:cNvGrpSpPr/>
-        <p:nvPr/>
-      </p:nvGrpSpPr>
-      <p:grpSpPr>
-        <a:xfrm>
-          <a:off x="0" y="0"/>
-          <a:ext cx="0" cy="0"/>
-          <a:chOff x="0" y="0"/>
-          <a:chExt cx="0" cy="0"/>
-        </a:xfrm>
-      </p:grpSpPr>
-      <p:sp>
-        <p:nvSpPr>
-          <p:cNvPr id="2" name="Slide Image Placeholder 1"/>
-          <p:cNvSpPr>
-            <a:spLocks noGrp="1" noRot="1" noChangeAspect="1"/>
-          </p:cNvSpPr>
-          <p:nvPr>
-            <p:ph type="sldImg"/>
-          </p:nvPr>
-        </p:nvSpPr>
-        <p:spPr/>
-      </p:sp>
-      <p:sp>
-        <p:nvSpPr>
-          <p:cNvPr id="3" name="Notes Placeholder 2"/>
-          <p:cNvSpPr>
-            <a:spLocks noGrp="1"/>
-          </p:cNvSpPr>
-          <p:nvPr>
-            <p:ph type="body" idx="1"/>
-          </p:nvPr>
-        </p:nvSpPr>
-        <p:spPr/>
-        <p:txBody>
-          <a:bodyPr/>
-          <a:lstStyle/>
-          <a:p>
-            <a:r>
-              <a:rPr lang="en-US" dirty="0"/>
-              <a:t>Task detail as a modal bottom sheet — where a chore is read and edited. Staged title/description saved with a button; status and assignee apply immediately; delete confirms.</a:t>
-            </a:r>
-            <a:endParaRPr lang="en-US" dirty="0"/>
-          </a:p>
-        </p:txBody>
-      </p:sp>
-      <p:sp>
-        <p:nvSpPr>
-          <p:cNvPr id="4" name="Slide Number Placeholder 3"/>
-          <p:cNvSpPr>
-            <a:spLocks noGrp="1"/>
-          </p:cNvSpPr>
-          <p:nvPr>
-            <p:ph type="sldNum" sz="quarter" idx="10"/>
-          </p:nvPr>
-        </p:nvSpPr>
-        <p:spPr/>
-        <p:txBody>
-          <a:bodyPr/>
-          <a:lstStyle/>
-          <a:p>
-            <a:fld id="{F7021451-1387-4CA6-816F-3879F97B5CBC}" type="slidenum">
-              <a:rPr lang="en-US"/>
-              <a:t>7</a:t>
             </a:fld>
             <a:endParaRPr lang="en-US"/>
           </a:p>
@@ -1388,6 +1210,13 @@
 <file path=ppt/slides/slide1.xml><?xml version="1.0" encoding="utf-8"?>
 <p:sld xmlns:a="http://schemas.openxmlformats.org/drawingml/2006/main" xmlns:r="http://schemas.openxmlformats.org/officeDocument/2006/relationships" xmlns:p="http://schemas.openxmlformats.org/presentationml/2006/main">
   <p:cSld name="Slide 1">
+    <p:bg>
+      <p:bgPr>
+        <a:solidFill>
+          <a:srgbClr val="1A1B2E"/>
+        </a:solidFill>
+      </p:bgPr>
+    </p:bg>
     <p:spTree>
       <p:nvGrpSpPr>
         <p:cNvPr id="1" name=""/>
@@ -1402,9 +1231,129 @@
           <a:chExt cx="0" cy="0"/>
         </a:xfrm>
       </p:grpSpPr>
+      <p:sp>
+        <p:nvSpPr>
+          <p:cNvPr id="2" name="Text 0"/>
+          <p:cNvSpPr txBox="1"/>
+          <p:nvPr/>
+        </p:nvSpPr>
+        <p:spPr>
+          <a:xfrm>
+            <a:off x="822960" y="1737360"/>
+            <a:ext cx="6583680" cy="914400"/>
+          </a:xfrm>
+          <a:prstGeom prst="rect">
+            <a:avLst/>
+          </a:prstGeom>
+          <a:noFill/>
+          <a:ln/>
+        </p:spPr>
+        <p:txBody>
+          <a:bodyPr wrap="square" lIns="0" tIns="0" rIns="0" bIns="0" rtlCol="0" anchor="ctr"/>
+          <a:lstStyle/>
+          <a:p>
+            <a:pPr indent="0" marL="0">
+              <a:buNone/>
+            </a:pPr>
+            <a:r>
+              <a:rPr lang="en-US" sz="5400" b="1" dirty="0">
+                <a:solidFill>
+                  <a:srgbClr val="FFFFFF"/>
+                </a:solidFill>
+                <a:latin typeface="Calibri" pitchFamily="34" charset="0"/>
+                <a:ea typeface="Calibri" pitchFamily="34" charset="-122"/>
+                <a:cs typeface="Calibri" pitchFamily="34" charset="-120"/>
+              </a:rPr>
+              <a:t>TaskFlow</a:t>
+            </a:r>
+            <a:endParaRPr lang="en-US" sz="5400" dirty="0"/>
+          </a:p>
+        </p:txBody>
+      </p:sp>
+      <p:sp>
+        <p:nvSpPr>
+          <p:cNvPr id="3" name="Text 1"/>
+          <p:cNvSpPr txBox="1"/>
+          <p:nvPr/>
+        </p:nvSpPr>
+        <p:spPr>
+          <a:xfrm>
+            <a:off x="822960" y="2697480"/>
+            <a:ext cx="6583680" cy="548640"/>
+          </a:xfrm>
+          <a:prstGeom prst="rect">
+            <a:avLst/>
+          </a:prstGeom>
+          <a:noFill/>
+          <a:ln/>
+        </p:spPr>
+        <p:txBody>
+          <a:bodyPr wrap="square" lIns="0" tIns="0" rIns="0" bIns="0" rtlCol="0" anchor="ctr"/>
+          <a:lstStyle/>
+          <a:p>
+            <a:pPr indent="0" marL="0">
+              <a:buNone/>
+            </a:pPr>
+            <a:r>
+              <a:rPr lang="en-US" sz="2000" dirty="0">
+                <a:solidFill>
+                  <a:srgbClr val="CADCFC"/>
+                </a:solidFill>
+                <a:latin typeface="Calibri" pitchFamily="34" charset="0"/>
+                <a:ea typeface="Calibri" pitchFamily="34" charset="-122"/>
+                <a:cs typeface="Calibri" pitchFamily="34" charset="-120"/>
+              </a:rPr>
+              <a:t>The household chore board — screens from the built app</a:t>
+            </a:r>
+            <a:endParaRPr lang="en-US" sz="2000" dirty="0"/>
+          </a:p>
+        </p:txBody>
+      </p:sp>
+      <p:sp>
+        <p:nvSpPr>
+          <p:cNvPr id="4" name="Text 2"/>
+          <p:cNvSpPr txBox="1"/>
+          <p:nvPr/>
+        </p:nvSpPr>
+        <p:spPr>
+          <a:xfrm>
+            <a:off x="822960" y="3429000"/>
+            <a:ext cx="6309360" cy="914400"/>
+          </a:xfrm>
+          <a:prstGeom prst="rect">
+            <a:avLst/>
+          </a:prstGeom>
+          <a:noFill/>
+          <a:ln/>
+        </p:spPr>
+        <p:txBody>
+          <a:bodyPr wrap="square" lIns="0" tIns="0" rIns="0" bIns="0" rtlCol="0" anchor="ctr"/>
+          <a:lstStyle/>
+          <a:p>
+            <a:pPr indent="0" marL="0">
+              <a:lnSpc>
+                <a:spcPct val="130000"/>
+              </a:lnSpc>
+              <a:buNone/>
+            </a:pPr>
+            <a:r>
+              <a:rPr lang="en-US" sz="1400" dirty="0">
+                <a:solidFill>
+                  <a:srgbClr val="9AA0B4"/>
+                </a:solidFill>
+                <a:latin typeface="Calibri" pitchFamily="34" charset="0"/>
+                <a:ea typeface="Calibri" pitchFamily="34" charset="-122"/>
+                <a:cs typeface="Calibri" pitchFamily="34" charset="-120"/>
+              </a:rPr>
+              <a:t>Captured on the emulator against a running backend on 2 September 2026. Every screen here is the app as it actually builds and runs — no mock-ups.</a:t>
+            </a:r>
+            <a:endParaRPr lang="en-US" sz="1400" dirty="0"/>
+          </a:p>
+        </p:txBody>
+      </p:sp>
       <p:pic>
         <p:nvPicPr>
-          <p:cNvPr id="2" name="Image 0" descr="preencoded.png">    </p:cNvPr>
+          <p:cNvPr id="5" name="Image 0" descr="C:\Users\babak\AppData\Local\Temp\claude\D--0A-study-A0-0-ACSAI-0-sem-4-AI-ML-ML-unit-2\13f11f40-7bf3-4475-bdab-4aadda964c01\scratchpad\shots\04-board.png">    </p:cNvPr>
           <p:cNvPicPr>
             <a:picLocks noChangeAspect="1"/>
           </p:cNvPicPr>
@@ -1418,84 +1367,19 @@
         </p:blipFill>
         <p:spPr>
           <a:xfrm>
-            <a:off x="0" y="0"/>
-            <a:ext cx="9144000" cy="5143500"/>
-          </a:xfrm>
-          <a:prstGeom prst="rect">
-            <a:avLst/>
-          </a:prstGeom>
-        </p:spPr>
-      </p:pic>
-      <p:pic>
-        <p:nvPicPr>
-          <p:cNvPr id="3" name="Image 1" descr="preencoded.png">    </p:cNvPr>
-          <p:cNvPicPr>
-            <a:picLocks noChangeAspect="1"/>
-          </p:cNvPicPr>
-          <p:nvPr/>
-        </p:nvPicPr>
-        <p:blipFill>
-          <a:blip r:embed="rId2"/>
-          <a:stretch>
-            <a:fillRect/>
-          </a:stretch>
-        </p:blipFill>
-        <p:spPr>
-          <a:xfrm>
-            <a:off x="9124950" y="0"/>
-            <a:ext cx="9163050" cy="5143500"/>
-          </a:xfrm>
-          <a:prstGeom prst="rect">
-            <a:avLst/>
-          </a:prstGeom>
-        </p:spPr>
-      </p:pic>
-      <p:pic>
-        <p:nvPicPr>
-          <p:cNvPr id="4" name="Image 2" descr="preencoded.png">    </p:cNvPr>
-          <p:cNvPicPr>
-            <a:picLocks noChangeAspect="1"/>
-          </p:cNvPicPr>
-          <p:nvPr/>
-        </p:nvPicPr>
-        <p:blipFill>
-          <a:blip r:embed="rId3"/>
-          <a:stretch>
-            <a:fillRect/>
-          </a:stretch>
-        </p:blipFill>
-        <p:spPr>
-          <a:xfrm>
-            <a:off x="0" y="5124450"/>
-            <a:ext cx="9144000" cy="5162550"/>
-          </a:xfrm>
-          <a:prstGeom prst="rect">
-            <a:avLst/>
-          </a:prstGeom>
-        </p:spPr>
-      </p:pic>
-      <p:pic>
-        <p:nvPicPr>
-          <p:cNvPr id="5" name="Image 3" descr="preencoded.png">    </p:cNvPr>
-          <p:cNvPicPr>
-            <a:picLocks noChangeAspect="1"/>
-          </p:cNvPicPr>
-          <p:nvPr/>
-        </p:nvPicPr>
-        <p:blipFill>
-          <a:blip r:embed="rId4"/>
-          <a:stretch>
-            <a:fillRect/>
-          </a:stretch>
-        </p:blipFill>
-        <p:spPr>
-          <a:xfrm>
-            <a:off x="9124950" y="5124450"/>
-            <a:ext cx="9163050" cy="5162550"/>
-          </a:xfrm>
-          <a:prstGeom prst="rect">
-            <a:avLst/>
-          </a:prstGeom>
+            <a:off x="8778240" y="777240"/>
+            <a:ext cx="2377440" cy="5285232"/>
+          </a:xfrm>
+          <a:prstGeom prst="rect">
+            <a:avLst/>
+          </a:prstGeom>
+          <a:effectLst>
+            <a:outerShdw sx="100000" sy="100000" kx="0" ky="0" algn="bl" rotWithShape="0" blurRad="228600" dist="76200" dir="5400000">
+              <a:srgbClr val="000000">
+                <a:alpha val="45000"/>
+              </a:srgbClr>
+            </a:outerShdw>
+          </a:effectLst>
         </p:spPr>
       </p:pic>
     </p:spTree>
@@ -1509,6 +1393,13 @@
 <file path=ppt/slides/slide2.xml><?xml version="1.0" encoding="utf-8"?>
 <p:sld xmlns:a="http://schemas.openxmlformats.org/drawingml/2006/main" xmlns:r="http://schemas.openxmlformats.org/officeDocument/2006/relationships" xmlns:p="http://schemas.openxmlformats.org/presentationml/2006/main">
   <p:cSld name="Slide 2">
+    <p:bg>
+      <p:bgPr>
+        <a:solidFill>
+          <a:srgbClr val="FFFFFF"/>
+        </a:solidFill>
+      </p:bgPr>
+    </p:bg>
     <p:spTree>
       <p:nvGrpSpPr>
         <p:cNvPr id="1" name=""/>
@@ -1523,9 +1414,114 @@
           <a:chExt cx="0" cy="0"/>
         </a:xfrm>
       </p:grpSpPr>
+      <p:sp>
+        <p:nvSpPr>
+          <p:cNvPr id="2" name="Text 0"/>
+          <p:cNvSpPr txBox="1"/>
+          <p:nvPr/>
+        </p:nvSpPr>
+        <p:spPr>
+          <a:xfrm>
+            <a:off x="731520" y="292608"/>
+            <a:ext cx="10698480" cy="502920"/>
+          </a:xfrm>
+          <a:prstGeom prst="rect">
+            <a:avLst/>
+          </a:prstGeom>
+          <a:noFill/>
+          <a:ln/>
+        </p:spPr>
+        <p:txBody>
+          <a:bodyPr wrap="square" lIns="0" tIns="0" rIns="0" bIns="0" rtlCol="0" anchor="ctr"/>
+          <a:lstStyle/>
+          <a:p>
+            <a:pPr indent="0" marL="0">
+              <a:buNone/>
+            </a:pPr>
+            <a:r>
+              <a:rPr lang="en-US" sz="3400" b="1" dirty="0">
+                <a:solidFill>
+                  <a:srgbClr val="1A1B2E"/>
+                </a:solidFill>
+                <a:latin typeface="Calibri" pitchFamily="34" charset="0"/>
+                <a:ea typeface="Calibri" pitchFamily="34" charset="-122"/>
+                <a:cs typeface="Calibri" pitchFamily="34" charset="-120"/>
+              </a:rPr>
+              <a:t>Getting in</a:t>
+            </a:r>
+            <a:endParaRPr lang="en-US" sz="3400" dirty="0"/>
+          </a:p>
+        </p:txBody>
+      </p:sp>
+      <p:sp>
+        <p:nvSpPr>
+          <p:cNvPr id="3" name="Text 1"/>
+          <p:cNvSpPr txBox="1"/>
+          <p:nvPr/>
+        </p:nvSpPr>
+        <p:spPr>
+          <a:xfrm>
+            <a:off x="758952" y="786384"/>
+            <a:ext cx="10698480" cy="329184"/>
+          </a:xfrm>
+          <a:prstGeom prst="rect">
+            <a:avLst/>
+          </a:prstGeom>
+          <a:noFill/>
+          <a:ln/>
+        </p:spPr>
+        <p:txBody>
+          <a:bodyPr wrap="square" lIns="0" tIns="0" rIns="0" bIns="0" rtlCol="0" anchor="ctr"/>
+          <a:lstStyle/>
+          <a:p>
+            <a:pPr indent="0" marL="0">
+              <a:buNone/>
+            </a:pPr>
+            <a:r>
+              <a:rPr lang="en-US" sz="1300" dirty="0">
+                <a:solidFill>
+                  <a:srgbClr val="6B6F80"/>
+                </a:solidFill>
+                <a:latin typeface="Calibri" pitchFamily="34" charset="0"/>
+                <a:ea typeface="Calibri" pitchFamily="34" charset="-122"/>
+                <a:cs typeface="Calibri" pitchFamily="34" charset="-120"/>
+              </a:rPr>
+              <a:t>One household, so signing in lands straight on its board. The group list is one Back away.</a:t>
+            </a:r>
+            <a:endParaRPr lang="en-US" sz="1300" dirty="0"/>
+          </a:p>
+        </p:txBody>
+      </p:sp>
+      <p:sp>
+        <p:nvSpPr>
+          <p:cNvPr id="4" name="Shape 2"/>
+          <p:cNvSpPr/>
+          <p:nvPr/>
+        </p:nvSpPr>
+        <p:spPr>
+          <a:xfrm>
+            <a:off x="754380" y="1188720"/>
+            <a:ext cx="2286000" cy="4937760"/>
+          </a:xfrm>
+          <a:prstGeom prst="roundRect">
+            <a:avLst>
+              <a:gd name="adj" fmla="val 4800"/>
+            </a:avLst>
+          </a:prstGeom>
+          <a:solidFill>
+            <a:srgbClr val="F4F5FA"/>
+          </a:solidFill>
+          <a:ln w="12700">
+            <a:solidFill>
+              <a:srgbClr val="E4E6F0"/>
+            </a:solidFill>
+            <a:prstDash val="solid"/>
+          </a:ln>
+        </p:spPr>
+      </p:sp>
       <p:pic>
         <p:nvPicPr>
-          <p:cNvPr id="2" name="Image 0" descr="preencoded.png">    </p:cNvPr>
+          <p:cNvPr id="5" name="Image 0" descr="C:\Users\babak\AppData\Local\Temp\claude\D--0A-study-A0-0-ACSAI-0-sem-4-AI-ML-ML-unit-2\13f11f40-7bf3-4475-bdab-4aadda964c01\scratchpad\shots\01-login.png">    </p:cNvPr>
           <p:cNvPicPr>
             <a:picLocks noChangeAspect="1"/>
           </p:cNvPicPr>
@@ -1539,17 +1535,129 @@
         </p:blipFill>
         <p:spPr>
           <a:xfrm>
-            <a:off x="0" y="0"/>
-            <a:ext cx="9144000" cy="5143500"/>
-          </a:xfrm>
-          <a:prstGeom prst="rect">
-            <a:avLst/>
-          </a:prstGeom>
+            <a:off x="868680" y="1353312"/>
+            <a:ext cx="2057400" cy="4572000"/>
+          </a:xfrm>
+          <a:prstGeom prst="rect">
+            <a:avLst/>
+          </a:prstGeom>
+          <a:effectLst>
+            <a:outerShdw sx="100000" sy="100000" kx="0" ky="0" algn="bl" rotWithShape="0" blurRad="127000" dist="38100" dir="5400000">
+              <a:srgbClr val="1A1B2E">
+                <a:alpha val="22000"/>
+              </a:srgbClr>
+            </a:outerShdw>
+          </a:effectLst>
         </p:spPr>
       </p:pic>
+      <p:sp>
+        <p:nvSpPr>
+          <p:cNvPr id="6" name="Text 3"/>
+          <p:cNvSpPr txBox="1"/>
+          <p:nvPr/>
+        </p:nvSpPr>
+        <p:spPr>
+          <a:xfrm>
+            <a:off x="754380" y="6236208"/>
+            <a:ext cx="2286000" cy="256032"/>
+          </a:xfrm>
+          <a:prstGeom prst="rect">
+            <a:avLst/>
+          </a:prstGeom>
+          <a:noFill/>
+          <a:ln/>
+        </p:spPr>
+        <p:txBody>
+          <a:bodyPr wrap="square" lIns="0" tIns="0" rIns="0" bIns="0" rtlCol="0" anchor="ctr"/>
+          <a:lstStyle/>
+          <a:p>
+            <a:pPr algn="ctr" indent="0" marL="0">
+              <a:buNone/>
+            </a:pPr>
+            <a:r>
+              <a:rPr lang="en-US" sz="1200" b="1" dirty="0">
+                <a:solidFill>
+                  <a:srgbClr val="1A1B2E"/>
+                </a:solidFill>
+                <a:latin typeface="Calibri" pitchFamily="34" charset="0"/>
+                <a:ea typeface="Calibri" pitchFamily="34" charset="-122"/>
+                <a:cs typeface="Calibri" pitchFamily="34" charset="-120"/>
+              </a:rPr>
+              <a:t>Sign in</a:t>
+            </a:r>
+            <a:endParaRPr lang="en-US" sz="1200" dirty="0"/>
+          </a:p>
+        </p:txBody>
+      </p:sp>
+      <p:sp>
+        <p:nvSpPr>
+          <p:cNvPr id="7" name="Text 4"/>
+          <p:cNvSpPr txBox="1"/>
+          <p:nvPr/>
+        </p:nvSpPr>
+        <p:spPr>
+          <a:xfrm>
+            <a:off x="644652" y="6492240"/>
+            <a:ext cx="2505456" cy="384048"/>
+          </a:xfrm>
+          <a:prstGeom prst="rect">
+            <a:avLst/>
+          </a:prstGeom>
+          <a:noFill/>
+          <a:ln/>
+        </p:spPr>
+        <p:txBody>
+          <a:bodyPr wrap="square" lIns="0" tIns="0" rIns="0" bIns="0" rtlCol="0" anchor="ctr"/>
+          <a:lstStyle/>
+          <a:p>
+            <a:pPr algn="ctr" indent="0" marL="0">
+              <a:buNone/>
+            </a:pPr>
+            <a:r>
+              <a:rPr lang="en-US" sz="1000" dirty="0">
+                <a:solidFill>
+                  <a:srgbClr val="6B6F80"/>
+                </a:solidFill>
+                <a:latin typeface="Calibri" pitchFamily="34" charset="0"/>
+                <a:ea typeface="Calibri" pitchFamily="34" charset="-122"/>
+                <a:cs typeface="Calibri" pitchFamily="34" charset="-120"/>
+              </a:rPr>
+              <a:t>The violet scheme, not the wallpaper's</a:t>
+            </a:r>
+            <a:endParaRPr lang="en-US" sz="1000" dirty="0"/>
+          </a:p>
+        </p:txBody>
+      </p:sp>
+      <p:sp>
+        <p:nvSpPr>
+          <p:cNvPr id="8" name="Shape 5"/>
+          <p:cNvSpPr/>
+          <p:nvPr/>
+        </p:nvSpPr>
+        <p:spPr>
+          <a:xfrm>
+            <a:off x="3543300" y="1188720"/>
+            <a:ext cx="2286000" cy="4937760"/>
+          </a:xfrm>
+          <a:prstGeom prst="roundRect">
+            <a:avLst>
+              <a:gd name="adj" fmla="val 4800"/>
+            </a:avLst>
+          </a:prstGeom>
+          <a:solidFill>
+            <a:srgbClr val="F4F5FA"/>
+          </a:solidFill>
+          <a:ln w="12700">
+            <a:solidFill>
+              <a:srgbClr val="E4E6F0"/>
+            </a:solidFill>
+            <a:prstDash val="solid"/>
+          </a:ln>
+        </p:spPr>
+      </p:sp>
       <p:pic>
         <p:nvPicPr>
-          <p:cNvPr id="3" name="Image 1" descr="preencoded.png">    </p:cNvPr>
+          <p:cNvPr id="9" name="Image 1" descr="C:\Users\babak\AppData\Local\Temp\claude\D--0A-study-A0-0-ACSAI-0-sem-4-AI-ML-ML-unit-2\13f11f40-7bf3-4475-bdab-4aadda964c01\scratchpad\shots\02-register.png">    </p:cNvPr>
           <p:cNvPicPr>
             <a:picLocks noChangeAspect="1"/>
           </p:cNvPicPr>
@@ -1563,17 +1671,129 @@
         </p:blipFill>
         <p:spPr>
           <a:xfrm>
-            <a:off x="9124950" y="0"/>
-            <a:ext cx="9163050" cy="5143500"/>
-          </a:xfrm>
-          <a:prstGeom prst="rect">
-            <a:avLst/>
-          </a:prstGeom>
+            <a:off x="3657600" y="1353312"/>
+            <a:ext cx="2057400" cy="4572000"/>
+          </a:xfrm>
+          <a:prstGeom prst="rect">
+            <a:avLst/>
+          </a:prstGeom>
+          <a:effectLst>
+            <a:outerShdw sx="100000" sy="100000" kx="0" ky="0" algn="bl" rotWithShape="0" blurRad="127000" dist="38100" dir="5400000">
+              <a:srgbClr val="1A1B2E">
+                <a:alpha val="22000"/>
+              </a:srgbClr>
+            </a:outerShdw>
+          </a:effectLst>
         </p:spPr>
       </p:pic>
+      <p:sp>
+        <p:nvSpPr>
+          <p:cNvPr id="10" name="Text 6"/>
+          <p:cNvSpPr txBox="1"/>
+          <p:nvPr/>
+        </p:nvSpPr>
+        <p:spPr>
+          <a:xfrm>
+            <a:off x="3543300" y="6236208"/>
+            <a:ext cx="2286000" cy="256032"/>
+          </a:xfrm>
+          <a:prstGeom prst="rect">
+            <a:avLst/>
+          </a:prstGeom>
+          <a:noFill/>
+          <a:ln/>
+        </p:spPr>
+        <p:txBody>
+          <a:bodyPr wrap="square" lIns="0" tIns="0" rIns="0" bIns="0" rtlCol="0" anchor="ctr"/>
+          <a:lstStyle/>
+          <a:p>
+            <a:pPr algn="ctr" indent="0" marL="0">
+              <a:buNone/>
+            </a:pPr>
+            <a:r>
+              <a:rPr lang="en-US" sz="1200" b="1" dirty="0">
+                <a:solidFill>
+                  <a:srgbClr val="1A1B2E"/>
+                </a:solidFill>
+                <a:latin typeface="Calibri" pitchFamily="34" charset="0"/>
+                <a:ea typeface="Calibri" pitchFamily="34" charset="-122"/>
+                <a:cs typeface="Calibri" pitchFamily="34" charset="-120"/>
+              </a:rPr>
+              <a:t>Create an account</a:t>
+            </a:r>
+            <a:endParaRPr lang="en-US" sz="1200" dirty="0"/>
+          </a:p>
+        </p:txBody>
+      </p:sp>
+      <p:sp>
+        <p:nvSpPr>
+          <p:cNvPr id="11" name="Text 7"/>
+          <p:cNvSpPr txBox="1"/>
+          <p:nvPr/>
+        </p:nvSpPr>
+        <p:spPr>
+          <a:xfrm>
+            <a:off x="3433572" y="6492240"/>
+            <a:ext cx="2505456" cy="384048"/>
+          </a:xfrm>
+          <a:prstGeom prst="rect">
+            <a:avLst/>
+          </a:prstGeom>
+          <a:noFill/>
+          <a:ln/>
+        </p:spPr>
+        <p:txBody>
+          <a:bodyPr wrap="square" lIns="0" tIns="0" rIns="0" bIns="0" rtlCol="0" anchor="ctr"/>
+          <a:lstStyle/>
+          <a:p>
+            <a:pPr algn="ctr" indent="0" marL="0">
+              <a:buNone/>
+            </a:pPr>
+            <a:r>
+              <a:rPr lang="en-US" sz="1000" dirty="0">
+                <a:solidFill>
+                  <a:srgbClr val="6B6F80"/>
+                </a:solidFill>
+                <a:latin typeface="Calibri" pitchFamily="34" charset="0"/>
+                <a:ea typeface="Calibri" pitchFamily="34" charset="-122"/>
+                <a:cs typeface="Calibri" pitchFamily="34" charset="-120"/>
+              </a:rPr>
+              <a:t>Scrolls clear of the keyboard</a:t>
+            </a:r>
+            <a:endParaRPr lang="en-US" sz="1000" dirty="0"/>
+          </a:p>
+        </p:txBody>
+      </p:sp>
+      <p:sp>
+        <p:nvSpPr>
+          <p:cNvPr id="12" name="Shape 8"/>
+          <p:cNvSpPr/>
+          <p:nvPr/>
+        </p:nvSpPr>
+        <p:spPr>
+          <a:xfrm>
+            <a:off x="6332220" y="1188720"/>
+            <a:ext cx="2286000" cy="4937760"/>
+          </a:xfrm>
+          <a:prstGeom prst="roundRect">
+            <a:avLst>
+              <a:gd name="adj" fmla="val 4800"/>
+            </a:avLst>
+          </a:prstGeom>
+          <a:solidFill>
+            <a:srgbClr val="F4F5FA"/>
+          </a:solidFill>
+          <a:ln w="12700">
+            <a:solidFill>
+              <a:srgbClr val="E4E6F0"/>
+            </a:solidFill>
+            <a:prstDash val="solid"/>
+          </a:ln>
+        </p:spPr>
+      </p:sp>
       <p:pic>
         <p:nvPicPr>
-          <p:cNvPr id="4" name="Image 2" descr="preencoded.png">    </p:cNvPr>
+          <p:cNvPr id="13" name="Image 2" descr="C:\Users\babak\AppData\Local\Temp\claude\D--0A-study-A0-0-ACSAI-0-sem-4-AI-ML-ML-unit-2\13f11f40-7bf3-4475-bdab-4aadda964c01\scratchpad\shots\03-dashboard.png">    </p:cNvPr>
           <p:cNvPicPr>
             <a:picLocks noChangeAspect="1"/>
           </p:cNvPicPr>
@@ -1587,17 +1807,129 @@
         </p:blipFill>
         <p:spPr>
           <a:xfrm>
-            <a:off x="0" y="5124450"/>
-            <a:ext cx="9144000" cy="5162550"/>
-          </a:xfrm>
-          <a:prstGeom prst="rect">
-            <a:avLst/>
-          </a:prstGeom>
+            <a:off x="6446520" y="1353312"/>
+            <a:ext cx="2057400" cy="4572000"/>
+          </a:xfrm>
+          <a:prstGeom prst="rect">
+            <a:avLst/>
+          </a:prstGeom>
+          <a:effectLst>
+            <a:outerShdw sx="100000" sy="100000" kx="0" ky="0" algn="bl" rotWithShape="0" blurRad="127000" dist="38100" dir="5400000">
+              <a:srgbClr val="1A1B2E">
+                <a:alpha val="22000"/>
+              </a:srgbClr>
+            </a:outerShdw>
+          </a:effectLst>
         </p:spPr>
       </p:pic>
+      <p:sp>
+        <p:nvSpPr>
+          <p:cNvPr id="14" name="Text 9"/>
+          <p:cNvSpPr txBox="1"/>
+          <p:nvPr/>
+        </p:nvSpPr>
+        <p:spPr>
+          <a:xfrm>
+            <a:off x="6332220" y="6236208"/>
+            <a:ext cx="2286000" cy="256032"/>
+          </a:xfrm>
+          <a:prstGeom prst="rect">
+            <a:avLst/>
+          </a:prstGeom>
+          <a:noFill/>
+          <a:ln/>
+        </p:spPr>
+        <p:txBody>
+          <a:bodyPr wrap="square" lIns="0" tIns="0" rIns="0" bIns="0" rtlCol="0" anchor="ctr"/>
+          <a:lstStyle/>
+          <a:p>
+            <a:pPr algn="ctr" indent="0" marL="0">
+              <a:buNone/>
+            </a:pPr>
+            <a:r>
+              <a:rPr lang="en-US" sz="1200" b="1" dirty="0">
+                <a:solidFill>
+                  <a:srgbClr val="1A1B2E"/>
+                </a:solidFill>
+                <a:latin typeface="Calibri" pitchFamily="34" charset="0"/>
+                <a:ea typeface="Calibri" pitchFamily="34" charset="-122"/>
+                <a:cs typeface="Calibri" pitchFamily="34" charset="-120"/>
+              </a:rPr>
+              <a:t>My Groups</a:t>
+            </a:r>
+            <a:endParaRPr lang="en-US" sz="1200" dirty="0"/>
+          </a:p>
+        </p:txBody>
+      </p:sp>
+      <p:sp>
+        <p:nvSpPr>
+          <p:cNvPr id="15" name="Text 10"/>
+          <p:cNvSpPr txBox="1"/>
+          <p:nvPr/>
+        </p:nvSpPr>
+        <p:spPr>
+          <a:xfrm>
+            <a:off x="6222492" y="6492240"/>
+            <a:ext cx="2505456" cy="384048"/>
+          </a:xfrm>
+          <a:prstGeom prst="rect">
+            <a:avLst/>
+          </a:prstGeom>
+          <a:noFill/>
+          <a:ln/>
+        </p:spPr>
+        <p:txBody>
+          <a:bodyPr wrap="square" lIns="0" tIns="0" rIns="0" bIns="0" rtlCol="0" anchor="ctr"/>
+          <a:lstStyle/>
+          <a:p>
+            <a:pPr algn="ctr" indent="0" marL="0">
+              <a:buNone/>
+            </a:pPr>
+            <a:r>
+              <a:rPr lang="en-US" sz="1000" dirty="0">
+                <a:solidFill>
+                  <a:srgbClr val="6B6F80"/>
+                </a:solidFill>
+                <a:latin typeface="Calibri" pitchFamily="34" charset="0"/>
+                <a:ea typeface="Calibri" pitchFamily="34" charset="-122"/>
+                <a:cs typeface="Calibri" pitchFamily="34" charset="-120"/>
+              </a:rPr>
+              <a:t>Reached by Back from the board</a:t>
+            </a:r>
+            <a:endParaRPr lang="en-US" sz="1000" dirty="0"/>
+          </a:p>
+        </p:txBody>
+      </p:sp>
+      <p:sp>
+        <p:nvSpPr>
+          <p:cNvPr id="16" name="Shape 11"/>
+          <p:cNvSpPr/>
+          <p:nvPr/>
+        </p:nvSpPr>
+        <p:spPr>
+          <a:xfrm>
+            <a:off x="9121140" y="1188720"/>
+            <a:ext cx="2286000" cy="4937760"/>
+          </a:xfrm>
+          <a:prstGeom prst="roundRect">
+            <a:avLst>
+              <a:gd name="adj" fmla="val 4800"/>
+            </a:avLst>
+          </a:prstGeom>
+          <a:solidFill>
+            <a:srgbClr val="F4F5FA"/>
+          </a:solidFill>
+          <a:ln w="12700">
+            <a:solidFill>
+              <a:srgbClr val="E4E6F0"/>
+            </a:solidFill>
+            <a:prstDash val="solid"/>
+          </a:ln>
+        </p:spPr>
+      </p:sp>
       <p:pic>
         <p:nvPicPr>
-          <p:cNvPr id="5" name="Image 3" descr="preencoded.png">    </p:cNvPr>
+          <p:cNvPr id="17" name="Image 3" descr="C:\Users\babak\AppData\Local\Temp\claude\D--0A-study-A0-0-ACSAI-0-sem-4-AI-ML-ML-unit-2\13f11f40-7bf3-4475-bdab-4aadda964c01\scratchpad\shots\12-dashboard-menu.png">    </p:cNvPr>
           <p:cNvPicPr>
             <a:picLocks noChangeAspect="1"/>
           </p:cNvPicPr>
@@ -1611,14 +1943,99 @@
         </p:blipFill>
         <p:spPr>
           <a:xfrm>
-            <a:off x="9124950" y="5124450"/>
-            <a:ext cx="9163050" cy="5162550"/>
-          </a:xfrm>
-          <a:prstGeom prst="rect">
-            <a:avLst/>
-          </a:prstGeom>
+            <a:off x="9235440" y="1353312"/>
+            <a:ext cx="2057400" cy="4572000"/>
+          </a:xfrm>
+          <a:prstGeom prst="rect">
+            <a:avLst/>
+          </a:prstGeom>
+          <a:effectLst>
+            <a:outerShdw sx="100000" sy="100000" kx="0" ky="0" algn="bl" rotWithShape="0" blurRad="127000" dist="38100" dir="5400000">
+              <a:srgbClr val="1A1B2E">
+                <a:alpha val="22000"/>
+              </a:srgbClr>
+            </a:outerShdw>
+          </a:effectLst>
         </p:spPr>
       </p:pic>
+      <p:sp>
+        <p:nvSpPr>
+          <p:cNvPr id="18" name="Text 12"/>
+          <p:cNvSpPr txBox="1"/>
+          <p:nvPr/>
+        </p:nvSpPr>
+        <p:spPr>
+          <a:xfrm>
+            <a:off x="9121140" y="6236208"/>
+            <a:ext cx="2286000" cy="256032"/>
+          </a:xfrm>
+          <a:prstGeom prst="rect">
+            <a:avLst/>
+          </a:prstGeom>
+          <a:noFill/>
+          <a:ln/>
+        </p:spPr>
+        <p:txBody>
+          <a:bodyPr wrap="square" lIns="0" tIns="0" rIns="0" bIns="0" rtlCol="0" anchor="ctr"/>
+          <a:lstStyle/>
+          <a:p>
+            <a:pPr algn="ctr" indent="0" marL="0">
+              <a:buNone/>
+            </a:pPr>
+            <a:r>
+              <a:rPr lang="en-US" sz="1200" b="1" dirty="0">
+                <a:solidFill>
+                  <a:srgbClr val="1A1B2E"/>
+                </a:solidFill>
+                <a:latin typeface="Calibri" pitchFamily="34" charset="0"/>
+                <a:ea typeface="Calibri" pitchFamily="34" charset="-122"/>
+                <a:cs typeface="Calibri" pitchFamily="34" charset="-120"/>
+              </a:rPr>
+              <a:t>Dashboard menu</a:t>
+            </a:r>
+            <a:endParaRPr lang="en-US" sz="1200" dirty="0"/>
+          </a:p>
+        </p:txBody>
+      </p:sp>
+      <p:sp>
+        <p:nvSpPr>
+          <p:cNvPr id="19" name="Text 13"/>
+          <p:cNvSpPr txBox="1"/>
+          <p:nvPr/>
+        </p:nvSpPr>
+        <p:spPr>
+          <a:xfrm>
+            <a:off x="9011412" y="6492240"/>
+            <a:ext cx="2505456" cy="384048"/>
+          </a:xfrm>
+          <a:prstGeom prst="rect">
+            <a:avLst/>
+          </a:prstGeom>
+          <a:noFill/>
+          <a:ln/>
+        </p:spPr>
+        <p:txBody>
+          <a:bodyPr wrap="square" lIns="0" tIns="0" rIns="0" bIns="0" rtlCol="0" anchor="ctr"/>
+          <a:lstStyle/>
+          <a:p>
+            <a:pPr algn="ctr" indent="0" marL="0">
+              <a:buNone/>
+            </a:pPr>
+            <a:r>
+              <a:rPr lang="en-US" sz="1000" dirty="0">
+                <a:solidFill>
+                  <a:srgbClr val="6B6F80"/>
+                </a:solidFill>
+                <a:latin typeface="Calibri" pitchFamily="34" charset="0"/>
+                <a:ea typeface="Calibri" pitchFamily="34" charset="-122"/>
+                <a:cs typeface="Calibri" pitchFamily="34" charset="-120"/>
+              </a:rPr>
+              <a:t>Quiet hours lives here — it is per person</a:t>
+            </a:r>
+            <a:endParaRPr lang="en-US" sz="1000" dirty="0"/>
+          </a:p>
+        </p:txBody>
+      </p:sp>
     </p:spTree>
   </p:cSld>
   <p:clrMapOvr>
@@ -1630,6 +2047,13 @@
 <file path=ppt/slides/slide3.xml><?xml version="1.0" encoding="utf-8"?>
 <p:sld xmlns:a="http://schemas.openxmlformats.org/drawingml/2006/main" xmlns:r="http://schemas.openxmlformats.org/officeDocument/2006/relationships" xmlns:p="http://schemas.openxmlformats.org/presentationml/2006/main">
   <p:cSld name="Slide 3">
+    <p:bg>
+      <p:bgPr>
+        <a:solidFill>
+          <a:srgbClr val="FFFFFF"/>
+        </a:solidFill>
+      </p:bgPr>
+    </p:bg>
     <p:spTree>
       <p:nvGrpSpPr>
         <p:cNvPr id="1" name=""/>
@@ -1644,9 +2068,114 @@
           <a:chExt cx="0" cy="0"/>
         </a:xfrm>
       </p:grpSpPr>
+      <p:sp>
+        <p:nvSpPr>
+          <p:cNvPr id="2" name="Text 0"/>
+          <p:cNvSpPr txBox="1"/>
+          <p:nvPr/>
+        </p:nvSpPr>
+        <p:spPr>
+          <a:xfrm>
+            <a:off x="731520" y="292608"/>
+            <a:ext cx="10698480" cy="502920"/>
+          </a:xfrm>
+          <a:prstGeom prst="rect">
+            <a:avLst/>
+          </a:prstGeom>
+          <a:noFill/>
+          <a:ln/>
+        </p:spPr>
+        <p:txBody>
+          <a:bodyPr wrap="square" lIns="0" tIns="0" rIns="0" bIns="0" rtlCol="0" anchor="ctr"/>
+          <a:lstStyle/>
+          <a:p>
+            <a:pPr indent="0" marL="0">
+              <a:buNone/>
+            </a:pPr>
+            <a:r>
+              <a:rPr lang="en-US" sz="3400" b="1" dirty="0">
+                <a:solidFill>
+                  <a:srgbClr val="1A1B2E"/>
+                </a:solidFill>
+                <a:latin typeface="Calibri" pitchFamily="34" charset="0"/>
+                <a:ea typeface="Calibri" pitchFamily="34" charset="-122"/>
+                <a:cs typeface="Calibri" pitchFamily="34" charset="-120"/>
+              </a:rPr>
+              <a:t>The board is the screen</a:t>
+            </a:r>
+            <a:endParaRPr lang="en-US" sz="3400" dirty="0"/>
+          </a:p>
+        </p:txBody>
+      </p:sp>
+      <p:sp>
+        <p:nvSpPr>
+          <p:cNvPr id="3" name="Text 1"/>
+          <p:cNvSpPr txBox="1"/>
+          <p:nvPr/>
+        </p:nvSpPr>
+        <p:spPr>
+          <a:xfrm>
+            <a:off x="758952" y="786384"/>
+            <a:ext cx="10698480" cy="329184"/>
+          </a:xfrm>
+          <a:prstGeom prst="rect">
+            <a:avLst/>
+          </a:prstGeom>
+          <a:noFill/>
+          <a:ln/>
+        </p:spPr>
+        <p:txBody>
+          <a:bodyPr wrap="square" lIns="0" tIns="0" rIns="0" bIns="0" rtlCol="0" anchor="ctr"/>
+          <a:lstStyle/>
+          <a:p>
+            <a:pPr indent="0" marL="0">
+              <a:buNone/>
+            </a:pPr>
+            <a:r>
+              <a:rPr lang="en-US" sz="1300" dirty="0">
+                <a:solidFill>
+                  <a:srgbClr val="6B6F80"/>
+                </a:solidFill>
+                <a:latin typeface="Calibri" pitchFamily="34" charset="0"/>
+                <a:ea typeface="Calibri" pitchFamily="34" charset="-122"/>
+                <a:cs typeface="Calibri" pitchFamily="34" charset="-120"/>
+              </a:rPr>
+              <a:t>Yours, Others, Done — grouped by whose it is, not by status. Overdue is amber, never red.</a:t>
+            </a:r>
+            <a:endParaRPr lang="en-US" sz="1300" dirty="0"/>
+          </a:p>
+        </p:txBody>
+      </p:sp>
+      <p:sp>
+        <p:nvSpPr>
+          <p:cNvPr id="4" name="Shape 2"/>
+          <p:cNvSpPr/>
+          <p:nvPr/>
+        </p:nvSpPr>
+        <p:spPr>
+          <a:xfrm>
+            <a:off x="754380" y="1188720"/>
+            <a:ext cx="2286000" cy="4937760"/>
+          </a:xfrm>
+          <a:prstGeom prst="roundRect">
+            <a:avLst>
+              <a:gd name="adj" fmla="val 4800"/>
+            </a:avLst>
+          </a:prstGeom>
+          <a:solidFill>
+            <a:srgbClr val="F4F5FA"/>
+          </a:solidFill>
+          <a:ln w="12700">
+            <a:solidFill>
+              <a:srgbClr val="E4E6F0"/>
+            </a:solidFill>
+            <a:prstDash val="solid"/>
+          </a:ln>
+        </p:spPr>
+      </p:sp>
       <p:pic>
         <p:nvPicPr>
-          <p:cNvPr id="2" name="Image 0" descr="preencoded.png">    </p:cNvPr>
+          <p:cNvPr id="5" name="Image 0" descr="C:\Users\babak\AppData\Local\Temp\claude\D--0A-study-A0-0-ACSAI-0-sem-4-AI-ML-ML-unit-2\13f11f40-7bf3-4475-bdab-4aadda964c01\scratchpad\shots\04-board.png">    </p:cNvPr>
           <p:cNvPicPr>
             <a:picLocks noChangeAspect="1"/>
           </p:cNvPicPr>
@@ -1660,17 +2189,129 @@
         </p:blipFill>
         <p:spPr>
           <a:xfrm>
-            <a:off x="0" y="0"/>
-            <a:ext cx="9144000" cy="5143500"/>
-          </a:xfrm>
-          <a:prstGeom prst="rect">
-            <a:avLst/>
-          </a:prstGeom>
+            <a:off x="868680" y="1353312"/>
+            <a:ext cx="2057400" cy="4572000"/>
+          </a:xfrm>
+          <a:prstGeom prst="rect">
+            <a:avLst/>
+          </a:prstGeom>
+          <a:effectLst>
+            <a:outerShdw sx="100000" sy="100000" kx="0" ky="0" algn="bl" rotWithShape="0" blurRad="127000" dist="38100" dir="5400000">
+              <a:srgbClr val="1A1B2E">
+                <a:alpha val="22000"/>
+              </a:srgbClr>
+            </a:outerShdw>
+          </a:effectLst>
         </p:spPr>
       </p:pic>
+      <p:sp>
+        <p:nvSpPr>
+          <p:cNvPr id="6" name="Text 3"/>
+          <p:cNvSpPr txBox="1"/>
+          <p:nvPr/>
+        </p:nvSpPr>
+        <p:spPr>
+          <a:xfrm>
+            <a:off x="754380" y="6236208"/>
+            <a:ext cx="2286000" cy="256032"/>
+          </a:xfrm>
+          <a:prstGeom prst="rect">
+            <a:avLst/>
+          </a:prstGeom>
+          <a:noFill/>
+          <a:ln/>
+        </p:spPr>
+        <p:txBody>
+          <a:bodyPr wrap="square" lIns="0" tIns="0" rIns="0" bIns="0" rtlCol="0" anchor="ctr"/>
+          <a:lstStyle/>
+          <a:p>
+            <a:pPr algn="ctr" indent="0" marL="0">
+              <a:buNone/>
+            </a:pPr>
+            <a:r>
+              <a:rPr lang="en-US" sz="1200" b="1" dirty="0">
+                <a:solidFill>
+                  <a:srgbClr val="1A1B2E"/>
+                </a:solidFill>
+                <a:latin typeface="Calibri" pitchFamily="34" charset="0"/>
+                <a:ea typeface="Calibri" pitchFamily="34" charset="-122"/>
+                <a:cs typeface="Calibri" pitchFamily="34" charset="-120"/>
+              </a:rPr>
+              <a:t>The board</a:t>
+            </a:r>
+            <a:endParaRPr lang="en-US" sz="1200" dirty="0"/>
+          </a:p>
+        </p:txBody>
+      </p:sp>
+      <p:sp>
+        <p:nvSpPr>
+          <p:cNvPr id="7" name="Text 4"/>
+          <p:cNvSpPr txBox="1"/>
+          <p:nvPr/>
+        </p:nvSpPr>
+        <p:spPr>
+          <a:xfrm>
+            <a:off x="644652" y="6492240"/>
+            <a:ext cx="2505456" cy="384048"/>
+          </a:xfrm>
+          <a:prstGeom prst="rect">
+            <a:avLst/>
+          </a:prstGeom>
+          <a:noFill/>
+          <a:ln/>
+        </p:spPr>
+        <p:txBody>
+          <a:bodyPr wrap="square" lIns="0" tIns="0" rIns="0" bIns="0" rtlCol="0" anchor="ctr"/>
+          <a:lstStyle/>
+          <a:p>
+            <a:pPr algn="ctr" indent="0" marL="0">
+              <a:buNone/>
+            </a:pPr>
+            <a:r>
+              <a:rPr lang="en-US" sz="1000" dirty="0">
+                <a:solidFill>
+                  <a:srgbClr val="6B6F80"/>
+                </a:solidFill>
+                <a:latin typeface="Calibri" pitchFamily="34" charset="0"/>
+                <a:ea typeface="Calibri" pitchFamily="34" charset="-122"/>
+                <a:cs typeface="Calibri" pitchFamily="34" charset="-120"/>
+              </a:rPr>
+              <a:t>One overdue row in amber; done rows sink</a:t>
+            </a:r>
+            <a:endParaRPr lang="en-US" sz="1000" dirty="0"/>
+          </a:p>
+        </p:txBody>
+      </p:sp>
+      <p:sp>
+        <p:nvSpPr>
+          <p:cNvPr id="8" name="Shape 5"/>
+          <p:cNvSpPr/>
+          <p:nvPr/>
+        </p:nvSpPr>
+        <p:spPr>
+          <a:xfrm>
+            <a:off x="3543300" y="1188720"/>
+            <a:ext cx="2286000" cy="4937760"/>
+          </a:xfrm>
+          <a:prstGeom prst="roundRect">
+            <a:avLst>
+              <a:gd name="adj" fmla="val 4800"/>
+            </a:avLst>
+          </a:prstGeom>
+          <a:solidFill>
+            <a:srgbClr val="F4F5FA"/>
+          </a:solidFill>
+          <a:ln w="12700">
+            <a:solidFill>
+              <a:srgbClr val="E4E6F0"/>
+            </a:solidFill>
+            <a:prstDash val="solid"/>
+          </a:ln>
+        </p:spPr>
+      </p:sp>
       <p:pic>
         <p:nvPicPr>
-          <p:cNvPr id="3" name="Image 1" descr="preencoded.png">    </p:cNvPr>
+          <p:cNvPr id="9" name="Image 1" descr="C:\Users\babak\AppData\Local\Temp\claude\D--0A-study-A0-0-ACSAI-0-sem-4-AI-ML-ML-unit-2\13f11f40-7bf3-4475-bdab-4aadda964c01\scratchpad\shots\05-occurrence-detail.png">    </p:cNvPr>
           <p:cNvPicPr>
             <a:picLocks noChangeAspect="1"/>
           </p:cNvPicPr>
@@ -1684,17 +2325,129 @@
         </p:blipFill>
         <p:spPr>
           <a:xfrm>
-            <a:off x="9124950" y="0"/>
-            <a:ext cx="9163050" cy="5143500"/>
-          </a:xfrm>
-          <a:prstGeom prst="rect">
-            <a:avLst/>
-          </a:prstGeom>
+            <a:off x="3657600" y="1353312"/>
+            <a:ext cx="2057400" cy="4572000"/>
+          </a:xfrm>
+          <a:prstGeom prst="rect">
+            <a:avLst/>
+          </a:prstGeom>
+          <a:effectLst>
+            <a:outerShdw sx="100000" sy="100000" kx="0" ky="0" algn="bl" rotWithShape="0" blurRad="127000" dist="38100" dir="5400000">
+              <a:srgbClr val="1A1B2E">
+                <a:alpha val="22000"/>
+              </a:srgbClr>
+            </a:outerShdw>
+          </a:effectLst>
         </p:spPr>
       </p:pic>
+      <p:sp>
+        <p:nvSpPr>
+          <p:cNvPr id="10" name="Text 6"/>
+          <p:cNvSpPr txBox="1"/>
+          <p:nvPr/>
+        </p:nvSpPr>
+        <p:spPr>
+          <a:xfrm>
+            <a:off x="3543300" y="6236208"/>
+            <a:ext cx="2286000" cy="256032"/>
+          </a:xfrm>
+          <a:prstGeom prst="rect">
+            <a:avLst/>
+          </a:prstGeom>
+          <a:noFill/>
+          <a:ln/>
+        </p:spPr>
+        <p:txBody>
+          <a:bodyPr wrap="square" lIns="0" tIns="0" rIns="0" bIns="0" rtlCol="0" anchor="ctr"/>
+          <a:lstStyle/>
+          <a:p>
+            <a:pPr algn="ctr" indent="0" marL="0">
+              <a:buNone/>
+            </a:pPr>
+            <a:r>
+              <a:rPr lang="en-US" sz="1200" b="1" dirty="0">
+                <a:solidFill>
+                  <a:srgbClr val="1A1B2E"/>
+                </a:solidFill>
+                <a:latin typeface="Calibri" pitchFamily="34" charset="0"/>
+                <a:ea typeface="Calibri" pitchFamily="34" charset="-122"/>
+                <a:cs typeface="Calibri" pitchFamily="34" charset="-120"/>
+              </a:rPr>
+              <a:t>A chore, opened</a:t>
+            </a:r>
+            <a:endParaRPr lang="en-US" sz="1200" dirty="0"/>
+          </a:p>
+        </p:txBody>
+      </p:sp>
+      <p:sp>
+        <p:nvSpPr>
+          <p:cNvPr id="11" name="Text 7"/>
+          <p:cNvSpPr txBox="1"/>
+          <p:nvPr/>
+        </p:nvSpPr>
+        <p:spPr>
+          <a:xfrm>
+            <a:off x="3433572" y="6492240"/>
+            <a:ext cx="2505456" cy="384048"/>
+          </a:xfrm>
+          <a:prstGeom prst="rect">
+            <a:avLst/>
+          </a:prstGeom>
+          <a:noFill/>
+          <a:ln/>
+        </p:spPr>
+        <p:txBody>
+          <a:bodyPr wrap="square" lIns="0" tIns="0" rIns="0" bIns="0" rtlCol="0" anchor="ctr"/>
+          <a:lstStyle/>
+          <a:p>
+            <a:pPr algn="ctr" indent="0" marL="0">
+              <a:buNone/>
+            </a:pPr>
+            <a:r>
+              <a:rPr lang="en-US" sz="1000" dirty="0">
+                <a:solidFill>
+                  <a:srgbClr val="6B6F80"/>
+                </a:solidFill>
+                <a:latin typeface="Calibri" pitchFamily="34" charset="0"/>
+                <a:ea typeface="Calibri" pitchFamily="34" charset="-122"/>
+                <a:cs typeface="Calibri" pitchFamily="34" charset="-120"/>
+              </a:rPr>
+              <a:t>The done-line, the schedule, whose turn</a:t>
+            </a:r>
+            <a:endParaRPr lang="en-US" sz="1000" dirty="0"/>
+          </a:p>
+        </p:txBody>
+      </p:sp>
+      <p:sp>
+        <p:nvSpPr>
+          <p:cNvPr id="12" name="Shape 8"/>
+          <p:cNvSpPr/>
+          <p:nvPr/>
+        </p:nvSpPr>
+        <p:spPr>
+          <a:xfrm>
+            <a:off x="6332220" y="1188720"/>
+            <a:ext cx="2286000" cy="4937760"/>
+          </a:xfrm>
+          <a:prstGeom prst="roundRect">
+            <a:avLst>
+              <a:gd name="adj" fmla="val 4800"/>
+            </a:avLst>
+          </a:prstGeom>
+          <a:solidFill>
+            <a:srgbClr val="F4F5FA"/>
+          </a:solidFill>
+          <a:ln w="12700">
+            <a:solidFill>
+              <a:srgbClr val="E4E6F0"/>
+            </a:solidFill>
+            <a:prstDash val="solid"/>
+          </a:ln>
+        </p:spPr>
+      </p:sp>
       <p:pic>
         <p:nvPicPr>
-          <p:cNvPr id="4" name="Image 2" descr="preencoded.png">    </p:cNvPr>
+          <p:cNvPr id="13" name="Image 2" descr="C:\Users\babak\AppData\Local\Temp\claude\D--0A-study-A0-0-ACSAI-0-sem-4-AI-ML-ML-unit-2\13f11f40-7bf3-4475-bdab-4aadda964c01\scratchpad\shots\07-create-repeats.png">    </p:cNvPr>
           <p:cNvPicPr>
             <a:picLocks noChangeAspect="1"/>
           </p:cNvPicPr>
@@ -1708,17 +2461,129 @@
         </p:blipFill>
         <p:spPr>
           <a:xfrm>
-            <a:off x="0" y="5124450"/>
-            <a:ext cx="9144000" cy="5162550"/>
-          </a:xfrm>
-          <a:prstGeom prst="rect">
-            <a:avLst/>
-          </a:prstGeom>
+            <a:off x="6446520" y="1353312"/>
+            <a:ext cx="2057400" cy="4572000"/>
+          </a:xfrm>
+          <a:prstGeom prst="rect">
+            <a:avLst/>
+          </a:prstGeom>
+          <a:effectLst>
+            <a:outerShdw sx="100000" sy="100000" kx="0" ky="0" algn="bl" rotWithShape="0" blurRad="127000" dist="38100" dir="5400000">
+              <a:srgbClr val="1A1B2E">
+                <a:alpha val="22000"/>
+              </a:srgbClr>
+            </a:outerShdw>
+          </a:effectLst>
         </p:spPr>
       </p:pic>
+      <p:sp>
+        <p:nvSpPr>
+          <p:cNvPr id="14" name="Text 9"/>
+          <p:cNvSpPr txBox="1"/>
+          <p:nvPr/>
+        </p:nvSpPr>
+        <p:spPr>
+          <a:xfrm>
+            <a:off x="6332220" y="6236208"/>
+            <a:ext cx="2286000" cy="256032"/>
+          </a:xfrm>
+          <a:prstGeom prst="rect">
+            <a:avLst/>
+          </a:prstGeom>
+          <a:noFill/>
+          <a:ln/>
+        </p:spPr>
+        <p:txBody>
+          <a:bodyPr wrap="square" lIns="0" tIns="0" rIns="0" bIns="0" rtlCol="0" anchor="ctr"/>
+          <a:lstStyle/>
+          <a:p>
+            <a:pPr algn="ctr" indent="0" marL="0">
+              <a:buNone/>
+            </a:pPr>
+            <a:r>
+              <a:rPr lang="en-US" sz="1200" b="1" dirty="0">
+                <a:solidFill>
+                  <a:srgbClr val="1A1B2E"/>
+                </a:solidFill>
+                <a:latin typeface="Calibri" pitchFamily="34" charset="0"/>
+                <a:ea typeface="Calibri" pitchFamily="34" charset="-122"/>
+                <a:cs typeface="Calibri" pitchFamily="34" charset="-120"/>
+              </a:rPr>
+              <a:t>Add — repeats</a:t>
+            </a:r>
+            <a:endParaRPr lang="en-US" sz="1200" dirty="0"/>
+          </a:p>
+        </p:txBody>
+      </p:sp>
+      <p:sp>
+        <p:nvSpPr>
+          <p:cNvPr id="15" name="Text 10"/>
+          <p:cNvSpPr txBox="1"/>
+          <p:nvPr/>
+        </p:nvSpPr>
+        <p:spPr>
+          <a:xfrm>
+            <a:off x="6222492" y="6492240"/>
+            <a:ext cx="2505456" cy="384048"/>
+          </a:xfrm>
+          <a:prstGeom prst="rect">
+            <a:avLst/>
+          </a:prstGeom>
+          <a:noFill/>
+          <a:ln/>
+        </p:spPr>
+        <p:txBody>
+          <a:bodyPr wrap="square" lIns="0" tIns="0" rIns="0" bIns="0" rtlCol="0" anchor="ctr"/>
+          <a:lstStyle/>
+          <a:p>
+            <a:pPr algn="ctr" indent="0" marL="0">
+              <a:buNone/>
+            </a:pPr>
+            <a:r>
+              <a:rPr lang="en-US" sz="1000" dirty="0">
+                <a:solidFill>
+                  <a:srgbClr val="6B6F80"/>
+                </a:solidFill>
+                <a:latin typeface="Calibri" pitchFamily="34" charset="0"/>
+                <a:ea typeface="Calibri" pitchFamily="34" charset="-122"/>
+                <a:cs typeface="Calibri" pitchFamily="34" charset="-120"/>
+              </a:rPr>
+              <a:t>Schedule and rotation order</a:t>
+            </a:r>
+            <a:endParaRPr lang="en-US" sz="1000" dirty="0"/>
+          </a:p>
+        </p:txBody>
+      </p:sp>
+      <p:sp>
+        <p:nvSpPr>
+          <p:cNvPr id="16" name="Shape 11"/>
+          <p:cNvSpPr/>
+          <p:nvPr/>
+        </p:nvSpPr>
+        <p:spPr>
+          <a:xfrm>
+            <a:off x="9121140" y="1188720"/>
+            <a:ext cx="2286000" cy="4937760"/>
+          </a:xfrm>
+          <a:prstGeom prst="roundRect">
+            <a:avLst>
+              <a:gd name="adj" fmla="val 4800"/>
+            </a:avLst>
+          </a:prstGeom>
+          <a:solidFill>
+            <a:srgbClr val="F4F5FA"/>
+          </a:solidFill>
+          <a:ln w="12700">
+            <a:solidFill>
+              <a:srgbClr val="E4E6F0"/>
+            </a:solidFill>
+            <a:prstDash val="solid"/>
+          </a:ln>
+        </p:spPr>
+      </p:sp>
       <p:pic>
         <p:nvPicPr>
-          <p:cNvPr id="5" name="Image 3" descr="preencoded.png">    </p:cNvPr>
+          <p:cNvPr id="17" name="Image 3" descr="C:\Users\babak\AppData\Local\Temp\claude\D--0A-study-A0-0-ACSAI-0-sem-4-AI-ML-ML-unit-2\13f11f40-7bf3-4475-bdab-4aadda964c01\scratchpad\shots\08-create-onetime.png">    </p:cNvPr>
           <p:cNvPicPr>
             <a:picLocks noChangeAspect="1"/>
           </p:cNvPicPr>
@@ -1732,14 +2597,99 @@
         </p:blipFill>
         <p:spPr>
           <a:xfrm>
-            <a:off x="9124950" y="5124450"/>
-            <a:ext cx="9163050" cy="5162550"/>
-          </a:xfrm>
-          <a:prstGeom prst="rect">
-            <a:avLst/>
-          </a:prstGeom>
+            <a:off x="9235440" y="1353312"/>
+            <a:ext cx="2057400" cy="4572000"/>
+          </a:xfrm>
+          <a:prstGeom prst="rect">
+            <a:avLst/>
+          </a:prstGeom>
+          <a:effectLst>
+            <a:outerShdw sx="100000" sy="100000" kx="0" ky="0" algn="bl" rotWithShape="0" blurRad="127000" dist="38100" dir="5400000">
+              <a:srgbClr val="1A1B2E">
+                <a:alpha val="22000"/>
+              </a:srgbClr>
+            </a:outerShdw>
+          </a:effectLst>
         </p:spPr>
       </p:pic>
+      <p:sp>
+        <p:nvSpPr>
+          <p:cNvPr id="18" name="Text 12"/>
+          <p:cNvSpPr txBox="1"/>
+          <p:nvPr/>
+        </p:nvSpPr>
+        <p:spPr>
+          <a:xfrm>
+            <a:off x="9121140" y="6236208"/>
+            <a:ext cx="2286000" cy="256032"/>
+          </a:xfrm>
+          <a:prstGeom prst="rect">
+            <a:avLst/>
+          </a:prstGeom>
+          <a:noFill/>
+          <a:ln/>
+        </p:spPr>
+        <p:txBody>
+          <a:bodyPr wrap="square" lIns="0" tIns="0" rIns="0" bIns="0" rtlCol="0" anchor="ctr"/>
+          <a:lstStyle/>
+          <a:p>
+            <a:pPr algn="ctr" indent="0" marL="0">
+              <a:buNone/>
+            </a:pPr>
+            <a:r>
+              <a:rPr lang="en-US" sz="1200" b="1" dirty="0">
+                <a:solidFill>
+                  <a:srgbClr val="1A1B2E"/>
+                </a:solidFill>
+                <a:latin typeface="Calibri" pitchFamily="34" charset="0"/>
+                <a:ea typeface="Calibri" pitchFamily="34" charset="-122"/>
+                <a:cs typeface="Calibri" pitchFamily="34" charset="-120"/>
+              </a:rPr>
+              <a:t>Add — one time</a:t>
+            </a:r>
+            <a:endParaRPr lang="en-US" sz="1200" dirty="0"/>
+          </a:p>
+        </p:txBody>
+      </p:sp>
+      <p:sp>
+        <p:nvSpPr>
+          <p:cNvPr id="19" name="Text 13"/>
+          <p:cNvSpPr txBox="1"/>
+          <p:nvPr/>
+        </p:nvSpPr>
+        <p:spPr>
+          <a:xfrm>
+            <a:off x="9011412" y="6492240"/>
+            <a:ext cx="2505456" cy="384048"/>
+          </a:xfrm>
+          <a:prstGeom prst="rect">
+            <a:avLst/>
+          </a:prstGeom>
+          <a:noFill/>
+          <a:ln/>
+        </p:spPr>
+        <p:txBody>
+          <a:bodyPr wrap="square" lIns="0" tIns="0" rIns="0" bIns="0" rtlCol="0" anchor="ctr"/>
+          <a:lstStyle/>
+          <a:p>
+            <a:pPr algn="ctr" indent="0" marL="0">
+              <a:buNone/>
+            </a:pPr>
+            <a:r>
+              <a:rPr lang="en-US" sz="1000" dirty="0">
+                <a:solidFill>
+                  <a:srgbClr val="6B6F80"/>
+                </a:solidFill>
+                <a:latin typeface="Calibri" pitchFamily="34" charset="0"/>
+                <a:ea typeface="Calibri" pitchFamily="34" charset="-122"/>
+                <a:cs typeface="Calibri" pitchFamily="34" charset="-120"/>
+              </a:rPr>
+              <a:t>Same form, one question decides</a:t>
+            </a:r>
+            <a:endParaRPr lang="en-US" sz="1000" dirty="0"/>
+          </a:p>
+        </p:txBody>
+      </p:sp>
     </p:spTree>
   </p:cSld>
   <p:clrMapOvr>
@@ -1751,6 +2701,13 @@
 <file path=ppt/slides/slide4.xml><?xml version="1.0" encoding="utf-8"?>
 <p:sld xmlns:a="http://schemas.openxmlformats.org/drawingml/2006/main" xmlns:r="http://schemas.openxmlformats.org/officeDocument/2006/relationships" xmlns:p="http://schemas.openxmlformats.org/presentationml/2006/main">
   <p:cSld name="Slide 4">
+    <p:bg>
+      <p:bgPr>
+        <a:solidFill>
+          <a:srgbClr val="FFFFFF"/>
+        </a:solidFill>
+      </p:bgPr>
+    </p:bg>
     <p:spTree>
       <p:nvGrpSpPr>
         <p:cNvPr id="1" name=""/>
@@ -1765,9 +2722,114 @@
           <a:chExt cx="0" cy="0"/>
         </a:xfrm>
       </p:grpSpPr>
+      <p:sp>
+        <p:nvSpPr>
+          <p:cNvPr id="2" name="Text 0"/>
+          <p:cNvSpPr txBox="1"/>
+          <p:nvPr/>
+        </p:nvSpPr>
+        <p:spPr>
+          <a:xfrm>
+            <a:off x="731520" y="292608"/>
+            <a:ext cx="10698480" cy="502920"/>
+          </a:xfrm>
+          <a:prstGeom prst="rect">
+            <a:avLst/>
+          </a:prstGeom>
+          <a:noFill/>
+          <a:ln/>
+        </p:spPr>
+        <p:txBody>
+          <a:bodyPr wrap="square" lIns="0" tIns="0" rIns="0" bIns="0" rtlCol="0" anchor="ctr"/>
+          <a:lstStyle/>
+          <a:p>
+            <a:pPr indent="0" marL="0">
+              <a:buNone/>
+            </a:pPr>
+            <a:r>
+              <a:rPr lang="en-US" sz="3400" b="1" dirty="0">
+                <a:solidFill>
+                  <a:srgbClr val="1A1B2E"/>
+                </a:solidFill>
+                <a:latin typeface="Calibri" pitchFamily="34" charset="0"/>
+                <a:ea typeface="Calibri" pitchFamily="34" charset="-122"/>
+                <a:cs typeface="Calibri" pitchFamily="34" charset="-120"/>
+              </a:rPr>
+              <a:t>Busy, away, and whose turn</a:t>
+            </a:r>
+            <a:endParaRPr lang="en-US" sz="3400" dirty="0"/>
+          </a:p>
+        </p:txBody>
+      </p:sp>
+      <p:sp>
+        <p:nvSpPr>
+          <p:cNvPr id="3" name="Text 1"/>
+          <p:cNvSpPr txBox="1"/>
+          <p:nvPr/>
+        </p:nvSpPr>
+        <p:spPr>
+          <a:xfrm>
+            <a:off x="758952" y="786384"/>
+            <a:ext cx="10698480" cy="329184"/>
+          </a:xfrm>
+          <a:prstGeom prst="rect">
+            <a:avLst/>
+          </a:prstGeom>
+          <a:noFill/>
+          <a:ln/>
+        </p:spPr>
+        <p:txBody>
+          <a:bodyPr wrap="square" lIns="0" tIns="0" rIns="0" bIns="0" rtlCol="0" anchor="ctr"/>
+          <a:lstStyle/>
+          <a:p>
+            <a:pPr indent="0" marL="0">
+              <a:buNone/>
+            </a:pPr>
+            <a:r>
+              <a:rPr lang="en-US" sz="1300" dirty="0">
+                <a:solidFill>
+                  <a:srgbClr val="6B6F80"/>
+                </a:solidFill>
+                <a:latin typeface="Calibri" pitchFamily="34" charset="0"/>
+                <a:ea typeface="Calibri" pitchFamily="34" charset="-122"/>
+                <a:cs typeface="Calibri" pitchFamily="34" charset="-120"/>
+              </a:rPr>
+              <a:t>The only two exits from an assigned chore besides doing it. Neither cancels the turn you owe.</a:t>
+            </a:r>
+            <a:endParaRPr lang="en-US" sz="1300" dirty="0"/>
+          </a:p>
+        </p:txBody>
+      </p:sp>
+      <p:sp>
+        <p:nvSpPr>
+          <p:cNvPr id="4" name="Shape 2"/>
+          <p:cNvSpPr/>
+          <p:nvPr/>
+        </p:nvSpPr>
+        <p:spPr>
+          <a:xfrm>
+            <a:off x="754380" y="1188720"/>
+            <a:ext cx="2286000" cy="4937760"/>
+          </a:xfrm>
+          <a:prstGeom prst="roundRect">
+            <a:avLst>
+              <a:gd name="adj" fmla="val 4800"/>
+            </a:avLst>
+          </a:prstGeom>
+          <a:solidFill>
+            <a:srgbClr val="F4F5FA"/>
+          </a:solidFill>
+          <a:ln w="12700">
+            <a:solidFill>
+              <a:srgbClr val="E4E6F0"/>
+            </a:solidFill>
+            <a:prstDash val="solid"/>
+          </a:ln>
+        </p:spPr>
+      </p:sp>
       <p:pic>
         <p:nvPicPr>
-          <p:cNvPr id="2" name="Image 0" descr="preencoded.png">    </p:cNvPr>
+          <p:cNvPr id="5" name="Image 0" descr="C:\Users\babak\AppData\Local\Temp\claude\D--0A-study-A0-0-ACSAI-0-sem-4-AI-ML-ML-unit-2\13f11f40-7bf3-4475-bdab-4aadda964c01\scratchpad\shots\14-away-dialog.png">    </p:cNvPr>
           <p:cNvPicPr>
             <a:picLocks noChangeAspect="1"/>
           </p:cNvPicPr>
@@ -1781,17 +2843,129 @@
         </p:blipFill>
         <p:spPr>
           <a:xfrm>
-            <a:off x="0" y="0"/>
-            <a:ext cx="9144000" cy="5143500"/>
-          </a:xfrm>
-          <a:prstGeom prst="rect">
-            <a:avLst/>
-          </a:prstGeom>
+            <a:off x="868680" y="1353312"/>
+            <a:ext cx="2057400" cy="4572000"/>
+          </a:xfrm>
+          <a:prstGeom prst="rect">
+            <a:avLst/>
+          </a:prstGeom>
+          <a:effectLst>
+            <a:outerShdw sx="100000" sy="100000" kx="0" ky="0" algn="bl" rotWithShape="0" blurRad="127000" dist="38100" dir="5400000">
+              <a:srgbClr val="1A1B2E">
+                <a:alpha val="22000"/>
+              </a:srgbClr>
+            </a:outerShdw>
+          </a:effectLst>
         </p:spPr>
       </p:pic>
+      <p:sp>
+        <p:nvSpPr>
+          <p:cNvPr id="6" name="Text 3"/>
+          <p:cNvSpPr txBox="1"/>
+          <p:nvPr/>
+        </p:nvSpPr>
+        <p:spPr>
+          <a:xfrm>
+            <a:off x="754380" y="6236208"/>
+            <a:ext cx="2286000" cy="256032"/>
+          </a:xfrm>
+          <a:prstGeom prst="rect">
+            <a:avLst/>
+          </a:prstGeom>
+          <a:noFill/>
+          <a:ln/>
+        </p:spPr>
+        <p:txBody>
+          <a:bodyPr wrap="square" lIns="0" tIns="0" rIns="0" bIns="0" rtlCol="0" anchor="ctr"/>
+          <a:lstStyle/>
+          <a:p>
+            <a:pPr algn="ctr" indent="0" marL="0">
+              <a:buNone/>
+            </a:pPr>
+            <a:r>
+              <a:rPr lang="en-US" sz="1200" b="1" dirty="0">
+                <a:solidFill>
+                  <a:srgbClr val="1A1B2E"/>
+                </a:solidFill>
+                <a:latin typeface="Calibri" pitchFamily="34" charset="0"/>
+                <a:ea typeface="Calibri" pitchFamily="34" charset="-122"/>
+                <a:cs typeface="Calibri" pitchFamily="34" charset="-120"/>
+              </a:rPr>
+              <a:t>Going away</a:t>
+            </a:r>
+            <a:endParaRPr lang="en-US" sz="1200" dirty="0"/>
+          </a:p>
+        </p:txBody>
+      </p:sp>
+      <p:sp>
+        <p:nvSpPr>
+          <p:cNvPr id="7" name="Text 4"/>
+          <p:cNvSpPr txBox="1"/>
+          <p:nvPr/>
+        </p:nvSpPr>
+        <p:spPr>
+          <a:xfrm>
+            <a:off x="644652" y="6492240"/>
+            <a:ext cx="2505456" cy="384048"/>
+          </a:xfrm>
+          <a:prstGeom prst="rect">
+            <a:avLst/>
+          </a:prstGeom>
+          <a:noFill/>
+          <a:ln/>
+        </p:spPr>
+        <p:txBody>
+          <a:bodyPr wrap="square" lIns="0" tIns="0" rIns="0" bIns="0" rtlCol="0" anchor="ctr"/>
+          <a:lstStyle/>
+          <a:p>
+            <a:pPr algn="ctr" indent="0" marL="0">
+              <a:buNone/>
+            </a:pPr>
+            <a:r>
+              <a:rPr lang="en-US" sz="1000" dirty="0">
+                <a:solidFill>
+                  <a:srgbClr val="6B6F80"/>
+                </a:solidFill>
+                <a:latin typeface="Calibri" pitchFamily="34" charset="0"/>
+                <a:ea typeface="Calibri" pitchFamily="34" charset="-122"/>
+                <a:cs typeface="Calibri" pitchFamily="34" charset="-120"/>
+              </a:rPr>
+              <a:t>States the rule before you commit</a:t>
+            </a:r>
+            <a:endParaRPr lang="en-US" sz="1000" dirty="0"/>
+          </a:p>
+        </p:txBody>
+      </p:sp>
+      <p:sp>
+        <p:nvSpPr>
+          <p:cNvPr id="8" name="Shape 5"/>
+          <p:cNvSpPr/>
+          <p:nvPr/>
+        </p:nvSpPr>
+        <p:spPr>
+          <a:xfrm>
+            <a:off x="3543300" y="1188720"/>
+            <a:ext cx="2286000" cy="4937760"/>
+          </a:xfrm>
+          <a:prstGeom prst="roundRect">
+            <a:avLst>
+              <a:gd name="adj" fmla="val 4800"/>
+            </a:avLst>
+          </a:prstGeom>
+          <a:solidFill>
+            <a:srgbClr val="F4F5FA"/>
+          </a:solidFill>
+          <a:ln w="12700">
+            <a:solidFill>
+              <a:srgbClr val="E4E6F0"/>
+            </a:solidFill>
+            <a:prstDash val="solid"/>
+          </a:ln>
+        </p:spPr>
+      </p:sp>
       <p:pic>
         <p:nvPicPr>
-          <p:cNvPr id="3" name="Image 1" descr="preencoded.png">    </p:cNvPr>
+          <p:cNvPr id="9" name="Image 1" descr="C:\Users\babak\AppData\Local\Temp\claude\D--0A-study-A0-0-ACSAI-0-sem-4-AI-ML-ML-unit-2\13f11f40-7bf3-4475-bdab-4aadda964c01\scratchpad\shots\15-away-banner.png">    </p:cNvPr>
           <p:cNvPicPr>
             <a:picLocks noChangeAspect="1"/>
           </p:cNvPicPr>
@@ -1805,17 +2979,129 @@
         </p:blipFill>
         <p:spPr>
           <a:xfrm>
-            <a:off x="9124950" y="0"/>
-            <a:ext cx="9163050" cy="5143500"/>
-          </a:xfrm>
-          <a:prstGeom prst="rect">
-            <a:avLst/>
-          </a:prstGeom>
+            <a:off x="3657600" y="1353312"/>
+            <a:ext cx="2057400" cy="4572000"/>
+          </a:xfrm>
+          <a:prstGeom prst="rect">
+            <a:avLst/>
+          </a:prstGeom>
+          <a:effectLst>
+            <a:outerShdw sx="100000" sy="100000" kx="0" ky="0" algn="bl" rotWithShape="0" blurRad="127000" dist="38100" dir="5400000">
+              <a:srgbClr val="1A1B2E">
+                <a:alpha val="22000"/>
+              </a:srgbClr>
+            </a:outerShdw>
+          </a:effectLst>
         </p:spPr>
       </p:pic>
+      <p:sp>
+        <p:nvSpPr>
+          <p:cNvPr id="10" name="Text 6"/>
+          <p:cNvSpPr txBox="1"/>
+          <p:nvPr/>
+        </p:nvSpPr>
+        <p:spPr>
+          <a:xfrm>
+            <a:off x="3543300" y="6236208"/>
+            <a:ext cx="2286000" cy="256032"/>
+          </a:xfrm>
+          <a:prstGeom prst="rect">
+            <a:avLst/>
+          </a:prstGeom>
+          <a:noFill/>
+          <a:ln/>
+        </p:spPr>
+        <p:txBody>
+          <a:bodyPr wrap="square" lIns="0" tIns="0" rIns="0" bIns="0" rtlCol="0" anchor="ctr"/>
+          <a:lstStyle/>
+          <a:p>
+            <a:pPr algn="ctr" indent="0" marL="0">
+              <a:buNone/>
+            </a:pPr>
+            <a:r>
+              <a:rPr lang="en-US" sz="1200" b="1" dirty="0">
+                <a:solidFill>
+                  <a:srgbClr val="1A1B2E"/>
+                </a:solidFill>
+                <a:latin typeface="Calibri" pitchFamily="34" charset="0"/>
+                <a:ea typeface="Calibri" pitchFamily="34" charset="-122"/>
+                <a:cs typeface="Calibri" pitchFamily="34" charset="-120"/>
+              </a:rPr>
+              <a:t>While you are away</a:t>
+            </a:r>
+            <a:endParaRPr lang="en-US" sz="1200" dirty="0"/>
+          </a:p>
+        </p:txBody>
+      </p:sp>
+      <p:sp>
+        <p:nvSpPr>
+          <p:cNvPr id="11" name="Text 7"/>
+          <p:cNvSpPr txBox="1"/>
+          <p:nvPr/>
+        </p:nvSpPr>
+        <p:spPr>
+          <a:xfrm>
+            <a:off x="3433572" y="6492240"/>
+            <a:ext cx="2505456" cy="384048"/>
+          </a:xfrm>
+          <a:prstGeom prst="rect">
+            <a:avLst/>
+          </a:prstGeom>
+          <a:noFill/>
+          <a:ln/>
+        </p:spPr>
+        <p:txBody>
+          <a:bodyPr wrap="square" lIns="0" tIns="0" rIns="0" bIns="0" rtlCol="0" anchor="ctr"/>
+          <a:lstStyle/>
+          <a:p>
+            <a:pPr algn="ctr" indent="0" marL="0">
+              <a:buNone/>
+            </a:pPr>
+            <a:r>
+              <a:rPr lang="en-US" sz="1000" dirty="0">
+                <a:solidFill>
+                  <a:srgbClr val="6B6F80"/>
+                </a:solidFill>
+                <a:latin typeface="Calibri" pitchFamily="34" charset="0"/>
+                <a:ea typeface="Calibri" pitchFamily="34" charset="-122"/>
+                <a:cs typeface="Calibri" pitchFamily="34" charset="-120"/>
+              </a:rPr>
+              <a:t>Visible on your own board, with a way back</a:t>
+            </a:r>
+            <a:endParaRPr lang="en-US" sz="1000" dirty="0"/>
+          </a:p>
+        </p:txBody>
+      </p:sp>
+      <p:sp>
+        <p:nvSpPr>
+          <p:cNvPr id="12" name="Shape 8"/>
+          <p:cNvSpPr/>
+          <p:nvPr/>
+        </p:nvSpPr>
+        <p:spPr>
+          <a:xfrm>
+            <a:off x="6332220" y="1188720"/>
+            <a:ext cx="2286000" cy="4937760"/>
+          </a:xfrm>
+          <a:prstGeom prst="roundRect">
+            <a:avLst>
+              <a:gd name="adj" fmla="val 4800"/>
+            </a:avLst>
+          </a:prstGeom>
+          <a:solidFill>
+            <a:srgbClr val="F4F5FA"/>
+          </a:solidFill>
+          <a:ln w="12700">
+            <a:solidFill>
+              <a:srgbClr val="E4E6F0"/>
+            </a:solidFill>
+            <a:prstDash val="solid"/>
+          </a:ln>
+        </p:spPr>
+      </p:sp>
       <p:pic>
         <p:nvPicPr>
-          <p:cNvPr id="4" name="Image 2" descr="preencoded.png">    </p:cNvPr>
+          <p:cNvPr id="13" name="Image 2" descr="C:\Users\babak\AppData\Local\Temp\claude\D--0A-study-A0-0-ACSAI-0-sem-4-AI-ML-ML-unit-2\13f11f40-7bf3-4475-bdab-4aadda964c01\scratchpad\shots\16-after-pass.png">    </p:cNvPr>
           <p:cNvPicPr>
             <a:picLocks noChangeAspect="1"/>
           </p:cNvPicPr>
@@ -1829,17 +3115,129 @@
         </p:blipFill>
         <p:spPr>
           <a:xfrm>
-            <a:off x="0" y="5124450"/>
-            <a:ext cx="9144000" cy="5162550"/>
-          </a:xfrm>
-          <a:prstGeom prst="rect">
-            <a:avLst/>
-          </a:prstGeom>
+            <a:off x="6446520" y="1353312"/>
+            <a:ext cx="2057400" cy="4572000"/>
+          </a:xfrm>
+          <a:prstGeom prst="rect">
+            <a:avLst/>
+          </a:prstGeom>
+          <a:effectLst>
+            <a:outerShdw sx="100000" sy="100000" kx="0" ky="0" algn="bl" rotWithShape="0" blurRad="127000" dist="38100" dir="5400000">
+              <a:srgbClr val="1A1B2E">
+                <a:alpha val="22000"/>
+              </a:srgbClr>
+            </a:outerShdw>
+          </a:effectLst>
         </p:spPr>
       </p:pic>
+      <p:sp>
+        <p:nvSpPr>
+          <p:cNvPr id="14" name="Text 9"/>
+          <p:cNvSpPr txBox="1"/>
+          <p:nvPr/>
+        </p:nvSpPr>
+        <p:spPr>
+          <a:xfrm>
+            <a:off x="6332220" y="6236208"/>
+            <a:ext cx="2286000" cy="256032"/>
+          </a:xfrm>
+          <a:prstGeom prst="rect">
+            <a:avLst/>
+          </a:prstGeom>
+          <a:noFill/>
+          <a:ln/>
+        </p:spPr>
+        <p:txBody>
+          <a:bodyPr wrap="square" lIns="0" tIns="0" rIns="0" bIns="0" rtlCol="0" anchor="ctr"/>
+          <a:lstStyle/>
+          <a:p>
+            <a:pPr algn="ctr" indent="0" marL="0">
+              <a:buNone/>
+            </a:pPr>
+            <a:r>
+              <a:rPr lang="en-US" sz="1200" b="1" dirty="0">
+                <a:solidFill>
+                  <a:srgbClr val="1A1B2E"/>
+                </a:solidFill>
+                <a:latin typeface="Calibri" pitchFamily="34" charset="0"/>
+                <a:ea typeface="Calibri" pitchFamily="34" charset="-122"/>
+                <a:cs typeface="Calibri" pitchFamily="34" charset="-120"/>
+              </a:rPr>
+              <a:t>After a busy pass</a:t>
+            </a:r>
+            <a:endParaRPr lang="en-US" sz="1200" dirty="0"/>
+          </a:p>
+        </p:txBody>
+      </p:sp>
+      <p:sp>
+        <p:nvSpPr>
+          <p:cNvPr id="15" name="Text 10"/>
+          <p:cNvSpPr txBox="1"/>
+          <p:nvPr/>
+        </p:nvSpPr>
+        <p:spPr>
+          <a:xfrm>
+            <a:off x="6222492" y="6492240"/>
+            <a:ext cx="2505456" cy="384048"/>
+          </a:xfrm>
+          <a:prstGeom prst="rect">
+            <a:avLst/>
+          </a:prstGeom>
+          <a:noFill/>
+          <a:ln/>
+        </p:spPr>
+        <p:txBody>
+          <a:bodyPr wrap="square" lIns="0" tIns="0" rIns="0" bIns="0" rtlCol="0" anchor="ctr"/>
+          <a:lstStyle/>
+          <a:p>
+            <a:pPr algn="ctr" indent="0" marL="0">
+              <a:buNone/>
+            </a:pPr>
+            <a:r>
+              <a:rPr lang="en-US" sz="1000" dirty="0">
+                <a:solidFill>
+                  <a:srgbClr val="6B6F80"/>
+                </a:solidFill>
+                <a:latin typeface="Calibri" pitchFamily="34" charset="0"/>
+                <a:ea typeface="Calibri" pitchFamily="34" charset="-122"/>
+                <a:cs typeface="Calibri" pitchFamily="34" charset="-120"/>
+              </a:rPr>
+              <a:t>It moves on; it comes back to you next cycle</a:t>
+            </a:r>
+            <a:endParaRPr lang="en-US" sz="1000" dirty="0"/>
+          </a:p>
+        </p:txBody>
+      </p:sp>
+      <p:sp>
+        <p:nvSpPr>
+          <p:cNvPr id="16" name="Shape 11"/>
+          <p:cNvSpPr/>
+          <p:nvPr/>
+        </p:nvSpPr>
+        <p:spPr>
+          <a:xfrm>
+            <a:off x="9121140" y="1188720"/>
+            <a:ext cx="2286000" cy="4937760"/>
+          </a:xfrm>
+          <a:prstGeom prst="roundRect">
+            <a:avLst>
+              <a:gd name="adj" fmla="val 4800"/>
+            </a:avLst>
+          </a:prstGeom>
+          <a:solidFill>
+            <a:srgbClr val="F4F5FA"/>
+          </a:solidFill>
+          <a:ln w="12700">
+            <a:solidFill>
+              <a:srgbClr val="E4E6F0"/>
+            </a:solidFill>
+            <a:prstDash val="solid"/>
+          </a:ln>
+        </p:spPr>
+      </p:sp>
       <p:pic>
         <p:nvPicPr>
-          <p:cNvPr id="5" name="Image 3" descr="preencoded.png">    </p:cNvPr>
+          <p:cNvPr id="17" name="Image 3" descr="C:\Users\babak\AppData\Local\Temp\claude\D--0A-study-A0-0-ACSAI-0-sem-4-AI-ML-ML-unit-2\13f11f40-7bf3-4475-bdab-4aadda964c01\scratchpad\shots\09-members.png">    </p:cNvPr>
           <p:cNvPicPr>
             <a:picLocks noChangeAspect="1"/>
           </p:cNvPicPr>
@@ -1853,14 +3251,99 @@
         </p:blipFill>
         <p:spPr>
           <a:xfrm>
-            <a:off x="9124950" y="5124450"/>
-            <a:ext cx="9163050" cy="5162550"/>
-          </a:xfrm>
-          <a:prstGeom prst="rect">
-            <a:avLst/>
-          </a:prstGeom>
+            <a:off x="9235440" y="1353312"/>
+            <a:ext cx="2057400" cy="4572000"/>
+          </a:xfrm>
+          <a:prstGeom prst="rect">
+            <a:avLst/>
+          </a:prstGeom>
+          <a:effectLst>
+            <a:outerShdw sx="100000" sy="100000" kx="0" ky="0" algn="bl" rotWithShape="0" blurRad="127000" dist="38100" dir="5400000">
+              <a:srgbClr val="1A1B2E">
+                <a:alpha val="22000"/>
+              </a:srgbClr>
+            </a:outerShdw>
+          </a:effectLst>
         </p:spPr>
       </p:pic>
+      <p:sp>
+        <p:nvSpPr>
+          <p:cNvPr id="18" name="Text 12"/>
+          <p:cNvSpPr txBox="1"/>
+          <p:nvPr/>
+        </p:nvSpPr>
+        <p:spPr>
+          <a:xfrm>
+            <a:off x="9121140" y="6236208"/>
+            <a:ext cx="2286000" cy="256032"/>
+          </a:xfrm>
+          <a:prstGeom prst="rect">
+            <a:avLst/>
+          </a:prstGeom>
+          <a:noFill/>
+          <a:ln/>
+        </p:spPr>
+        <p:txBody>
+          <a:bodyPr wrap="square" lIns="0" tIns="0" rIns="0" bIns="0" rtlCol="0" anchor="ctr"/>
+          <a:lstStyle/>
+          <a:p>
+            <a:pPr algn="ctr" indent="0" marL="0">
+              <a:buNone/>
+            </a:pPr>
+            <a:r>
+              <a:rPr lang="en-US" sz="1200" b="1" dirty="0">
+                <a:solidFill>
+                  <a:srgbClr val="1A1B2E"/>
+                </a:solidFill>
+                <a:latin typeface="Calibri" pitchFamily="34" charset="0"/>
+                <a:ea typeface="Calibri" pitchFamily="34" charset="-122"/>
+                <a:cs typeface="Calibri" pitchFamily="34" charset="-120"/>
+              </a:rPr>
+              <a:t>The household</a:t>
+            </a:r>
+            <a:endParaRPr lang="en-US" sz="1200" dirty="0"/>
+          </a:p>
+        </p:txBody>
+      </p:sp>
+      <p:sp>
+        <p:nvSpPr>
+          <p:cNvPr id="19" name="Text 13"/>
+          <p:cNvSpPr txBox="1"/>
+          <p:nvPr/>
+        </p:nvSpPr>
+        <p:spPr>
+          <a:xfrm>
+            <a:off x="9011412" y="6492240"/>
+            <a:ext cx="2505456" cy="384048"/>
+          </a:xfrm>
+          <a:prstGeom prst="rect">
+            <a:avLst/>
+          </a:prstGeom>
+          <a:noFill/>
+          <a:ln/>
+        </p:spPr>
+        <p:txBody>
+          <a:bodyPr wrap="square" lIns="0" tIns="0" rIns="0" bIns="0" rtlCol="0" anchor="ctr"/>
+          <a:lstStyle/>
+          <a:p>
+            <a:pPr algn="ctr" indent="0" marL="0">
+              <a:buNone/>
+            </a:pPr>
+            <a:r>
+              <a:rPr lang="en-US" sz="1000" dirty="0">
+                <a:solidFill>
+                  <a:srgbClr val="6B6F80"/>
+                </a:solidFill>
+                <a:latin typeface="Calibri" pitchFamily="34" charset="0"/>
+                <a:ea typeface="Calibri" pitchFamily="34" charset="-122"/>
+                <a:cs typeface="Calibri" pitchFamily="34" charset="-120"/>
+              </a:rPr>
+              <a:t>Away is shown, never hidden</a:t>
+            </a:r>
+            <a:endParaRPr lang="en-US" sz="1000" dirty="0"/>
+          </a:p>
+        </p:txBody>
+      </p:sp>
     </p:spTree>
   </p:cSld>
   <p:clrMapOvr>
@@ -1872,6 +3355,13 @@
 <file path=ppt/slides/slide5.xml><?xml version="1.0" encoding="utf-8"?>
 <p:sld xmlns:a="http://schemas.openxmlformats.org/drawingml/2006/main" xmlns:r="http://schemas.openxmlformats.org/officeDocument/2006/relationships" xmlns:p="http://schemas.openxmlformats.org/presentationml/2006/main">
   <p:cSld name="Slide 5">
+    <p:bg>
+      <p:bgPr>
+        <a:solidFill>
+          <a:srgbClr val="FFFFFF"/>
+        </a:solidFill>
+      </p:bgPr>
+    </p:bg>
     <p:spTree>
       <p:nvGrpSpPr>
         <p:cNvPr id="1" name=""/>
@@ -1886,9 +3376,114 @@
           <a:chExt cx="0" cy="0"/>
         </a:xfrm>
       </p:grpSpPr>
+      <p:sp>
+        <p:nvSpPr>
+          <p:cNvPr id="2" name="Text 0"/>
+          <p:cNvSpPr txBox="1"/>
+          <p:nvPr/>
+        </p:nvSpPr>
+        <p:spPr>
+          <a:xfrm>
+            <a:off x="731520" y="292608"/>
+            <a:ext cx="10698480" cy="502920"/>
+          </a:xfrm>
+          <a:prstGeom prst="rect">
+            <a:avLst/>
+          </a:prstGeom>
+          <a:noFill/>
+          <a:ln/>
+        </p:spPr>
+        <p:txBody>
+          <a:bodyPr wrap="square" lIns="0" tIns="0" rIns="0" bIns="0" rtlCol="0" anchor="ctr"/>
+          <a:lstStyle/>
+          <a:p>
+            <a:pPr indent="0" marL="0">
+              <a:buNone/>
+            </a:pPr>
+            <a:r>
+              <a:rPr lang="en-US" sz="3400" b="1" dirty="0">
+                <a:solidFill>
+                  <a:srgbClr val="1A1B2E"/>
+                </a:solidFill>
+                <a:latin typeface="Calibri" pitchFamily="34" charset="0"/>
+                <a:ea typeface="Calibri" pitchFamily="34" charset="-122"/>
+                <a:cs typeface="Calibri" pitchFamily="34" charset="-120"/>
+              </a:rPr>
+              <a:t>What has happened</a:t>
+            </a:r>
+            <a:endParaRPr lang="en-US" sz="3400" dirty="0"/>
+          </a:p>
+        </p:txBody>
+      </p:sp>
+      <p:sp>
+        <p:nvSpPr>
+          <p:cNvPr id="3" name="Text 1"/>
+          <p:cNvSpPr txBox="1"/>
+          <p:nvPr/>
+        </p:nvSpPr>
+        <p:spPr>
+          <a:xfrm>
+            <a:off x="758952" y="786384"/>
+            <a:ext cx="10698480" cy="329184"/>
+          </a:xfrm>
+          <a:prstGeom prst="rect">
+            <a:avLst/>
+          </a:prstGeom>
+          <a:noFill/>
+          <a:ln/>
+        </p:spPr>
+        <p:txBody>
+          <a:bodyPr wrap="square" lIns="0" tIns="0" rIns="0" bIns="0" rtlCol="0" anchor="ctr"/>
+          <a:lstStyle/>
+          <a:p>
+            <a:pPr indent="0" marL="0">
+              <a:buNone/>
+            </a:pPr>
+            <a:r>
+              <a:rPr lang="en-US" sz="1300" dirty="0">
+                <a:solidFill>
+                  <a:srgbClr val="6B6F80"/>
+                </a:solidFill>
+                <a:latin typeface="Calibri" pitchFamily="34" charset="0"/>
+                <a:ea typeface="Calibri" pitchFamily="34" charset="-122"/>
+                <a:cs typeface="Calibri" pitchFamily="34" charset="-120"/>
+              </a:rPr>
+              <a:t>A record the household can point at. It counts, it does not rank, and it names no one as late.</a:t>
+            </a:r>
+            <a:endParaRPr lang="en-US" sz="1300" dirty="0"/>
+          </a:p>
+        </p:txBody>
+      </p:sp>
+      <p:sp>
+        <p:nvSpPr>
+          <p:cNvPr id="4" name="Shape 2"/>
+          <p:cNvSpPr/>
+          <p:nvPr/>
+        </p:nvSpPr>
+        <p:spPr>
+          <a:xfrm>
+            <a:off x="2148840" y="1188720"/>
+            <a:ext cx="2286000" cy="4937760"/>
+          </a:xfrm>
+          <a:prstGeom prst="roundRect">
+            <a:avLst>
+              <a:gd name="adj" fmla="val 4800"/>
+            </a:avLst>
+          </a:prstGeom>
+          <a:solidFill>
+            <a:srgbClr val="F4F5FA"/>
+          </a:solidFill>
+          <a:ln w="12700">
+            <a:solidFill>
+              <a:srgbClr val="E4E6F0"/>
+            </a:solidFill>
+            <a:prstDash val="solid"/>
+          </a:ln>
+        </p:spPr>
+      </p:sp>
       <p:pic>
         <p:nvPicPr>
-          <p:cNvPr id="2" name="Image 0" descr="preencoded.png">    </p:cNvPr>
+          <p:cNvPr id="5" name="Image 0" descr="C:\Users\babak\AppData\Local\Temp\claude\D--0A-study-A0-0-ACSAI-0-sem-4-AI-ML-ML-unit-2\13f11f40-7bf3-4475-bdab-4aadda964c01\scratchpad\shots\06-chore-history.png">    </p:cNvPr>
           <p:cNvPicPr>
             <a:picLocks noChangeAspect="1"/>
           </p:cNvPicPr>
@@ -1902,17 +3497,129 @@
         </p:blipFill>
         <p:spPr>
           <a:xfrm>
-            <a:off x="0" y="0"/>
-            <a:ext cx="9144000" cy="5143500"/>
-          </a:xfrm>
-          <a:prstGeom prst="rect">
-            <a:avLst/>
-          </a:prstGeom>
+            <a:off x="2263140" y="1353312"/>
+            <a:ext cx="2057400" cy="4572000"/>
+          </a:xfrm>
+          <a:prstGeom prst="rect">
+            <a:avLst/>
+          </a:prstGeom>
+          <a:effectLst>
+            <a:outerShdw sx="100000" sy="100000" kx="0" ky="0" algn="bl" rotWithShape="0" blurRad="127000" dist="38100" dir="5400000">
+              <a:srgbClr val="1A1B2E">
+                <a:alpha val="22000"/>
+              </a:srgbClr>
+            </a:outerShdw>
+          </a:effectLst>
         </p:spPr>
       </p:pic>
+      <p:sp>
+        <p:nvSpPr>
+          <p:cNvPr id="6" name="Text 3"/>
+          <p:cNvSpPr txBox="1"/>
+          <p:nvPr/>
+        </p:nvSpPr>
+        <p:spPr>
+          <a:xfrm>
+            <a:off x="2148840" y="6236208"/>
+            <a:ext cx="2286000" cy="256032"/>
+          </a:xfrm>
+          <a:prstGeom prst="rect">
+            <a:avLst/>
+          </a:prstGeom>
+          <a:noFill/>
+          <a:ln/>
+        </p:spPr>
+        <p:txBody>
+          <a:bodyPr wrap="square" lIns="0" tIns="0" rIns="0" bIns="0" rtlCol="0" anchor="ctr"/>
+          <a:lstStyle/>
+          <a:p>
+            <a:pPr algn="ctr" indent="0" marL="0">
+              <a:buNone/>
+            </a:pPr>
+            <a:r>
+              <a:rPr lang="en-US" sz="1200" b="1" dirty="0">
+                <a:solidFill>
+                  <a:srgbClr val="1A1B2E"/>
+                </a:solidFill>
+                <a:latin typeface="Calibri" pitchFamily="34" charset="0"/>
+                <a:ea typeface="Calibri" pitchFamily="34" charset="-122"/>
+                <a:cs typeface="Calibri" pitchFamily="34" charset="-120"/>
+              </a:rPr>
+              <a:t>One chore's history</a:t>
+            </a:r>
+            <a:endParaRPr lang="en-US" sz="1200" dirty="0"/>
+          </a:p>
+        </p:txBody>
+      </p:sp>
+      <p:sp>
+        <p:nvSpPr>
+          <p:cNvPr id="7" name="Text 4"/>
+          <p:cNvSpPr txBox="1"/>
+          <p:nvPr/>
+        </p:nvSpPr>
+        <p:spPr>
+          <a:xfrm>
+            <a:off x="2039112" y="6492240"/>
+            <a:ext cx="2505456" cy="384048"/>
+          </a:xfrm>
+          <a:prstGeom prst="rect">
+            <a:avLst/>
+          </a:prstGeom>
+          <a:noFill/>
+          <a:ln/>
+        </p:spPr>
+        <p:txBody>
+          <a:bodyPr wrap="square" lIns="0" tIns="0" rIns="0" bIns="0" rtlCol="0" anchor="ctr"/>
+          <a:lstStyle/>
+          <a:p>
+            <a:pPr algn="ctr" indent="0" marL="0">
+              <a:buNone/>
+            </a:pPr>
+            <a:r>
+              <a:rPr lang="en-US" sz="1000" dirty="0">
+                <a:solidFill>
+                  <a:srgbClr val="6B6F80"/>
+                </a:solidFill>
+                <a:latin typeface="Calibri" pitchFamily="34" charset="0"/>
+                <a:ea typeface="Calibri" pitchFamily="34" charset="-122"/>
+                <a:cs typeface="Calibri" pitchFamily="34" charset="-120"/>
+              </a:rPr>
+              <a:t>Two dates, no verdict on either</a:t>
+            </a:r>
+            <a:endParaRPr lang="en-US" sz="1000" dirty="0"/>
+          </a:p>
+        </p:txBody>
+      </p:sp>
+      <p:sp>
+        <p:nvSpPr>
+          <p:cNvPr id="8" name="Shape 5"/>
+          <p:cNvSpPr/>
+          <p:nvPr/>
+        </p:nvSpPr>
+        <p:spPr>
+          <a:xfrm>
+            <a:off x="4937760" y="1188720"/>
+            <a:ext cx="2286000" cy="4937760"/>
+          </a:xfrm>
+          <a:prstGeom prst="roundRect">
+            <a:avLst>
+              <a:gd name="adj" fmla="val 4800"/>
+            </a:avLst>
+          </a:prstGeom>
+          <a:solidFill>
+            <a:srgbClr val="F4F5FA"/>
+          </a:solidFill>
+          <a:ln w="12700">
+            <a:solidFill>
+              <a:srgbClr val="E4E6F0"/>
+            </a:solidFill>
+            <a:prstDash val="solid"/>
+          </a:ln>
+        </p:spPr>
+      </p:sp>
       <p:pic>
         <p:nvPicPr>
-          <p:cNvPr id="3" name="Image 1" descr="preencoded.png">    </p:cNvPr>
+          <p:cNvPr id="9" name="Image 1" descr="C:\Users\babak\AppData\Local\Temp\claude\D--0A-study-A0-0-ACSAI-0-sem-4-AI-ML-ML-unit-2\13f11f40-7bf3-4475-bdab-4aadda964c01\scratchpad\shots\11-group-history.png">    </p:cNvPr>
           <p:cNvPicPr>
             <a:picLocks noChangeAspect="1"/>
           </p:cNvPicPr>
@@ -1926,17 +3633,129 @@
         </p:blipFill>
         <p:spPr>
           <a:xfrm>
-            <a:off x="9124950" y="0"/>
-            <a:ext cx="9163050" cy="5143500"/>
-          </a:xfrm>
-          <a:prstGeom prst="rect">
-            <a:avLst/>
-          </a:prstGeom>
+            <a:off x="5052060" y="1353312"/>
+            <a:ext cx="2057400" cy="4572000"/>
+          </a:xfrm>
+          <a:prstGeom prst="rect">
+            <a:avLst/>
+          </a:prstGeom>
+          <a:effectLst>
+            <a:outerShdw sx="100000" sy="100000" kx="0" ky="0" algn="bl" rotWithShape="0" blurRad="127000" dist="38100" dir="5400000">
+              <a:srgbClr val="1A1B2E">
+                <a:alpha val="22000"/>
+              </a:srgbClr>
+            </a:outerShdw>
+          </a:effectLst>
         </p:spPr>
       </p:pic>
+      <p:sp>
+        <p:nvSpPr>
+          <p:cNvPr id="10" name="Text 6"/>
+          <p:cNvSpPr txBox="1"/>
+          <p:nvPr/>
+        </p:nvSpPr>
+        <p:spPr>
+          <a:xfrm>
+            <a:off x="4937760" y="6236208"/>
+            <a:ext cx="2286000" cy="256032"/>
+          </a:xfrm>
+          <a:prstGeom prst="rect">
+            <a:avLst/>
+          </a:prstGeom>
+          <a:noFill/>
+          <a:ln/>
+        </p:spPr>
+        <p:txBody>
+          <a:bodyPr wrap="square" lIns="0" tIns="0" rIns="0" bIns="0" rtlCol="0" anchor="ctr"/>
+          <a:lstStyle/>
+          <a:p>
+            <a:pPr algn="ctr" indent="0" marL="0">
+              <a:buNone/>
+            </a:pPr>
+            <a:r>
+              <a:rPr lang="en-US" sz="1200" b="1" dirty="0">
+                <a:solidFill>
+                  <a:srgbClr val="1A1B2E"/>
+                </a:solidFill>
+                <a:latin typeface="Calibri" pitchFamily="34" charset="0"/>
+                <a:ea typeface="Calibri" pitchFamily="34" charset="-122"/>
+                <a:cs typeface="Calibri" pitchFamily="34" charset="-120"/>
+              </a:rPr>
+              <a:t>What's been done</a:t>
+            </a:r>
+            <a:endParaRPr lang="en-US" sz="1200" dirty="0"/>
+          </a:p>
+        </p:txBody>
+      </p:sp>
+      <p:sp>
+        <p:nvSpPr>
+          <p:cNvPr id="11" name="Text 7"/>
+          <p:cNvSpPr txBox="1"/>
+          <p:nvPr/>
+        </p:nvSpPr>
+        <p:spPr>
+          <a:xfrm>
+            <a:off x="4828032" y="6492240"/>
+            <a:ext cx="2505456" cy="384048"/>
+          </a:xfrm>
+          <a:prstGeom prst="rect">
+            <a:avLst/>
+          </a:prstGeom>
+          <a:noFill/>
+          <a:ln/>
+        </p:spPr>
+        <p:txBody>
+          <a:bodyPr wrap="square" lIns="0" tIns="0" rIns="0" bIns="0" rtlCol="0" anchor="ctr"/>
+          <a:lstStyle/>
+          <a:p>
+            <a:pPr algn="ctr" indent="0" marL="0">
+              <a:buNone/>
+            </a:pPr>
+            <a:r>
+              <a:rPr lang="en-US" sz="1000" dirty="0">
+                <a:solidFill>
+                  <a:srgbClr val="6B6F80"/>
+                </a:solidFill>
+                <a:latin typeface="Calibri" pitchFamily="34" charset="0"/>
+                <a:ea typeface="Calibri" pitchFamily="34" charset="-122"/>
+                <a:cs typeface="Calibri" pitchFamily="34" charset="-120"/>
+              </a:rPr>
+              <a:t>Join order, zeroes included, days away noted</a:t>
+            </a:r>
+            <a:endParaRPr lang="en-US" sz="1000" dirty="0"/>
+          </a:p>
+        </p:txBody>
+      </p:sp>
+      <p:sp>
+        <p:nvSpPr>
+          <p:cNvPr id="12" name="Shape 8"/>
+          <p:cNvSpPr/>
+          <p:nvPr/>
+        </p:nvSpPr>
+        <p:spPr>
+          <a:xfrm>
+            <a:off x="7726680" y="1188720"/>
+            <a:ext cx="2286000" cy="4937760"/>
+          </a:xfrm>
+          <a:prstGeom prst="roundRect">
+            <a:avLst>
+              <a:gd name="adj" fmla="val 4800"/>
+            </a:avLst>
+          </a:prstGeom>
+          <a:solidFill>
+            <a:srgbClr val="F4F5FA"/>
+          </a:solidFill>
+          <a:ln w="12700">
+            <a:solidFill>
+              <a:srgbClr val="E4E6F0"/>
+            </a:solidFill>
+            <a:prstDash val="solid"/>
+          </a:ln>
+        </p:spPr>
+      </p:sp>
       <p:pic>
         <p:nvPicPr>
-          <p:cNvPr id="4" name="Image 2" descr="preencoded.png">    </p:cNvPr>
+          <p:cNvPr id="13" name="Image 2" descr="C:\Users\babak\AppData\Local\Temp\claude\D--0A-study-A0-0-ACSAI-0-sem-4-AI-ML-ML-unit-2\13f11f40-7bf3-4475-bdab-4aadda964c01\scratchpad\shots\13-quiet-hours.png">    </p:cNvPr>
           <p:cNvPicPr>
             <a:picLocks noChangeAspect="1"/>
           </p:cNvPicPr>
@@ -1950,280 +3769,99 @@
         </p:blipFill>
         <p:spPr>
           <a:xfrm>
-            <a:off x="0" y="5124450"/>
-            <a:ext cx="9144000" cy="5162550"/>
-          </a:xfrm>
-          <a:prstGeom prst="rect">
-            <a:avLst/>
-          </a:prstGeom>
+            <a:off x="7840980" y="1353312"/>
+            <a:ext cx="2057400" cy="4572000"/>
+          </a:xfrm>
+          <a:prstGeom prst="rect">
+            <a:avLst/>
+          </a:prstGeom>
+          <a:effectLst>
+            <a:outerShdw sx="100000" sy="100000" kx="0" ky="0" algn="bl" rotWithShape="0" blurRad="127000" dist="38100" dir="5400000">
+              <a:srgbClr val="1A1B2E">
+                <a:alpha val="22000"/>
+              </a:srgbClr>
+            </a:outerShdw>
+          </a:effectLst>
         </p:spPr>
       </p:pic>
-      <p:pic>
-        <p:nvPicPr>
-          <p:cNvPr id="5" name="Image 3" descr="preencoded.png">    </p:cNvPr>
-          <p:cNvPicPr>
-            <a:picLocks noChangeAspect="1"/>
-          </p:cNvPicPr>
-          <p:nvPr/>
-        </p:nvPicPr>
-        <p:blipFill>
-          <a:blip r:embed="rId4"/>
-          <a:stretch>
-            <a:fillRect/>
-          </a:stretch>
-        </p:blipFill>
-        <p:spPr>
-          <a:xfrm>
-            <a:off x="9124950" y="5124450"/>
-            <a:ext cx="9163050" cy="5162550"/>
-          </a:xfrm>
-          <a:prstGeom prst="rect">
-            <a:avLst/>
-          </a:prstGeom>
-        </p:spPr>
-      </p:pic>
-    </p:spTree>
-  </p:cSld>
-  <p:clrMapOvr>
-    <a:masterClrMapping/>
-  </p:clrMapOvr>
-</p:sld>
-</file>
-
-<file path=ppt/slides/slide6.xml><?xml version="1.0" encoding="utf-8"?>
-<p:sld xmlns:a="http://schemas.openxmlformats.org/drawingml/2006/main" xmlns:r="http://schemas.openxmlformats.org/officeDocument/2006/relationships" xmlns:p="http://schemas.openxmlformats.org/presentationml/2006/main">
-  <p:cSld name="Slide 6">
-    <p:spTree>
-      <p:nvGrpSpPr>
-        <p:cNvPr id="1" name=""/>
-        <p:cNvGrpSpPr/>
-        <p:nvPr/>
-      </p:nvGrpSpPr>
-      <p:grpSpPr>
-        <a:xfrm>
-          <a:off x="0" y="0"/>
-          <a:ext cx="0" cy="0"/>
-          <a:chOff x="0" y="0"/>
-          <a:chExt cx="0" cy="0"/>
-        </a:xfrm>
-      </p:grpSpPr>
-      <p:pic>
-        <p:nvPicPr>
-          <p:cNvPr id="2" name="Image 0" descr="preencoded.png">    </p:cNvPr>
-          <p:cNvPicPr>
-            <a:picLocks noChangeAspect="1"/>
-          </p:cNvPicPr>
-          <p:nvPr/>
-        </p:nvPicPr>
-        <p:blipFill>
-          <a:blip r:embed="rId1"/>
-          <a:stretch>
-            <a:fillRect/>
-          </a:stretch>
-        </p:blipFill>
-        <p:spPr>
-          <a:xfrm>
-            <a:off x="0" y="0"/>
-            <a:ext cx="9144000" cy="5143500"/>
-          </a:xfrm>
-          <a:prstGeom prst="rect">
-            <a:avLst/>
-          </a:prstGeom>
-        </p:spPr>
-      </p:pic>
-      <p:pic>
-        <p:nvPicPr>
-          <p:cNvPr id="3" name="Image 1" descr="preencoded.png">    </p:cNvPr>
-          <p:cNvPicPr>
-            <a:picLocks noChangeAspect="1"/>
-          </p:cNvPicPr>
-          <p:nvPr/>
-        </p:nvPicPr>
-        <p:blipFill>
-          <a:blip r:embed="rId2"/>
-          <a:stretch>
-            <a:fillRect/>
-          </a:stretch>
-        </p:blipFill>
-        <p:spPr>
-          <a:xfrm>
-            <a:off x="9124950" y="0"/>
-            <a:ext cx="9163050" cy="5143500"/>
-          </a:xfrm>
-          <a:prstGeom prst="rect">
-            <a:avLst/>
-          </a:prstGeom>
-        </p:spPr>
-      </p:pic>
-      <p:pic>
-        <p:nvPicPr>
-          <p:cNvPr id="4" name="Image 2" descr="preencoded.png">    </p:cNvPr>
-          <p:cNvPicPr>
-            <a:picLocks noChangeAspect="1"/>
-          </p:cNvPicPr>
-          <p:nvPr/>
-        </p:nvPicPr>
-        <p:blipFill>
-          <a:blip r:embed="rId3"/>
-          <a:stretch>
-            <a:fillRect/>
-          </a:stretch>
-        </p:blipFill>
-        <p:spPr>
-          <a:xfrm>
-            <a:off x="0" y="5124450"/>
-            <a:ext cx="9144000" cy="5162550"/>
-          </a:xfrm>
-          <a:prstGeom prst="rect">
-            <a:avLst/>
-          </a:prstGeom>
-        </p:spPr>
-      </p:pic>
-      <p:pic>
-        <p:nvPicPr>
-          <p:cNvPr id="5" name="Image 3" descr="preencoded.png">    </p:cNvPr>
-          <p:cNvPicPr>
-            <a:picLocks noChangeAspect="1"/>
-          </p:cNvPicPr>
-          <p:nvPr/>
-        </p:nvPicPr>
-        <p:blipFill>
-          <a:blip r:embed="rId4"/>
-          <a:stretch>
-            <a:fillRect/>
-          </a:stretch>
-        </p:blipFill>
-        <p:spPr>
-          <a:xfrm>
-            <a:off x="9124950" y="5124450"/>
-            <a:ext cx="9163050" cy="5162550"/>
-          </a:xfrm>
-          <a:prstGeom prst="rect">
-            <a:avLst/>
-          </a:prstGeom>
-        </p:spPr>
-      </p:pic>
-    </p:spTree>
-  </p:cSld>
-  <p:clrMapOvr>
-    <a:masterClrMapping/>
-  </p:clrMapOvr>
-</p:sld>
-</file>
-
-<file path=ppt/slides/slide7.xml><?xml version="1.0" encoding="utf-8"?>
-<p:sld xmlns:a="http://schemas.openxmlformats.org/drawingml/2006/main" xmlns:r="http://schemas.openxmlformats.org/officeDocument/2006/relationships" xmlns:p="http://schemas.openxmlformats.org/presentationml/2006/main">
-  <p:cSld name="Slide 7">
-    <p:spTree>
-      <p:nvGrpSpPr>
-        <p:cNvPr id="1" name=""/>
-        <p:cNvGrpSpPr/>
-        <p:nvPr/>
-      </p:nvGrpSpPr>
-      <p:grpSpPr>
-        <a:xfrm>
-          <a:off x="0" y="0"/>
-          <a:ext cx="0" cy="0"/>
-          <a:chOff x="0" y="0"/>
-          <a:chExt cx="0" cy="0"/>
-        </a:xfrm>
-      </p:grpSpPr>
-      <p:pic>
-        <p:nvPicPr>
-          <p:cNvPr id="2" name="Image 0" descr="preencoded.png">    </p:cNvPr>
-          <p:cNvPicPr>
-            <a:picLocks noChangeAspect="1"/>
-          </p:cNvPicPr>
-          <p:nvPr/>
-        </p:nvPicPr>
-        <p:blipFill>
-          <a:blip r:embed="rId1"/>
-          <a:stretch>
-            <a:fillRect/>
-          </a:stretch>
-        </p:blipFill>
-        <p:spPr>
-          <a:xfrm>
-            <a:off x="0" y="0"/>
-            <a:ext cx="9144000" cy="5143500"/>
-          </a:xfrm>
-          <a:prstGeom prst="rect">
-            <a:avLst/>
-          </a:prstGeom>
-        </p:spPr>
-      </p:pic>
-      <p:pic>
-        <p:nvPicPr>
-          <p:cNvPr id="3" name="Image 1" descr="preencoded.png">    </p:cNvPr>
-          <p:cNvPicPr>
-            <a:picLocks noChangeAspect="1"/>
-          </p:cNvPicPr>
-          <p:nvPr/>
-        </p:nvPicPr>
-        <p:blipFill>
-          <a:blip r:embed="rId2"/>
-          <a:stretch>
-            <a:fillRect/>
-          </a:stretch>
-        </p:blipFill>
-        <p:spPr>
-          <a:xfrm>
-            <a:off x="9124950" y="0"/>
-            <a:ext cx="9163050" cy="5143500"/>
-          </a:xfrm>
-          <a:prstGeom prst="rect">
-            <a:avLst/>
-          </a:prstGeom>
-        </p:spPr>
-      </p:pic>
-      <p:pic>
-        <p:nvPicPr>
-          <p:cNvPr id="4" name="Image 2" descr="preencoded.png">    </p:cNvPr>
-          <p:cNvPicPr>
-            <a:picLocks noChangeAspect="1"/>
-          </p:cNvPicPr>
-          <p:nvPr/>
-        </p:nvPicPr>
-        <p:blipFill>
-          <a:blip r:embed="rId3"/>
-          <a:stretch>
-            <a:fillRect/>
-          </a:stretch>
-        </p:blipFill>
-        <p:spPr>
-          <a:xfrm>
-            <a:off x="0" y="5124450"/>
-            <a:ext cx="9144000" cy="5162550"/>
-          </a:xfrm>
-          <a:prstGeom prst="rect">
-            <a:avLst/>
-          </a:prstGeom>
-        </p:spPr>
-      </p:pic>
-      <p:pic>
-        <p:nvPicPr>
-          <p:cNvPr id="5" name="Image 3" descr="preencoded.png">    </p:cNvPr>
-          <p:cNvPicPr>
-            <a:picLocks noChangeAspect="1"/>
-          </p:cNvPicPr>
-          <p:nvPr/>
-        </p:nvPicPr>
-        <p:blipFill>
-          <a:blip r:embed="rId4"/>
-          <a:stretch>
-            <a:fillRect/>
-          </a:stretch>
-        </p:blipFill>
-        <p:spPr>
-          <a:xfrm>
-            <a:off x="9124950" y="5124450"/>
-            <a:ext cx="9163050" cy="5162550"/>
-          </a:xfrm>
-          <a:prstGeom prst="rect">
-            <a:avLst/>
-          </a:prstGeom>
-        </p:spPr>
-      </p:pic>
+      <p:sp>
+        <p:nvSpPr>
+          <p:cNvPr id="14" name="Text 9"/>
+          <p:cNvSpPr txBox="1"/>
+          <p:nvPr/>
+        </p:nvSpPr>
+        <p:spPr>
+          <a:xfrm>
+            <a:off x="7726680" y="6236208"/>
+            <a:ext cx="2286000" cy="256032"/>
+          </a:xfrm>
+          <a:prstGeom prst="rect">
+            <a:avLst/>
+          </a:prstGeom>
+          <a:noFill/>
+          <a:ln/>
+        </p:spPr>
+        <p:txBody>
+          <a:bodyPr wrap="square" lIns="0" tIns="0" rIns="0" bIns="0" rtlCol="0" anchor="ctr"/>
+          <a:lstStyle/>
+          <a:p>
+            <a:pPr algn="ctr" indent="0" marL="0">
+              <a:buNone/>
+            </a:pPr>
+            <a:r>
+              <a:rPr lang="en-US" sz="1200" b="1" dirty="0">
+                <a:solidFill>
+                  <a:srgbClr val="1A1B2E"/>
+                </a:solidFill>
+                <a:latin typeface="Calibri" pitchFamily="34" charset="0"/>
+                <a:ea typeface="Calibri" pitchFamily="34" charset="-122"/>
+                <a:cs typeface="Calibri" pitchFamily="34" charset="-120"/>
+              </a:rPr>
+              <a:t>Quiet hours</a:t>
+            </a:r>
+            <a:endParaRPr lang="en-US" sz="1200" dirty="0"/>
+          </a:p>
+        </p:txBody>
+      </p:sp>
+      <p:sp>
+        <p:nvSpPr>
+          <p:cNvPr id="15" name="Text 10"/>
+          <p:cNvSpPr txBox="1"/>
+          <p:nvPr/>
+        </p:nvSpPr>
+        <p:spPr>
+          <a:xfrm>
+            <a:off x="7616952" y="6492240"/>
+            <a:ext cx="2505456" cy="384048"/>
+          </a:xfrm>
+          <a:prstGeom prst="rect">
+            <a:avLst/>
+          </a:prstGeom>
+          <a:noFill/>
+          <a:ln/>
+        </p:spPr>
+        <p:txBody>
+          <a:bodyPr wrap="square" lIns="0" tIns="0" rIns="0" bIns="0" rtlCol="0" anchor="ctr"/>
+          <a:lstStyle/>
+          <a:p>
+            <a:pPr algn="ctr" indent="0" marL="0">
+              <a:buNone/>
+            </a:pPr>
+            <a:r>
+              <a:rPr lang="en-US" sz="1000" dirty="0">
+                <a:solidFill>
+                  <a:srgbClr val="6B6F80"/>
+                </a:solidFill>
+                <a:latin typeface="Calibri" pitchFamily="34" charset="0"/>
+                <a:ea typeface="Calibri" pitchFamily="34" charset="-122"/>
+                <a:cs typeface="Calibri" pitchFamily="34" charset="-120"/>
+              </a:rPr>
+              <a:t>Held, not dropped — nothing is lost</a:t>
+            </a:r>
+            <a:endParaRPr lang="en-US" sz="1000" dirty="0"/>
+          </a:p>
+        </p:txBody>
+      </p:sp>
     </p:spTree>
   </p:cSld>
   <p:clrMapOvr>

--- a/TaskFlow_Screens.pptx
+++ b/TaskFlow_Screens.pptx
@@ -3462,7 +3462,7 @@
         </p:nvSpPr>
         <p:spPr>
           <a:xfrm>
-            <a:off x="2148840" y="1188720"/>
+            <a:off x="754380" y="1188720"/>
             <a:ext cx="2286000" cy="4937760"/>
           </a:xfrm>
           <a:prstGeom prst="roundRect">
@@ -3497,7 +3497,7 @@
         </p:blipFill>
         <p:spPr>
           <a:xfrm>
-            <a:off x="2263140" y="1353312"/>
+            <a:off x="868680" y="1353312"/>
             <a:ext cx="2057400" cy="4572000"/>
           </a:xfrm>
           <a:prstGeom prst="rect">
@@ -3520,7 +3520,7 @@
         </p:nvSpPr>
         <p:spPr>
           <a:xfrm>
-            <a:off x="2148840" y="6236208"/>
+            <a:off x="754380" y="6236208"/>
             <a:ext cx="2286000" cy="256032"/>
           </a:xfrm>
           <a:prstGeom prst="rect">
@@ -3559,7 +3559,7 @@
         </p:nvSpPr>
         <p:spPr>
           <a:xfrm>
-            <a:off x="2039112" y="6492240"/>
+            <a:off x="644652" y="6492240"/>
             <a:ext cx="2505456" cy="384048"/>
           </a:xfrm>
           <a:prstGeom prst="rect">
@@ -3598,7 +3598,7 @@
         </p:nvSpPr>
         <p:spPr>
           <a:xfrm>
-            <a:off x="4937760" y="1188720"/>
+            <a:off x="3543300" y="1188720"/>
             <a:ext cx="2286000" cy="4937760"/>
           </a:xfrm>
           <a:prstGeom prst="roundRect">
@@ -3633,7 +3633,7 @@
         </p:blipFill>
         <p:spPr>
           <a:xfrm>
-            <a:off x="5052060" y="1353312"/>
+            <a:off x="3657600" y="1353312"/>
             <a:ext cx="2057400" cy="4572000"/>
           </a:xfrm>
           <a:prstGeom prst="rect">
@@ -3656,7 +3656,7 @@
         </p:nvSpPr>
         <p:spPr>
           <a:xfrm>
-            <a:off x="4937760" y="6236208"/>
+            <a:off x="3543300" y="6236208"/>
             <a:ext cx="2286000" cy="256032"/>
           </a:xfrm>
           <a:prstGeom prst="rect">
@@ -3695,7 +3695,7 @@
         </p:nvSpPr>
         <p:spPr>
           <a:xfrm>
-            <a:off x="4828032" y="6492240"/>
+            <a:off x="3433572" y="6492240"/>
             <a:ext cx="2505456" cy="384048"/>
           </a:xfrm>
           <a:prstGeom prst="rect">
@@ -3734,7 +3734,7 @@
         </p:nvSpPr>
         <p:spPr>
           <a:xfrm>
-            <a:off x="7726680" y="1188720"/>
+            <a:off x="6332220" y="1188720"/>
             <a:ext cx="2286000" cy="4937760"/>
           </a:xfrm>
           <a:prstGeom prst="roundRect">
@@ -3755,7 +3755,7 @@
       </p:sp>
       <p:pic>
         <p:nvPicPr>
-          <p:cNvPr id="13" name="Image 2" descr="C:\Users\babak\AppData\Local\Temp\claude\D--0A-study-A0-0-ACSAI-0-sem-4-AI-ML-ML-unit-2\13f11f40-7bf3-4475-bdab-4aadda964c01\scratchpad\shots\13-quiet-hours.png">    </p:cNvPr>
+          <p:cNvPr id="13" name="Image 2" descr="C:\Users\babak\AppData\Local\Temp\claude\D--0A-study-A0-0-ACSAI-0-sem-4-AI-ML-ML-unit-2\13f11f40-7bf3-4475-bdab-4aadda964c01\scratchpad\shots\10-activity.png">    </p:cNvPr>
           <p:cNvPicPr>
             <a:picLocks noChangeAspect="1"/>
           </p:cNvPicPr>
@@ -3769,7 +3769,7 @@
         </p:blipFill>
         <p:spPr>
           <a:xfrm>
-            <a:off x="7840980" y="1353312"/>
+            <a:off x="6446520" y="1353312"/>
             <a:ext cx="2057400" cy="4572000"/>
           </a:xfrm>
           <a:prstGeom prst="rect">
@@ -3792,7 +3792,143 @@
         </p:nvSpPr>
         <p:spPr>
           <a:xfrm>
-            <a:off x="7726680" y="6236208"/>
+            <a:off x="6332220" y="6236208"/>
+            <a:ext cx="2286000" cy="256032"/>
+          </a:xfrm>
+          <a:prstGeom prst="rect">
+            <a:avLst/>
+          </a:prstGeom>
+          <a:noFill/>
+          <a:ln/>
+        </p:spPr>
+        <p:txBody>
+          <a:bodyPr wrap="square" lIns="0" tIns="0" rIns="0" bIns="0" rtlCol="0" anchor="ctr"/>
+          <a:lstStyle/>
+          <a:p>
+            <a:pPr algn="ctr" indent="0" marL="0">
+              <a:buNone/>
+            </a:pPr>
+            <a:r>
+              <a:rPr lang="en-US" sz="1200" b="1" dirty="0">
+                <a:solidFill>
+                  <a:srgbClr val="1A1B2E"/>
+                </a:solidFill>
+                <a:latin typeface="Calibri" pitchFamily="34" charset="0"/>
+                <a:ea typeface="Calibri" pitchFamily="34" charset="-122"/>
+                <a:cs typeface="Calibri" pitchFamily="34" charset="-120"/>
+              </a:rPr>
+              <a:t>Activity</a:t>
+            </a:r>
+            <a:endParaRPr lang="en-US" sz="1200" dirty="0"/>
+          </a:p>
+        </p:txBody>
+      </p:sp>
+      <p:sp>
+        <p:nvSpPr>
+          <p:cNvPr id="15" name="Text 10"/>
+          <p:cNvSpPr txBox="1"/>
+          <p:nvPr/>
+        </p:nvSpPr>
+        <p:spPr>
+          <a:xfrm>
+            <a:off x="6222492" y="6492240"/>
+            <a:ext cx="2505456" cy="384048"/>
+          </a:xfrm>
+          <a:prstGeom prst="rect">
+            <a:avLst/>
+          </a:prstGeom>
+          <a:noFill/>
+          <a:ln/>
+        </p:spPr>
+        <p:txBody>
+          <a:bodyPr wrap="square" lIns="0" tIns="0" rIns="0" bIns="0" rtlCol="0" anchor="ctr"/>
+          <a:lstStyle/>
+          <a:p>
+            <a:pPr algn="ctr" indent="0" marL="0">
+              <a:buNone/>
+            </a:pPr>
+            <a:r>
+              <a:rPr lang="en-US" sz="1000" dirty="0">
+                <a:solidFill>
+                  <a:srgbClr val="6B6F80"/>
+                </a:solidFill>
+                <a:latin typeface="Calibri" pitchFamily="34" charset="0"/>
+                <a:ea typeface="Calibri" pitchFamily="34" charset="-122"/>
+                <a:cs typeface="Calibri" pitchFamily="34" charset="-120"/>
+              </a:rPr>
+              <a:t>Every group-visible change, in words</a:t>
+            </a:r>
+            <a:endParaRPr lang="en-US" sz="1000" dirty="0"/>
+          </a:p>
+        </p:txBody>
+      </p:sp>
+      <p:sp>
+        <p:nvSpPr>
+          <p:cNvPr id="16" name="Shape 11"/>
+          <p:cNvSpPr/>
+          <p:nvPr/>
+        </p:nvSpPr>
+        <p:spPr>
+          <a:xfrm>
+            <a:off x="9121140" y="1188720"/>
+            <a:ext cx="2286000" cy="4937760"/>
+          </a:xfrm>
+          <a:prstGeom prst="roundRect">
+            <a:avLst>
+              <a:gd name="adj" fmla="val 4800"/>
+            </a:avLst>
+          </a:prstGeom>
+          <a:solidFill>
+            <a:srgbClr val="F4F5FA"/>
+          </a:solidFill>
+          <a:ln w="12700">
+            <a:solidFill>
+              <a:srgbClr val="E4E6F0"/>
+            </a:solidFill>
+            <a:prstDash val="solid"/>
+          </a:ln>
+        </p:spPr>
+      </p:sp>
+      <p:pic>
+        <p:nvPicPr>
+          <p:cNvPr id="17" name="Image 3" descr="C:\Users\babak\AppData\Local\Temp\claude\D--0A-study-A0-0-ACSAI-0-sem-4-AI-ML-ML-unit-2\13f11f40-7bf3-4475-bdab-4aadda964c01\scratchpad\shots\13-quiet-hours.png">    </p:cNvPr>
+          <p:cNvPicPr>
+            <a:picLocks noChangeAspect="1"/>
+          </p:cNvPicPr>
+          <p:nvPr/>
+        </p:nvPicPr>
+        <p:blipFill>
+          <a:blip r:embed="rId4"/>
+          <a:stretch>
+            <a:fillRect/>
+          </a:stretch>
+        </p:blipFill>
+        <p:spPr>
+          <a:xfrm>
+            <a:off x="9235440" y="1353312"/>
+            <a:ext cx="2057400" cy="4572000"/>
+          </a:xfrm>
+          <a:prstGeom prst="rect">
+            <a:avLst/>
+          </a:prstGeom>
+          <a:effectLst>
+            <a:outerShdw sx="100000" sy="100000" kx="0" ky="0" algn="bl" rotWithShape="0" blurRad="127000" dist="38100" dir="5400000">
+              <a:srgbClr val="1A1B2E">
+                <a:alpha val="22000"/>
+              </a:srgbClr>
+            </a:outerShdw>
+          </a:effectLst>
+        </p:spPr>
+      </p:pic>
+      <p:sp>
+        <p:nvSpPr>
+          <p:cNvPr id="18" name="Text 12"/>
+          <p:cNvSpPr txBox="1"/>
+          <p:nvPr/>
+        </p:nvSpPr>
+        <p:spPr>
+          <a:xfrm>
+            <a:off x="9121140" y="6236208"/>
             <a:ext cx="2286000" cy="256032"/>
           </a:xfrm>
           <a:prstGeom prst="rect">
@@ -3825,13 +3961,13 @@
       </p:sp>
       <p:sp>
         <p:nvSpPr>
-          <p:cNvPr id="15" name="Text 10"/>
+          <p:cNvPr id="19" name="Text 13"/>
           <p:cNvSpPr txBox="1"/>
           <p:nvPr/>
         </p:nvSpPr>
         <p:spPr>
           <a:xfrm>
-            <a:off x="7616952" y="6492240"/>
+            <a:off x="9011412" y="6492240"/>
             <a:ext cx="2505456" cy="384048"/>
           </a:xfrm>
           <a:prstGeom prst="rect">

--- a/TaskFlow_Screens.pptx
+++ b/TaskFlow_Screens.pptx
@@ -10,9 +10,13 @@
     <p:sldId id="258" r:id="rId4"/>
     <p:sldId id="259" r:id="rId5"/>
     <p:sldId id="260" r:id="rId6"/>
+    <p:sldId id="261" r:id="rId7"/>
+    <p:sldId id="262" r:id="rId8"/>
+    <p:sldId id="263" r:id="rId9"/>
+    <p:sldId id="264" r:id="rId10"/>
   </p:sldIdLst>
   <p:notesMasterIdLst>
-    <p:notesMasterId r:id="rId7"/>
+    <p:notesMasterId r:id="rId11"/>
   </p:notesMasterIdLst>
   <p:sldSz cx="12192000" cy="6858000"/>
   <p:notesSz cx="6858000" cy="12192000"/>
@@ -506,7 +510,7 @@
           <a:p>
             <a:r>
               <a:rPr lang="en-US" dirty="0"/>
-              <a:t>Deck rebuilt for phase 4b. The previous version showed the pre-pivot v1 app.</a:t>
+              <a:t>Re-shot after v2 UI phases 1-6. The household is seeded: three flatmates, four chores across all three schedule types, three one-off tasks, two completed cycles a week apart, one overdue one-off, one person away.</a:t>
             </a:r>
             <a:endParaRPr lang="en-US" dirty="0"/>
           </a:p>
@@ -882,6 +886,358 @@
             <a:fld id="{F7021451-1387-4CA6-816F-3879F97B5CBC}" type="slidenum">
               <a:rPr lang="en-US"/>
               <a:t>5</a:t>
+            </a:fld>
+            <a:endParaRPr lang="en-US"/>
+          </a:p>
+        </p:txBody>
+      </p:sp>
+    </p:spTree>
+    <p:extLst>
+      <p:ext uri="{BB962C8B-B14F-4D97-AF65-F5344CB8AC3E}">
+        <p14:creationId xmlns:p14="http://schemas.microsoft.com/office/powerpoint/2010/main" val="1024086991"/>
+      </p:ext>
+    </p:extLst>
+  </p:cSld>
+  <p:clrMapOvr>
+    <a:masterClrMapping/>
+  </p:clrMapOvr>
+</p:notes>
+</file>
+
+<file path=ppt/notesSlides/notesSlide6.xml><?xml version="1.0" encoding="utf-8"?>
+<p:notes xmlns:a="http://schemas.openxmlformats.org/drawingml/2006/main" xmlns:r="http://schemas.openxmlformats.org/officeDocument/2006/relationships" xmlns:p="http://schemas.openxmlformats.org/presentationml/2006/main">
+  <p:cSld>
+    <p:spTree>
+      <p:nvGrpSpPr>
+        <p:cNvPr id="1" name=""/>
+        <p:cNvGrpSpPr/>
+        <p:nvPr/>
+      </p:nvGrpSpPr>
+      <p:grpSpPr>
+        <a:xfrm>
+          <a:off x="0" y="0"/>
+          <a:ext cx="0" cy="0"/>
+          <a:chOff x="0" y="0"/>
+          <a:chExt cx="0" cy="0"/>
+        </a:xfrm>
+      </p:grpSpPr>
+      <p:sp>
+        <p:nvSpPr>
+          <p:cNvPr id="2" name="Slide Image Placeholder 1"/>
+          <p:cNvSpPr>
+            <a:spLocks noGrp="1" noRot="1" noChangeAspect="1"/>
+          </p:cNvSpPr>
+          <p:nvPr>
+            <p:ph type="sldImg"/>
+          </p:nvPr>
+        </p:nvSpPr>
+        <p:spPr/>
+      </p:sp>
+      <p:sp>
+        <p:nvSpPr>
+          <p:cNvPr id="3" name="Notes Placeholder 2"/>
+          <p:cNvSpPr>
+            <a:spLocks noGrp="1"/>
+          </p:cNvSpPr>
+          <p:nvPr>
+            <p:ph type="body" idx="1"/>
+          </p:nvPr>
+        </p:nvSpPr>
+        <p:spPr/>
+        <p:txBody>
+          <a:bodyPr/>
+          <a:lstStyle/>
+          <a:p>
+            <a:r>
+              <a:rPr lang="en-US" dirty="0"/>
+              <a:t/>
+            </a:r>
+            <a:endParaRPr lang="en-US" dirty="0"/>
+          </a:p>
+        </p:txBody>
+      </p:sp>
+      <p:sp>
+        <p:nvSpPr>
+          <p:cNvPr id="4" name="Slide Number Placeholder 3"/>
+          <p:cNvSpPr>
+            <a:spLocks noGrp="1"/>
+          </p:cNvSpPr>
+          <p:nvPr>
+            <p:ph type="sldNum" sz="quarter" idx="10"/>
+          </p:nvPr>
+        </p:nvSpPr>
+        <p:spPr/>
+        <p:txBody>
+          <a:bodyPr/>
+          <a:lstStyle/>
+          <a:p>
+            <a:fld id="{F7021451-1387-4CA6-816F-3879F97B5CBC}" type="slidenum">
+              <a:rPr lang="en-US"/>
+              <a:t>6</a:t>
+            </a:fld>
+            <a:endParaRPr lang="en-US"/>
+          </a:p>
+        </p:txBody>
+      </p:sp>
+    </p:spTree>
+    <p:extLst>
+      <p:ext uri="{BB962C8B-B14F-4D97-AF65-F5344CB8AC3E}">
+        <p14:creationId xmlns:p14="http://schemas.microsoft.com/office/powerpoint/2010/main" val="1024086991"/>
+      </p:ext>
+    </p:extLst>
+  </p:cSld>
+  <p:clrMapOvr>
+    <a:masterClrMapping/>
+  </p:clrMapOvr>
+</p:notes>
+</file>
+
+<file path=ppt/notesSlides/notesSlide7.xml><?xml version="1.0" encoding="utf-8"?>
+<p:notes xmlns:a="http://schemas.openxmlformats.org/drawingml/2006/main" xmlns:r="http://schemas.openxmlformats.org/officeDocument/2006/relationships" xmlns:p="http://schemas.openxmlformats.org/presentationml/2006/main">
+  <p:cSld>
+    <p:spTree>
+      <p:nvGrpSpPr>
+        <p:cNvPr id="1" name=""/>
+        <p:cNvGrpSpPr/>
+        <p:nvPr/>
+      </p:nvGrpSpPr>
+      <p:grpSpPr>
+        <a:xfrm>
+          <a:off x="0" y="0"/>
+          <a:ext cx="0" cy="0"/>
+          <a:chOff x="0" y="0"/>
+          <a:chExt cx="0" cy="0"/>
+        </a:xfrm>
+      </p:grpSpPr>
+      <p:sp>
+        <p:nvSpPr>
+          <p:cNvPr id="2" name="Slide Image Placeholder 1"/>
+          <p:cNvSpPr>
+            <a:spLocks noGrp="1" noRot="1" noChangeAspect="1"/>
+          </p:cNvSpPr>
+          <p:nvPr>
+            <p:ph type="sldImg"/>
+          </p:nvPr>
+        </p:nvSpPr>
+        <p:spPr/>
+      </p:sp>
+      <p:sp>
+        <p:nvSpPr>
+          <p:cNvPr id="3" name="Notes Placeholder 2"/>
+          <p:cNvSpPr>
+            <a:spLocks noGrp="1"/>
+          </p:cNvSpPr>
+          <p:nvPr>
+            <p:ph type="body" idx="1"/>
+          </p:nvPr>
+        </p:nvSpPr>
+        <p:spPr/>
+        <p:txBody>
+          <a:bodyPr/>
+          <a:lstStyle/>
+          <a:p>
+            <a:r>
+              <a:rPr lang="en-US" dirty="0"/>
+              <a:t/>
+            </a:r>
+            <a:endParaRPr lang="en-US" dirty="0"/>
+          </a:p>
+        </p:txBody>
+      </p:sp>
+      <p:sp>
+        <p:nvSpPr>
+          <p:cNvPr id="4" name="Slide Number Placeholder 3"/>
+          <p:cNvSpPr>
+            <a:spLocks noGrp="1"/>
+          </p:cNvSpPr>
+          <p:nvPr>
+            <p:ph type="sldNum" sz="quarter" idx="10"/>
+          </p:nvPr>
+        </p:nvSpPr>
+        <p:spPr/>
+        <p:txBody>
+          <a:bodyPr/>
+          <a:lstStyle/>
+          <a:p>
+            <a:fld id="{F7021451-1387-4CA6-816F-3879F97B5CBC}" type="slidenum">
+              <a:rPr lang="en-US"/>
+              <a:t>7</a:t>
+            </a:fld>
+            <a:endParaRPr lang="en-US"/>
+          </a:p>
+        </p:txBody>
+      </p:sp>
+    </p:spTree>
+    <p:extLst>
+      <p:ext uri="{BB962C8B-B14F-4D97-AF65-F5344CB8AC3E}">
+        <p14:creationId xmlns:p14="http://schemas.microsoft.com/office/powerpoint/2010/main" val="1024086991"/>
+      </p:ext>
+    </p:extLst>
+  </p:cSld>
+  <p:clrMapOvr>
+    <a:masterClrMapping/>
+  </p:clrMapOvr>
+</p:notes>
+</file>
+
+<file path=ppt/notesSlides/notesSlide8.xml><?xml version="1.0" encoding="utf-8"?>
+<p:notes xmlns:a="http://schemas.openxmlformats.org/drawingml/2006/main" xmlns:r="http://schemas.openxmlformats.org/officeDocument/2006/relationships" xmlns:p="http://schemas.openxmlformats.org/presentationml/2006/main">
+  <p:cSld>
+    <p:spTree>
+      <p:nvGrpSpPr>
+        <p:cNvPr id="1" name=""/>
+        <p:cNvGrpSpPr/>
+        <p:nvPr/>
+      </p:nvGrpSpPr>
+      <p:grpSpPr>
+        <a:xfrm>
+          <a:off x="0" y="0"/>
+          <a:ext cx="0" cy="0"/>
+          <a:chOff x="0" y="0"/>
+          <a:chExt cx="0" cy="0"/>
+        </a:xfrm>
+      </p:grpSpPr>
+      <p:sp>
+        <p:nvSpPr>
+          <p:cNvPr id="2" name="Slide Image Placeholder 1"/>
+          <p:cNvSpPr>
+            <a:spLocks noGrp="1" noRot="1" noChangeAspect="1"/>
+          </p:cNvSpPr>
+          <p:nvPr>
+            <p:ph type="sldImg"/>
+          </p:nvPr>
+        </p:nvSpPr>
+        <p:spPr/>
+      </p:sp>
+      <p:sp>
+        <p:nvSpPr>
+          <p:cNvPr id="3" name="Notes Placeholder 2"/>
+          <p:cNvSpPr>
+            <a:spLocks noGrp="1"/>
+          </p:cNvSpPr>
+          <p:nvPr>
+            <p:ph type="body" idx="1"/>
+          </p:nvPr>
+        </p:nvSpPr>
+        <p:spPr/>
+        <p:txBody>
+          <a:bodyPr/>
+          <a:lstStyle/>
+          <a:p>
+            <a:r>
+              <a:rPr lang="en-US" dirty="0"/>
+              <a:t/>
+            </a:r>
+            <a:endParaRPr lang="en-US" dirty="0"/>
+          </a:p>
+        </p:txBody>
+      </p:sp>
+      <p:sp>
+        <p:nvSpPr>
+          <p:cNvPr id="4" name="Slide Number Placeholder 3"/>
+          <p:cNvSpPr>
+            <a:spLocks noGrp="1"/>
+          </p:cNvSpPr>
+          <p:nvPr>
+            <p:ph type="sldNum" sz="quarter" idx="10"/>
+          </p:nvPr>
+        </p:nvSpPr>
+        <p:spPr/>
+        <p:txBody>
+          <a:bodyPr/>
+          <a:lstStyle/>
+          <a:p>
+            <a:fld id="{F7021451-1387-4CA6-816F-3879F97B5CBC}" type="slidenum">
+              <a:rPr lang="en-US"/>
+              <a:t>8</a:t>
+            </a:fld>
+            <a:endParaRPr lang="en-US"/>
+          </a:p>
+        </p:txBody>
+      </p:sp>
+    </p:spTree>
+    <p:extLst>
+      <p:ext uri="{BB962C8B-B14F-4D97-AF65-F5344CB8AC3E}">
+        <p14:creationId xmlns:p14="http://schemas.microsoft.com/office/powerpoint/2010/main" val="1024086991"/>
+      </p:ext>
+    </p:extLst>
+  </p:cSld>
+  <p:clrMapOvr>
+    <a:masterClrMapping/>
+  </p:clrMapOvr>
+</p:notes>
+</file>
+
+<file path=ppt/notesSlides/notesSlide9.xml><?xml version="1.0" encoding="utf-8"?>
+<p:notes xmlns:a="http://schemas.openxmlformats.org/drawingml/2006/main" xmlns:r="http://schemas.openxmlformats.org/officeDocument/2006/relationships" xmlns:p="http://schemas.openxmlformats.org/presentationml/2006/main">
+  <p:cSld>
+    <p:spTree>
+      <p:nvGrpSpPr>
+        <p:cNvPr id="1" name=""/>
+        <p:cNvGrpSpPr/>
+        <p:nvPr/>
+      </p:nvGrpSpPr>
+      <p:grpSpPr>
+        <a:xfrm>
+          <a:off x="0" y="0"/>
+          <a:ext cx="0" cy="0"/>
+          <a:chOff x="0" y="0"/>
+          <a:chExt cx="0" cy="0"/>
+        </a:xfrm>
+      </p:grpSpPr>
+      <p:sp>
+        <p:nvSpPr>
+          <p:cNvPr id="2" name="Slide Image Placeholder 1"/>
+          <p:cNvSpPr>
+            <a:spLocks noGrp="1" noRot="1" noChangeAspect="1"/>
+          </p:cNvSpPr>
+          <p:nvPr>
+            <p:ph type="sldImg"/>
+          </p:nvPr>
+        </p:nvSpPr>
+        <p:spPr/>
+      </p:sp>
+      <p:sp>
+        <p:nvSpPr>
+          <p:cNvPr id="3" name="Notes Placeholder 2"/>
+          <p:cNvSpPr>
+            <a:spLocks noGrp="1"/>
+          </p:cNvSpPr>
+          <p:nvPr>
+            <p:ph type="body" idx="1"/>
+          </p:nvPr>
+        </p:nvSpPr>
+        <p:spPr/>
+        <p:txBody>
+          <a:bodyPr/>
+          <a:lstStyle/>
+          <a:p>
+            <a:r>
+              <a:rPr lang="en-US" dirty="0"/>
+              <a:t/>
+            </a:r>
+            <a:endParaRPr lang="en-US" dirty="0"/>
+          </a:p>
+        </p:txBody>
+      </p:sp>
+      <p:sp>
+        <p:nvSpPr>
+          <p:cNvPr id="4" name="Slide Number Placeholder 3"/>
+          <p:cNvSpPr>
+            <a:spLocks noGrp="1"/>
+          </p:cNvSpPr>
+          <p:nvPr>
+            <p:ph type="sldNum" sz="quarter" idx="10"/>
+          </p:nvPr>
+        </p:nvSpPr>
+        <p:spPr/>
+        <p:txBody>
+          <a:bodyPr/>
+          <a:lstStyle/>
+          <a:p>
+            <a:fld id="{F7021451-1387-4CA6-816F-3879F97B5CBC}" type="slidenum">
+              <a:rPr lang="en-US"/>
+              <a:t>9</a:t>
             </a:fld>
             <a:endParaRPr lang="en-US"/>
           </a:p>
@@ -1303,7 +1659,7 @@
                 <a:ea typeface="Calibri" pitchFamily="34" charset="-122"/>
                 <a:cs typeface="Calibri" pitchFamily="34" charset="-120"/>
               </a:rPr>
-              <a:t>The household chore board — screens from the built app</a:t>
+              <a:t>The household chore board, screen by screen</a:t>
             </a:r>
             <a:endParaRPr lang="en-US" sz="2000" dirty="0"/>
           </a:p>
@@ -1345,7 +1701,7 @@
                 <a:ea typeface="Calibri" pitchFamily="34" charset="-122"/>
                 <a:cs typeface="Calibri" pitchFamily="34" charset="-120"/>
               </a:rPr>
-              <a:t>Captured on the emulator against a running backend on 2 September 2026. Every screen here is the app as it actually builds and runs — no mock-ups.</a:t>
+              <a:t>Captured on the emulator at 360dp against a running backend on 3 September 2026, after the v2 UI pass. Every screen here is the app as it actually builds and runs.</a:t>
             </a:r>
             <a:endParaRPr lang="en-US" sz="1400" dirty="0"/>
           </a:p>
@@ -1353,7 +1709,7 @@
       </p:sp>
       <p:pic>
         <p:nvPicPr>
-          <p:cNvPr id="5" name="Image 0" descr="C:\Users\babak\AppData\Local\Temp\claude\D--0A-study-A0-0-ACSAI-0-sem-4-AI-ML-ML-unit-2\13f11f40-7bf3-4475-bdab-4aadda964c01\scratchpad\shots\04-board.png">    </p:cNvPr>
+          <p:cNvPr id="5" name="Image 0" descr="C:\Users\babak\AppData\Local\Temp\claude\D--0A-study-A0-0-ACSAI-0-sem-4-AI-ML-ML-unit-2\13f11f40-7bf3-4475-bdab-4aadda964c01\scratchpad\shots2\04-board.png">    </p:cNvPr>
           <p:cNvPicPr>
             <a:picLocks noChangeAspect="1"/>
           </p:cNvPicPr>
@@ -1521,7 +1877,7 @@
       </p:sp>
       <p:pic>
         <p:nvPicPr>
-          <p:cNvPr id="5" name="Image 0" descr="C:\Users\babak\AppData\Local\Temp\claude\D--0A-study-A0-0-ACSAI-0-sem-4-AI-ML-ML-unit-2\13f11f40-7bf3-4475-bdab-4aadda964c01\scratchpad\shots\01-login.png">    </p:cNvPr>
+          <p:cNvPr id="5" name="Image 0" descr="C:\Users\babak\AppData\Local\Temp\claude\D--0A-study-A0-0-ACSAI-0-sem-4-AI-ML-ML-unit-2\13f11f40-7bf3-4475-bdab-4aadda964c01\scratchpad\shots2\01-login.png">    </p:cNvPr>
           <p:cNvPicPr>
             <a:picLocks noChangeAspect="1"/>
           </p:cNvPicPr>
@@ -1622,7 +1978,7 @@
                 <a:ea typeface="Calibri" pitchFamily="34" charset="-122"/>
                 <a:cs typeface="Calibri" pitchFamily="34" charset="-120"/>
               </a:rPr>
-              <a:t>The violet scheme, not the wallpaper's</a:t>
+              <a:t>The app's violet, not the wallpaper's</a:t>
             </a:r>
             <a:endParaRPr lang="en-US" sz="1000" dirty="0"/>
           </a:p>
@@ -1657,7 +2013,7 @@
       </p:sp>
       <p:pic>
         <p:nvPicPr>
-          <p:cNvPr id="9" name="Image 1" descr="C:\Users\babak\AppData\Local\Temp\claude\D--0A-study-A0-0-ACSAI-0-sem-4-AI-ML-ML-unit-2\13f11f40-7bf3-4475-bdab-4aadda964c01\scratchpad\shots\02-register.png">    </p:cNvPr>
+          <p:cNvPr id="9" name="Image 1" descr="C:\Users\babak\AppData\Local\Temp\claude\D--0A-study-A0-0-ACSAI-0-sem-4-AI-ML-ML-unit-2\13f11f40-7bf3-4475-bdab-4aadda964c01\scratchpad\shots2\02-register.png">    </p:cNvPr>
           <p:cNvPicPr>
             <a:picLocks noChangeAspect="1"/>
           </p:cNvPicPr>
@@ -1793,7 +2149,7 @@
       </p:sp>
       <p:pic>
         <p:nvPicPr>
-          <p:cNvPr id="13" name="Image 2" descr="C:\Users\babak\AppData\Local\Temp\claude\D--0A-study-A0-0-ACSAI-0-sem-4-AI-ML-ML-unit-2\13f11f40-7bf3-4475-bdab-4aadda964c01\scratchpad\shots\03-dashboard.png">    </p:cNvPr>
+          <p:cNvPr id="13" name="Image 2" descr="C:\Users\babak\AppData\Local\Temp\claude\D--0A-study-A0-0-ACSAI-0-sem-4-AI-ML-ML-unit-2\13f11f40-7bf3-4475-bdab-4aadda964c01\scratchpad\shots2\03-dashboard.png">    </p:cNvPr>
           <p:cNvPicPr>
             <a:picLocks noChangeAspect="1"/>
           </p:cNvPicPr>
@@ -1929,7 +2285,7 @@
       </p:sp>
       <p:pic>
         <p:nvPicPr>
-          <p:cNvPr id="17" name="Image 3" descr="C:\Users\babak\AppData\Local\Temp\claude\D--0A-study-A0-0-ACSAI-0-sem-4-AI-ML-ML-unit-2\13f11f40-7bf3-4475-bdab-4aadda964c01\scratchpad\shots\12-dashboard-menu.png">    </p:cNvPr>
+          <p:cNvPr id="17" name="Image 3" descr="C:\Users\babak\AppData\Local\Temp\claude\D--0A-study-A0-0-ACSAI-0-sem-4-AI-ML-ML-unit-2\13f11f40-7bf3-4475-bdab-4aadda964c01\scratchpad\shots2\13-dashboard-menu.png">    </p:cNvPr>
           <p:cNvPicPr>
             <a:picLocks noChangeAspect="1"/>
           </p:cNvPicPr>
@@ -1991,7 +2347,7 @@
                 <a:ea typeface="Calibri" pitchFamily="34" charset="-122"/>
                 <a:cs typeface="Calibri" pitchFamily="34" charset="-120"/>
               </a:rPr>
-              <a:t>Dashboard menu</a:t>
+              <a:t>The person's menu</a:t>
             </a:r>
             <a:endParaRPr lang="en-US" sz="1200" dirty="0"/>
           </a:p>
@@ -2030,7 +2386,7 @@
                 <a:ea typeface="Calibri" pitchFamily="34" charset="-122"/>
                 <a:cs typeface="Calibri" pitchFamily="34" charset="-120"/>
               </a:rPr>
-              <a:t>Quiet hours lives here — it is per person</a:t>
+              <a:t>Quiet hours and appearance: both per person</a:t>
             </a:r>
             <a:endParaRPr lang="en-US" sz="1000" dirty="0"/>
           </a:p>
@@ -2140,7 +2496,7 @@
                 <a:ea typeface="Calibri" pitchFamily="34" charset="-122"/>
                 <a:cs typeface="Calibri" pitchFamily="34" charset="-120"/>
               </a:rPr>
-              <a:t>Yours, Others, Done — grouped by whose it is, not by status. Overdue is amber, never red.</a:t>
+              <a:t>Yours, Others, Done this cycle. Grouped by whose it is, not by status. Overdue is amber, never red.</a:t>
             </a:r>
             <a:endParaRPr lang="en-US" sz="1300" dirty="0"/>
           </a:p>
@@ -2175,7 +2531,7 @@
       </p:sp>
       <p:pic>
         <p:nvPicPr>
-          <p:cNvPr id="5" name="Image 0" descr="C:\Users\babak\AppData\Local\Temp\claude\D--0A-study-A0-0-ACSAI-0-sem-4-AI-ML-ML-unit-2\13f11f40-7bf3-4475-bdab-4aadda964c01\scratchpad\shots\04-board.png">    </p:cNvPr>
+          <p:cNvPr id="5" name="Image 0" descr="C:\Users\babak\AppData\Local\Temp\claude\D--0A-study-A0-0-ACSAI-0-sem-4-AI-ML-ML-unit-2\13f11f40-7bf3-4475-bdab-4aadda964c01\scratchpad\shots2\04-board.png">    </p:cNvPr>
           <p:cNvPicPr>
             <a:picLocks noChangeAspect="1"/>
           </p:cNvPicPr>
@@ -2276,7 +2632,7 @@
                 <a:ea typeface="Calibri" pitchFamily="34" charset="-122"/>
                 <a:cs typeface="Calibri" pitchFamily="34" charset="-120"/>
               </a:rPr>
-              <a:t>One overdue row in amber; done rows sink</a:t>
+              <a:t>Three lines a row: what, when, whose</a:t>
             </a:r>
             <a:endParaRPr lang="en-US" sz="1000" dirty="0"/>
           </a:p>
@@ -2311,7 +2667,7 @@
       </p:sp>
       <p:pic>
         <p:nvPicPr>
-          <p:cNvPr id="9" name="Image 1" descr="C:\Users\babak\AppData\Local\Temp\claude\D--0A-study-A0-0-ACSAI-0-sem-4-AI-ML-ML-unit-2\13f11f40-7bf3-4475-bdab-4aadda964c01\scratchpad\shots\05-occurrence-detail.png">    </p:cNvPr>
+          <p:cNvPr id="9" name="Image 1" descr="C:\Users\babak\AppData\Local\Temp\claude\D--0A-study-A0-0-ACSAI-0-sem-4-AI-ML-ML-unit-2\13f11f40-7bf3-4475-bdab-4aadda964c01\scratchpad\shots2\05-board-done.png">    </p:cNvPr>
           <p:cNvPicPr>
             <a:picLocks noChangeAspect="1"/>
           </p:cNvPicPr>
@@ -2373,7 +2729,7 @@
                 <a:ea typeface="Calibri" pitchFamily="34" charset="-122"/>
                 <a:cs typeface="Calibri" pitchFamily="34" charset="-120"/>
               </a:rPr>
-              <a:t>A chore, opened</a:t>
+              <a:t>Done this cycle</a:t>
             </a:r>
             <a:endParaRPr lang="en-US" sz="1200" dirty="0"/>
           </a:p>
@@ -2412,7 +2768,7 @@
                 <a:ea typeface="Calibri" pitchFamily="34" charset="-122"/>
                 <a:cs typeface="Calibri" pitchFamily="34" charset="-120"/>
               </a:rPr>
-              <a:t>The done-line, the schedule, whose turn</a:t>
+              <a:t>Completions sink, with who and when</a:t>
             </a:r>
             <a:endParaRPr lang="en-US" sz="1000" dirty="0"/>
           </a:p>
@@ -2447,7 +2803,7 @@
       </p:sp>
       <p:pic>
         <p:nvPicPr>
-          <p:cNvPr id="13" name="Image 2" descr="C:\Users\babak\AppData\Local\Temp\claude\D--0A-study-A0-0-ACSAI-0-sem-4-AI-ML-ML-unit-2\13f11f40-7bf3-4475-bdab-4aadda964c01\scratchpad\shots\07-create-repeats.png">    </p:cNvPr>
+          <p:cNvPr id="13" name="Image 2" descr="C:\Users\babak\AppData\Local\Temp\claude\D--0A-study-A0-0-ACSAI-0-sem-4-AI-ML-ML-unit-2\13f11f40-7bf3-4475-bdab-4aadda964c01\scratchpad\shots2\06-occurrence-detail.png">    </p:cNvPr>
           <p:cNvPicPr>
             <a:picLocks noChangeAspect="1"/>
           </p:cNvPicPr>
@@ -2509,7 +2865,7 @@
                 <a:ea typeface="Calibri" pitchFamily="34" charset="-122"/>
                 <a:cs typeface="Calibri" pitchFamily="34" charset="-120"/>
               </a:rPr>
-              <a:t>Add — repeats</a:t>
+              <a:t>A chore, opened</a:t>
             </a:r>
             <a:endParaRPr lang="en-US" sz="1200" dirty="0"/>
           </a:p>
@@ -2548,7 +2904,7 @@
                 <a:ea typeface="Calibri" pitchFamily="34" charset="-122"/>
                 <a:cs typeface="Calibri" pitchFamily="34" charset="-120"/>
               </a:rPr>
-              <a:t>Schedule and rotation order</a:t>
+              <a:t>The done-line, the schedule, whose turn</a:t>
             </a:r>
             <a:endParaRPr lang="en-US" sz="1000" dirty="0"/>
           </a:p>
@@ -2583,7 +2939,7 @@
       </p:sp>
       <p:pic>
         <p:nvPicPr>
-          <p:cNvPr id="17" name="Image 3" descr="C:\Users\babak\AppData\Local\Temp\claude\D--0A-study-A0-0-ACSAI-0-sem-4-AI-ML-ML-unit-2\13f11f40-7bf3-4475-bdab-4aadda964c01\scratchpad\shots\08-create-onetime.png">    </p:cNvPr>
+          <p:cNvPr id="17" name="Image 3" descr="C:\Users\babak\AppData\Local\Temp\claude\D--0A-study-A0-0-ACSAI-0-sem-4-AI-ML-ML-unit-2\13f11f40-7bf3-4475-bdab-4aadda964c01\scratchpad\shots2\07-chore-history.png">    </p:cNvPr>
           <p:cNvPicPr>
             <a:picLocks noChangeAspect="1"/>
           </p:cNvPicPr>
@@ -2645,7 +3001,7 @@
                 <a:ea typeface="Calibri" pitchFamily="34" charset="-122"/>
                 <a:cs typeface="Calibri" pitchFamily="34" charset="-120"/>
               </a:rPr>
-              <a:t>Add — one time</a:t>
+              <a:t>One chore's history</a:t>
             </a:r>
             <a:endParaRPr lang="en-US" sz="1200" dirty="0"/>
           </a:p>
@@ -2684,7 +3040,7 @@
                 <a:ea typeface="Calibri" pitchFamily="34" charset="-122"/>
                 <a:cs typeface="Calibri" pitchFamily="34" charset="-120"/>
               </a:rPr>
-              <a:t>Same form, one question decides</a:t>
+              <a:t>Two dates, no verdict on either</a:t>
             </a:r>
             <a:endParaRPr lang="en-US" sz="1000" dirty="0"/>
           </a:p>
@@ -2755,7 +3111,7 @@
                 <a:ea typeface="Calibri" pitchFamily="34" charset="-122"/>
                 <a:cs typeface="Calibri" pitchFamily="34" charset="-120"/>
               </a:rPr>
-              <a:t>Busy, away, and whose turn</a:t>
+              <a:t>Adding a chore asks two questions</a:t>
             </a:r>
             <a:endParaRPr lang="en-US" sz="3400" dirty="0"/>
           </a:p>
@@ -2794,7 +3150,7 @@
                 <a:ea typeface="Calibri" pitchFamily="34" charset="-122"/>
                 <a:cs typeface="Calibri" pitchFamily="34" charset="-120"/>
               </a:rPr>
-              <a:t>The only two exits from an assigned chore besides doing it. Neither cancels the turn you owe.</a:t>
+              <a:t>How often, then everything that answer implies. Nothing about days is asked of a one-off.</a:t>
             </a:r>
             <a:endParaRPr lang="en-US" sz="1300" dirty="0"/>
           </a:p>
@@ -2829,7 +3185,7 @@
       </p:sp>
       <p:pic>
         <p:nvPicPr>
-          <p:cNvPr id="5" name="Image 0" descr="C:\Users\babak\AppData\Local\Temp\claude\D--0A-study-A0-0-ACSAI-0-sem-4-AI-ML-ML-unit-2\13f11f40-7bf3-4475-bdab-4aadda964c01\scratchpad\shots\14-away-dialog.png">    </p:cNvPr>
+          <p:cNvPr id="5" name="Image 0" descr="C:\Users\babak\AppData\Local\Temp\claude\D--0A-study-A0-0-ACSAI-0-sem-4-AI-ML-ML-unit-2\13f11f40-7bf3-4475-bdab-4aadda964c01\scratchpad\shots2\08-create-step1.png">    </p:cNvPr>
           <p:cNvPicPr>
             <a:picLocks noChangeAspect="1"/>
           </p:cNvPicPr>
@@ -2891,7 +3247,7 @@
                 <a:ea typeface="Calibri" pitchFamily="34" charset="-122"/>
                 <a:cs typeface="Calibri" pitchFamily="34" charset="-120"/>
               </a:rPr>
-              <a:t>Going away</a:t>
+              <a:t>Step 1: how often</a:t>
             </a:r>
             <a:endParaRPr lang="en-US" sz="1200" dirty="0"/>
           </a:p>
@@ -2930,7 +3286,7 @@
                 <a:ea typeface="Calibri" pitchFamily="34" charset="-122"/>
                 <a:cs typeface="Calibri" pitchFamily="34" charset="-120"/>
               </a:rPr>
-              <a:t>States the rule before you commit</a:t>
+              <a:t>Four short answers, no schedule jargon</a:t>
             </a:r>
             <a:endParaRPr lang="en-US" sz="1000" dirty="0"/>
           </a:p>
@@ -2965,7 +3321,7 @@
       </p:sp>
       <p:pic>
         <p:nvPicPr>
-          <p:cNvPr id="9" name="Image 1" descr="C:\Users\babak\AppData\Local\Temp\claude\D--0A-study-A0-0-ACSAI-0-sem-4-AI-ML-ML-unit-2\13f11f40-7bf3-4475-bdab-4aadda964c01\scratchpad\shots\15-away-banner.png">    </p:cNvPr>
+          <p:cNvPr id="9" name="Image 1" descr="C:\Users\babak\AppData\Local\Temp\claude\D--0A-study-A0-0-ACSAI-0-sem-4-AI-ML-ML-unit-2\13f11f40-7bf3-4475-bdab-4aadda964c01\scratchpad\shots2\09-create-tooltip.png">    </p:cNvPr>
           <p:cNvPicPr>
             <a:picLocks noChangeAspect="1"/>
           </p:cNvPicPr>
@@ -3027,7 +3383,7 @@
                 <a:ea typeface="Calibri" pitchFamily="34" charset="-122"/>
                 <a:cs typeface="Calibri" pitchFamily="34" charset="-120"/>
               </a:rPr>
-              <a:t>While you are away</a:t>
+              <a:t>The explanation, on ask</a:t>
             </a:r>
             <a:endParaRPr lang="en-US" sz="1200" dirty="0"/>
           </a:p>
@@ -3066,7 +3422,7 @@
                 <a:ea typeface="Calibri" pitchFamily="34" charset="-122"/>
                 <a:cs typeface="Calibri" pitchFamily="34" charset="-120"/>
               </a:rPr>
-              <a:t>Visible on your own board, with a way back</a:t>
+              <a:t>Behind a '?', so the choice stays short</a:t>
             </a:r>
             <a:endParaRPr lang="en-US" sz="1000" dirty="0"/>
           </a:p>
@@ -3101,7 +3457,7 @@
       </p:sp>
       <p:pic>
         <p:nvPicPr>
-          <p:cNvPr id="13" name="Image 2" descr="C:\Users\babak\AppData\Local\Temp\claude\D--0A-study-A0-0-ACSAI-0-sem-4-AI-ML-ML-unit-2\13f11f40-7bf3-4475-bdab-4aadda964c01\scratchpad\shots\16-after-pass.png">    </p:cNvPr>
+          <p:cNvPr id="13" name="Image 2" descr="C:\Users\babak\AppData\Local\Temp\claude\D--0A-study-A0-0-ACSAI-0-sem-4-AI-ML-ML-unit-2\13f11f40-7bf3-4475-bdab-4aadda964c01\scratchpad\shots2\10-create-step2.png">    </p:cNvPr>
           <p:cNvPicPr>
             <a:picLocks noChangeAspect="1"/>
           </p:cNvPicPr>
@@ -3163,7 +3519,7 @@
                 <a:ea typeface="Calibri" pitchFamily="34" charset="-122"/>
                 <a:cs typeface="Calibri" pitchFamily="34" charset="-120"/>
               </a:rPr>
-              <a:t>After a busy pass</a:t>
+              <a:t>Step 2: repeating</a:t>
             </a:r>
             <a:endParaRPr lang="en-US" sz="1200" dirty="0"/>
           </a:p>
@@ -3202,7 +3558,7 @@
                 <a:ea typeface="Calibri" pitchFamily="34" charset="-122"/>
                 <a:cs typeface="Calibri" pitchFamily="34" charset="-120"/>
               </a:rPr>
-              <a:t>It moves on; it comes back to you next cycle</a:t>
+              <a:t>Interval, then the order of turns</a:t>
             </a:r>
             <a:endParaRPr lang="en-US" sz="1000" dirty="0"/>
           </a:p>
@@ -3237,7 +3593,7 @@
       </p:sp>
       <p:pic>
         <p:nvPicPr>
-          <p:cNvPr id="17" name="Image 3" descr="C:\Users\babak\AppData\Local\Temp\claude\D--0A-study-A0-0-ACSAI-0-sem-4-AI-ML-ML-unit-2\13f11f40-7bf3-4475-bdab-4aadda964c01\scratchpad\shots\09-members.png">    </p:cNvPr>
+          <p:cNvPr id="17" name="Image 3" descr="C:\Users\babak\AppData\Local\Temp\claude\D--0A-study-A0-0-ACSAI-0-sem-4-AI-ML-ML-unit-2\13f11f40-7bf3-4475-bdab-4aadda964c01\scratchpad\shots2\12-create-onetime.png">    </p:cNvPr>
           <p:cNvPicPr>
             <a:picLocks noChangeAspect="1"/>
           </p:cNvPicPr>
@@ -3299,7 +3655,7 @@
                 <a:ea typeface="Calibri" pitchFamily="34" charset="-122"/>
                 <a:cs typeface="Calibri" pitchFamily="34" charset="-120"/>
               </a:rPr>
-              <a:t>The household</a:t>
+              <a:t>Step 2: one-off</a:t>
             </a:r>
             <a:endParaRPr lang="en-US" sz="1200" dirty="0"/>
           </a:p>
@@ -3338,7 +3694,7 @@
                 <a:ea typeface="Calibri" pitchFamily="34" charset="-122"/>
                 <a:cs typeface="Calibri" pitchFamily="34" charset="-120"/>
               </a:rPr>
-              <a:t>Away is shown, never hidden</a:t>
+              <a:t>One person, one date, no rotation</a:t>
             </a:r>
             <a:endParaRPr lang="en-US" sz="1000" dirty="0"/>
           </a:p>
@@ -3409,7 +3765,7 @@
                 <a:ea typeface="Calibri" pitchFamily="34" charset="-122"/>
                 <a:cs typeface="Calibri" pitchFamily="34" charset="-120"/>
               </a:rPr>
-              <a:t>What has happened</a:t>
+              <a:t>Changing it, and removing it</a:t>
             </a:r>
             <a:endParaRPr lang="en-US" sz="3400" dirty="0"/>
           </a:p>
@@ -3448,7 +3804,7 @@
                 <a:ea typeface="Calibri" pitchFamily="34" charset="-122"/>
                 <a:cs typeface="Calibri" pitchFamily="34" charset="-120"/>
               </a:rPr>
-              <a:t>A record the household can point at. It counts, it does not rank, and it names no one as late.</a:t>
+              <a:t>Editing is the same two screens, prefilled. A schedule change re-dates the open turn rather than stranding it.</a:t>
             </a:r>
             <a:endParaRPr lang="en-US" sz="1300" dirty="0"/>
           </a:p>
@@ -3483,7 +3839,7 @@
       </p:sp>
       <p:pic>
         <p:nvPicPr>
-          <p:cNvPr id="5" name="Image 0" descr="C:\Users\babak\AppData\Local\Temp\claude\D--0A-study-A0-0-ACSAI-0-sem-4-AI-ML-ML-unit-2\13f11f40-7bf3-4475-bdab-4aadda964c01\scratchpad\shots\06-chore-history.png">    </p:cNvPr>
+          <p:cNvPr id="5" name="Image 0" descr="C:\Users\babak\AppData\Local\Temp\claude\D--0A-study-A0-0-ACSAI-0-sem-4-AI-ML-ML-unit-2\13f11f40-7bf3-4475-bdab-4aadda964c01\scratchpad\shots2\21-edit-step1.png">    </p:cNvPr>
           <p:cNvPicPr>
             <a:picLocks noChangeAspect="1"/>
           </p:cNvPicPr>
@@ -3545,7 +3901,7 @@
                 <a:ea typeface="Calibri" pitchFamily="34" charset="-122"/>
                 <a:cs typeface="Calibri" pitchFamily="34" charset="-120"/>
               </a:rPr>
-              <a:t>One chore's history</a:t>
+              <a:t>Edit, prefilled</a:t>
             </a:r>
             <a:endParaRPr lang="en-US" sz="1200" dirty="0"/>
           </a:p>
@@ -3584,7 +3940,7 @@
                 <a:ea typeface="Calibri" pitchFamily="34" charset="-122"/>
                 <a:cs typeface="Calibri" pitchFamily="34" charset="-120"/>
               </a:rPr>
-              <a:t>Two dates, no verdict on either</a:t>
+              <a:t>The one kind it cannot become is explained</a:t>
             </a:r>
             <a:endParaRPr lang="en-US" sz="1000" dirty="0"/>
           </a:p>
@@ -3619,7 +3975,7 @@
       </p:sp>
       <p:pic>
         <p:nvPicPr>
-          <p:cNvPr id="9" name="Image 1" descr="C:\Users\babak\AppData\Local\Temp\claude\D--0A-study-A0-0-ACSAI-0-sem-4-AI-ML-ML-unit-2\13f11f40-7bf3-4475-bdab-4aadda964c01\scratchpad\shots\11-group-history.png">    </p:cNvPr>
+          <p:cNvPr id="9" name="Image 1" descr="C:\Users\babak\AppData\Local\Temp\claude\D--0A-study-A0-0-ACSAI-0-sem-4-AI-ML-ML-unit-2\13f11f40-7bf3-4475-bdab-4aadda964c01\scratchpad\shots2\22-edit-step2.png">    </p:cNvPr>
           <p:cNvPicPr>
             <a:picLocks noChangeAspect="1"/>
           </p:cNvPicPr>
@@ -3681,7 +4037,7 @@
                 <a:ea typeface="Calibri" pitchFamily="34" charset="-122"/>
                 <a:cs typeface="Calibri" pitchFamily="34" charset="-120"/>
               </a:rPr>
-              <a:t>What's been done</a:t>
+              <a:t>The same step 2</a:t>
             </a:r>
             <a:endParaRPr lang="en-US" sz="1200" dirty="0"/>
           </a:p>
@@ -3720,7 +4076,7 @@
                 <a:ea typeface="Calibri" pitchFamily="34" charset="-122"/>
                 <a:cs typeface="Calibri" pitchFamily="34" charset="-120"/>
               </a:rPr>
-              <a:t>Join order, zeroes included, days away noted</a:t>
+              <a:t>Rotation and done-line as they stand</a:t>
             </a:r>
             <a:endParaRPr lang="en-US" sz="1000" dirty="0"/>
           </a:p>
@@ -3755,7 +4111,7 @@
       </p:sp>
       <p:pic>
         <p:nvPicPr>
-          <p:cNvPr id="13" name="Image 2" descr="C:\Users\babak\AppData\Local\Temp\claude\D--0A-study-A0-0-ACSAI-0-sem-4-AI-ML-ML-unit-2\13f11f40-7bf3-4475-bdab-4aadda964c01\scratchpad\shots\10-activity.png">    </p:cNvPr>
+          <p:cNvPr id="13" name="Image 2" descr="C:\Users\babak\AppData\Local\Temp\claude\D--0A-study-A0-0-ACSAI-0-sem-4-AI-ML-ML-unit-2\13f11f40-7bf3-4475-bdab-4aadda964c01\scratchpad\shots2\23-edit-delete.png">    </p:cNvPr>
           <p:cNvPicPr>
             <a:picLocks noChangeAspect="1"/>
           </p:cNvPicPr>
@@ -3817,7 +4173,7 @@
                 <a:ea typeface="Calibri" pitchFamily="34" charset="-122"/>
                 <a:cs typeface="Calibri" pitchFamily="34" charset="-120"/>
               </a:rPr>
-              <a:t>Activity</a:t>
+              <a:t>Delete lives here</a:t>
             </a:r>
             <a:endParaRPr lang="en-US" sz="1200" dirty="0"/>
           </a:p>
@@ -3856,7 +4212,7 @@
                 <a:ea typeface="Calibri" pitchFamily="34" charset="-122"/>
                 <a:cs typeface="Calibri" pitchFamily="34" charset="-120"/>
               </a:rPr>
-              <a:t>Every group-visible change, in words</a:t>
+              <a:t>At the end of editing, not on the row</a:t>
             </a:r>
             <a:endParaRPr lang="en-US" sz="1000" dirty="0"/>
           </a:p>
@@ -3891,7 +4247,7 @@
       </p:sp>
       <p:pic>
         <p:nvPicPr>
-          <p:cNvPr id="17" name="Image 3" descr="C:\Users\babak\AppData\Local\Temp\claude\D--0A-study-A0-0-ACSAI-0-sem-4-AI-ML-ML-unit-2\13f11f40-7bf3-4475-bdab-4aadda964c01\scratchpad\shots\13-quiet-hours.png">    </p:cNvPr>
+          <p:cNvPr id="17" name="Image 3" descr="C:\Users\babak\AppData\Local\Temp\claude\D--0A-study-A0-0-ACSAI-0-sem-4-AI-ML-ML-unit-2\13f11f40-7bf3-4475-bdab-4aadda964c01\scratchpad\shots2\24-delete-confirm.png">    </p:cNvPr>
           <p:cNvPicPr>
             <a:picLocks noChangeAspect="1"/>
           </p:cNvPicPr>
@@ -3953,7 +4309,7 @@
                 <a:ea typeface="Calibri" pitchFamily="34" charset="-122"/>
                 <a:cs typeface="Calibri" pitchFamily="34" charset="-120"/>
               </a:rPr>
-              <a:t>Quiet hours</a:t>
+              <a:t>What delete costs</a:t>
             </a:r>
             <a:endParaRPr lang="en-US" sz="1200" dirty="0"/>
           </a:p>
@@ -3992,7 +4348,2351 @@
                 <a:ea typeface="Calibri" pitchFamily="34" charset="-122"/>
                 <a:cs typeface="Calibri" pitchFamily="34" charset="-120"/>
               </a:rPr>
-              <a:t>Held, not dropped — nothing is lost</a:t>
+              <a:t>Names the history it takes with it</a:t>
+            </a:r>
+            <a:endParaRPr lang="en-US" sz="1000" dirty="0"/>
+          </a:p>
+        </p:txBody>
+      </p:sp>
+    </p:spTree>
+  </p:cSld>
+  <p:clrMapOvr>
+    <a:masterClrMapping/>
+  </p:clrMapOvr>
+</p:sld>
+</file>
+
+<file path=ppt/slides/slide6.xml><?xml version="1.0" encoding="utf-8"?>
+<p:sld xmlns:a="http://schemas.openxmlformats.org/drawingml/2006/main" xmlns:r="http://schemas.openxmlformats.org/officeDocument/2006/relationships" xmlns:p="http://schemas.openxmlformats.org/presentationml/2006/main">
+  <p:cSld name="Slide 6">
+    <p:bg>
+      <p:bgPr>
+        <a:solidFill>
+          <a:srgbClr val="FFFFFF"/>
+        </a:solidFill>
+      </p:bgPr>
+    </p:bg>
+    <p:spTree>
+      <p:nvGrpSpPr>
+        <p:cNvPr id="1" name=""/>
+        <p:cNvGrpSpPr/>
+        <p:nvPr/>
+      </p:nvGrpSpPr>
+      <p:grpSpPr>
+        <a:xfrm>
+          <a:off x="0" y="0"/>
+          <a:ext cx="0" cy="0"/>
+          <a:chOff x="0" y="0"/>
+          <a:chExt cx="0" cy="0"/>
+        </a:xfrm>
+      </p:grpSpPr>
+      <p:sp>
+        <p:nvSpPr>
+          <p:cNvPr id="2" name="Text 0"/>
+          <p:cNvSpPr txBox="1"/>
+          <p:nvPr/>
+        </p:nvSpPr>
+        <p:spPr>
+          <a:xfrm>
+            <a:off x="731520" y="292608"/>
+            <a:ext cx="10698480" cy="502920"/>
+          </a:xfrm>
+          <a:prstGeom prst="rect">
+            <a:avLst/>
+          </a:prstGeom>
+          <a:noFill/>
+          <a:ln/>
+        </p:spPr>
+        <p:txBody>
+          <a:bodyPr wrap="square" lIns="0" tIns="0" rIns="0" bIns="0" rtlCol="0" anchor="ctr"/>
+          <a:lstStyle/>
+          <a:p>
+            <a:pPr indent="0" marL="0">
+              <a:buNone/>
+            </a:pPr>
+            <a:r>
+              <a:rPr lang="en-US" sz="3400" b="1" dirty="0">
+                <a:solidFill>
+                  <a:srgbClr val="1A1B2E"/>
+                </a:solidFill>
+                <a:latin typeface="Calibri" pitchFamily="34" charset="0"/>
+                <a:ea typeface="Calibri" pitchFamily="34" charset="-122"/>
+                <a:cs typeface="Calibri" pitchFamily="34" charset="-120"/>
+              </a:rPr>
+              <a:t>Busy, away, and whose turn</a:t>
+            </a:r>
+            <a:endParaRPr lang="en-US" sz="3400" dirty="0"/>
+          </a:p>
+        </p:txBody>
+      </p:sp>
+      <p:sp>
+        <p:nvSpPr>
+          <p:cNvPr id="3" name="Text 1"/>
+          <p:cNvSpPr txBox="1"/>
+          <p:nvPr/>
+        </p:nvSpPr>
+        <p:spPr>
+          <a:xfrm>
+            <a:off x="758952" y="786384"/>
+            <a:ext cx="10698480" cy="329184"/>
+          </a:xfrm>
+          <a:prstGeom prst="rect">
+            <a:avLst/>
+          </a:prstGeom>
+          <a:noFill/>
+          <a:ln/>
+        </p:spPr>
+        <p:txBody>
+          <a:bodyPr wrap="square" lIns="0" tIns="0" rIns="0" bIns="0" rtlCol="0" anchor="ctr"/>
+          <a:lstStyle/>
+          <a:p>
+            <a:pPr indent="0" marL="0">
+              <a:buNone/>
+            </a:pPr>
+            <a:r>
+              <a:rPr lang="en-US" sz="1300" dirty="0">
+                <a:solidFill>
+                  <a:srgbClr val="6B6F80"/>
+                </a:solidFill>
+                <a:latin typeface="Calibri" pitchFamily="34" charset="0"/>
+                <a:ea typeface="Calibri" pitchFamily="34" charset="-122"/>
+                <a:cs typeface="Calibri" pitchFamily="34" charset="-120"/>
+              </a:rPr>
+              <a:t>The only two exits from a turn besides doing it. Neither cancels what you owe.</a:t>
+            </a:r>
+            <a:endParaRPr lang="en-US" sz="1300" dirty="0"/>
+          </a:p>
+        </p:txBody>
+      </p:sp>
+      <p:sp>
+        <p:nvSpPr>
+          <p:cNvPr id="4" name="Shape 2"/>
+          <p:cNvSpPr/>
+          <p:nvPr/>
+        </p:nvSpPr>
+        <p:spPr>
+          <a:xfrm>
+            <a:off x="754380" y="1188720"/>
+            <a:ext cx="2286000" cy="4937760"/>
+          </a:xfrm>
+          <a:prstGeom prst="roundRect">
+            <a:avLst>
+              <a:gd name="adj" fmla="val 4800"/>
+            </a:avLst>
+          </a:prstGeom>
+          <a:solidFill>
+            <a:srgbClr val="F4F5FA"/>
+          </a:solidFill>
+          <a:ln w="12700">
+            <a:solidFill>
+              <a:srgbClr val="E4E6F0"/>
+            </a:solidFill>
+            <a:prstDash val="solid"/>
+          </a:ln>
+        </p:spPr>
+      </p:sp>
+      <p:pic>
+        <p:nvPicPr>
+          <p:cNvPr id="5" name="Image 0" descr="C:\Users\babak\AppData\Local\Temp\claude\D--0A-study-A0-0-ACSAI-0-sem-4-AI-ML-ML-unit-2\13f11f40-7bf3-4475-bdab-4aadda964c01\scratchpad\shots2\25-pass-confirm.png">    </p:cNvPr>
+          <p:cNvPicPr>
+            <a:picLocks noChangeAspect="1"/>
+          </p:cNvPicPr>
+          <p:nvPr/>
+        </p:nvPicPr>
+        <p:blipFill>
+          <a:blip r:embed="rId1"/>
+          <a:stretch>
+            <a:fillRect/>
+          </a:stretch>
+        </p:blipFill>
+        <p:spPr>
+          <a:xfrm>
+            <a:off x="868680" y="1353312"/>
+            <a:ext cx="2057400" cy="4572000"/>
+          </a:xfrm>
+          <a:prstGeom prst="rect">
+            <a:avLst/>
+          </a:prstGeom>
+          <a:effectLst>
+            <a:outerShdw sx="100000" sy="100000" kx="0" ky="0" algn="bl" rotWithShape="0" blurRad="127000" dist="38100" dir="5400000">
+              <a:srgbClr val="1A1B2E">
+                <a:alpha val="22000"/>
+              </a:srgbClr>
+            </a:outerShdw>
+          </a:effectLst>
+        </p:spPr>
+      </p:pic>
+      <p:sp>
+        <p:nvSpPr>
+          <p:cNvPr id="6" name="Text 3"/>
+          <p:cNvSpPr txBox="1"/>
+          <p:nvPr/>
+        </p:nvSpPr>
+        <p:spPr>
+          <a:xfrm>
+            <a:off x="754380" y="6236208"/>
+            <a:ext cx="2286000" cy="256032"/>
+          </a:xfrm>
+          <a:prstGeom prst="rect">
+            <a:avLst/>
+          </a:prstGeom>
+          <a:noFill/>
+          <a:ln/>
+        </p:spPr>
+        <p:txBody>
+          <a:bodyPr wrap="square" lIns="0" tIns="0" rIns="0" bIns="0" rtlCol="0" anchor="ctr"/>
+          <a:lstStyle/>
+          <a:p>
+            <a:pPr algn="ctr" indent="0" marL="0">
+              <a:buNone/>
+            </a:pPr>
+            <a:r>
+              <a:rPr lang="en-US" sz="1200" b="1" dirty="0">
+                <a:solidFill>
+                  <a:srgbClr val="1A1B2E"/>
+                </a:solidFill>
+                <a:latin typeface="Calibri" pitchFamily="34" charset="0"/>
+                <a:ea typeface="Calibri" pitchFamily="34" charset="-122"/>
+                <a:cs typeface="Calibri" pitchFamily="34" charset="-120"/>
+              </a:rPr>
+              <a:t>Passing it on</a:t>
+            </a:r>
+            <a:endParaRPr lang="en-US" sz="1200" dirty="0"/>
+          </a:p>
+        </p:txBody>
+      </p:sp>
+      <p:sp>
+        <p:nvSpPr>
+          <p:cNvPr id="7" name="Text 4"/>
+          <p:cNvSpPr txBox="1"/>
+          <p:nvPr/>
+        </p:nvSpPr>
+        <p:spPr>
+          <a:xfrm>
+            <a:off x="644652" y="6492240"/>
+            <a:ext cx="2505456" cy="384048"/>
+          </a:xfrm>
+          <a:prstGeom prst="rect">
+            <a:avLst/>
+          </a:prstGeom>
+          <a:noFill/>
+          <a:ln/>
+        </p:spPr>
+        <p:txBody>
+          <a:bodyPr wrap="square" lIns="0" tIns="0" rIns="0" bIns="0" rtlCol="0" anchor="ctr"/>
+          <a:lstStyle/>
+          <a:p>
+            <a:pPr algn="ctr" indent="0" marL="0">
+              <a:buNone/>
+            </a:pPr>
+            <a:r>
+              <a:rPr lang="en-US" sz="1000" dirty="0">
+                <a:solidFill>
+                  <a:srgbClr val="6B6F80"/>
+                </a:solidFill>
+                <a:latin typeface="Calibri" pitchFamily="34" charset="0"/>
+                <a:ea typeface="Calibri" pitchFamily="34" charset="-122"/>
+                <a:cs typeface="Calibri" pitchFamily="34" charset="-120"/>
+              </a:rPr>
+              <a:t>Says who is told, and that nobody else is</a:t>
+            </a:r>
+            <a:endParaRPr lang="en-US" sz="1000" dirty="0"/>
+          </a:p>
+        </p:txBody>
+      </p:sp>
+      <p:sp>
+        <p:nvSpPr>
+          <p:cNvPr id="8" name="Shape 5"/>
+          <p:cNvSpPr/>
+          <p:nvPr/>
+        </p:nvSpPr>
+        <p:spPr>
+          <a:xfrm>
+            <a:off x="3543300" y="1188720"/>
+            <a:ext cx="2286000" cy="4937760"/>
+          </a:xfrm>
+          <a:prstGeom prst="roundRect">
+            <a:avLst>
+              <a:gd name="adj" fmla="val 4800"/>
+            </a:avLst>
+          </a:prstGeom>
+          <a:solidFill>
+            <a:srgbClr val="F4F5FA"/>
+          </a:solidFill>
+          <a:ln w="12700">
+            <a:solidFill>
+              <a:srgbClr val="E4E6F0"/>
+            </a:solidFill>
+            <a:prstDash val="solid"/>
+          </a:ln>
+        </p:spPr>
+      </p:sp>
+      <p:pic>
+        <p:nvPicPr>
+          <p:cNvPr id="9" name="Image 1" descr="C:\Users\babak\AppData\Local\Temp\claude\D--0A-study-A0-0-ACSAI-0-sem-4-AI-ML-ML-unit-2\13f11f40-7bf3-4475-bdab-4aadda964c01\scratchpad\shots2\26-after-pass.png">    </p:cNvPr>
+          <p:cNvPicPr>
+            <a:picLocks noChangeAspect="1"/>
+          </p:cNvPicPr>
+          <p:nvPr/>
+        </p:nvPicPr>
+        <p:blipFill>
+          <a:blip r:embed="rId2"/>
+          <a:stretch>
+            <a:fillRect/>
+          </a:stretch>
+        </p:blipFill>
+        <p:spPr>
+          <a:xfrm>
+            <a:off x="3657600" y="1353312"/>
+            <a:ext cx="2057400" cy="4572000"/>
+          </a:xfrm>
+          <a:prstGeom prst="rect">
+            <a:avLst/>
+          </a:prstGeom>
+          <a:effectLst>
+            <a:outerShdw sx="100000" sy="100000" kx="0" ky="0" algn="bl" rotWithShape="0" blurRad="127000" dist="38100" dir="5400000">
+              <a:srgbClr val="1A1B2E">
+                <a:alpha val="22000"/>
+              </a:srgbClr>
+            </a:outerShdw>
+          </a:effectLst>
+        </p:spPr>
+      </p:pic>
+      <p:sp>
+        <p:nvSpPr>
+          <p:cNvPr id="10" name="Text 6"/>
+          <p:cNvSpPr txBox="1"/>
+          <p:nvPr/>
+        </p:nvSpPr>
+        <p:spPr>
+          <a:xfrm>
+            <a:off x="3543300" y="6236208"/>
+            <a:ext cx="2286000" cy="256032"/>
+          </a:xfrm>
+          <a:prstGeom prst="rect">
+            <a:avLst/>
+          </a:prstGeom>
+          <a:noFill/>
+          <a:ln/>
+        </p:spPr>
+        <p:txBody>
+          <a:bodyPr wrap="square" lIns="0" tIns="0" rIns="0" bIns="0" rtlCol="0" anchor="ctr"/>
+          <a:lstStyle/>
+          <a:p>
+            <a:pPr algn="ctr" indent="0" marL="0">
+              <a:buNone/>
+            </a:pPr>
+            <a:r>
+              <a:rPr lang="en-US" sz="1200" b="1" dirty="0">
+                <a:solidFill>
+                  <a:srgbClr val="1A1B2E"/>
+                </a:solidFill>
+                <a:latin typeface="Calibri" pitchFamily="34" charset="0"/>
+                <a:ea typeface="Calibri" pitchFamily="34" charset="-122"/>
+                <a:cs typeface="Calibri" pitchFamily="34" charset="-120"/>
+              </a:rPr>
+              <a:t>After the pass</a:t>
+            </a:r>
+            <a:endParaRPr lang="en-US" sz="1200" dirty="0"/>
+          </a:p>
+        </p:txBody>
+      </p:sp>
+      <p:sp>
+        <p:nvSpPr>
+          <p:cNvPr id="11" name="Text 7"/>
+          <p:cNvSpPr txBox="1"/>
+          <p:nvPr/>
+        </p:nvSpPr>
+        <p:spPr>
+          <a:xfrm>
+            <a:off x="3433572" y="6492240"/>
+            <a:ext cx="2505456" cy="384048"/>
+          </a:xfrm>
+          <a:prstGeom prst="rect">
+            <a:avLst/>
+          </a:prstGeom>
+          <a:noFill/>
+          <a:ln/>
+        </p:spPr>
+        <p:txBody>
+          <a:bodyPr wrap="square" lIns="0" tIns="0" rIns="0" bIns="0" rtlCol="0" anchor="ctr"/>
+          <a:lstStyle/>
+          <a:p>
+            <a:pPr algn="ctr" indent="0" marL="0">
+              <a:buNone/>
+            </a:pPr>
+            <a:r>
+              <a:rPr lang="en-US" sz="1000" dirty="0">
+                <a:solidFill>
+                  <a:srgbClr val="6B6F80"/>
+                </a:solidFill>
+                <a:latin typeface="Calibri" pitchFamily="34" charset="0"/>
+                <a:ea typeface="Calibri" pitchFamily="34" charset="-122"/>
+                <a:cs typeface="Calibri" pitchFamily="34" charset="-120"/>
+              </a:rPr>
+              <a:t>It moves, and it comes back next cycle</a:t>
+            </a:r>
+            <a:endParaRPr lang="en-US" sz="1000" dirty="0"/>
+          </a:p>
+        </p:txBody>
+      </p:sp>
+      <p:sp>
+        <p:nvSpPr>
+          <p:cNvPr id="12" name="Shape 8"/>
+          <p:cNvSpPr/>
+          <p:nvPr/>
+        </p:nvSpPr>
+        <p:spPr>
+          <a:xfrm>
+            <a:off x="6332220" y="1188720"/>
+            <a:ext cx="2286000" cy="4937760"/>
+          </a:xfrm>
+          <a:prstGeom prst="roundRect">
+            <a:avLst>
+              <a:gd name="adj" fmla="val 4800"/>
+            </a:avLst>
+          </a:prstGeom>
+          <a:solidFill>
+            <a:srgbClr val="F4F5FA"/>
+          </a:solidFill>
+          <a:ln w="12700">
+            <a:solidFill>
+              <a:srgbClr val="E4E6F0"/>
+            </a:solidFill>
+            <a:prstDash val="solid"/>
+          </a:ln>
+        </p:spPr>
+      </p:sp>
+      <p:pic>
+        <p:nvPicPr>
+          <p:cNvPr id="13" name="Image 2" descr="C:\Users\babak\AppData\Local\Temp\claude\D--0A-study-A0-0-ACSAI-0-sem-4-AI-ML-ML-unit-2\13f11f40-7bf3-4475-bdab-4aadda964c01\scratchpad\shots2\20-away-dialog.png">    </p:cNvPr>
+          <p:cNvPicPr>
+            <a:picLocks noChangeAspect="1"/>
+          </p:cNvPicPr>
+          <p:nvPr/>
+        </p:nvPicPr>
+        <p:blipFill>
+          <a:blip r:embed="rId3"/>
+          <a:stretch>
+            <a:fillRect/>
+          </a:stretch>
+        </p:blipFill>
+        <p:spPr>
+          <a:xfrm>
+            <a:off x="6446520" y="1353312"/>
+            <a:ext cx="2057400" cy="4572000"/>
+          </a:xfrm>
+          <a:prstGeom prst="rect">
+            <a:avLst/>
+          </a:prstGeom>
+          <a:effectLst>
+            <a:outerShdw sx="100000" sy="100000" kx="0" ky="0" algn="bl" rotWithShape="0" blurRad="127000" dist="38100" dir="5400000">
+              <a:srgbClr val="1A1B2E">
+                <a:alpha val="22000"/>
+              </a:srgbClr>
+            </a:outerShdw>
+          </a:effectLst>
+        </p:spPr>
+      </p:pic>
+      <p:sp>
+        <p:nvSpPr>
+          <p:cNvPr id="14" name="Text 9"/>
+          <p:cNvSpPr txBox="1"/>
+          <p:nvPr/>
+        </p:nvSpPr>
+        <p:spPr>
+          <a:xfrm>
+            <a:off x="6332220" y="6236208"/>
+            <a:ext cx="2286000" cy="256032"/>
+          </a:xfrm>
+          <a:prstGeom prst="rect">
+            <a:avLst/>
+          </a:prstGeom>
+          <a:noFill/>
+          <a:ln/>
+        </p:spPr>
+        <p:txBody>
+          <a:bodyPr wrap="square" lIns="0" tIns="0" rIns="0" bIns="0" rtlCol="0" anchor="ctr"/>
+          <a:lstStyle/>
+          <a:p>
+            <a:pPr algn="ctr" indent="0" marL="0">
+              <a:buNone/>
+            </a:pPr>
+            <a:r>
+              <a:rPr lang="en-US" sz="1200" b="1" dirty="0">
+                <a:solidFill>
+                  <a:srgbClr val="1A1B2E"/>
+                </a:solidFill>
+                <a:latin typeface="Calibri" pitchFamily="34" charset="0"/>
+                <a:ea typeface="Calibri" pitchFamily="34" charset="-122"/>
+                <a:cs typeface="Calibri" pitchFamily="34" charset="-120"/>
+              </a:rPr>
+              <a:t>Going away</a:t>
+            </a:r>
+            <a:endParaRPr lang="en-US" sz="1200" dirty="0"/>
+          </a:p>
+        </p:txBody>
+      </p:sp>
+      <p:sp>
+        <p:nvSpPr>
+          <p:cNvPr id="15" name="Text 10"/>
+          <p:cNvSpPr txBox="1"/>
+          <p:nvPr/>
+        </p:nvSpPr>
+        <p:spPr>
+          <a:xfrm>
+            <a:off x="6222492" y="6492240"/>
+            <a:ext cx="2505456" cy="384048"/>
+          </a:xfrm>
+          <a:prstGeom prst="rect">
+            <a:avLst/>
+          </a:prstGeom>
+          <a:noFill/>
+          <a:ln/>
+        </p:spPr>
+        <p:txBody>
+          <a:bodyPr wrap="square" lIns="0" tIns="0" rIns="0" bIns="0" rtlCol="0" anchor="ctr"/>
+          <a:lstStyle/>
+          <a:p>
+            <a:pPr algn="ctr" indent="0" marL="0">
+              <a:buNone/>
+            </a:pPr>
+            <a:r>
+              <a:rPr lang="en-US" sz="1000" dirty="0">
+                <a:solidFill>
+                  <a:srgbClr val="6B6F80"/>
+                </a:solidFill>
+                <a:latin typeface="Calibri" pitchFamily="34" charset="0"/>
+                <a:ea typeface="Calibri" pitchFamily="34" charset="-122"/>
+                <a:cs typeface="Calibri" pitchFamily="34" charset="-120"/>
+              </a:rPr>
+              <a:t>States the rule before you commit</a:t>
+            </a:r>
+            <a:endParaRPr lang="en-US" sz="1000" dirty="0"/>
+          </a:p>
+        </p:txBody>
+      </p:sp>
+      <p:sp>
+        <p:nvSpPr>
+          <p:cNvPr id="16" name="Shape 11"/>
+          <p:cNvSpPr/>
+          <p:nvPr/>
+        </p:nvSpPr>
+        <p:spPr>
+          <a:xfrm>
+            <a:off x="9121140" y="1188720"/>
+            <a:ext cx="2286000" cy="4937760"/>
+          </a:xfrm>
+          <a:prstGeom prst="roundRect">
+            <a:avLst>
+              <a:gd name="adj" fmla="val 4800"/>
+            </a:avLst>
+          </a:prstGeom>
+          <a:solidFill>
+            <a:srgbClr val="F4F5FA"/>
+          </a:solidFill>
+          <a:ln w="12700">
+            <a:solidFill>
+              <a:srgbClr val="E4E6F0"/>
+            </a:solidFill>
+            <a:prstDash val="solid"/>
+          </a:ln>
+        </p:spPr>
+      </p:sp>
+      <p:pic>
+        <p:nvPicPr>
+          <p:cNvPr id="17" name="Image 3" descr="C:\Users\babak\AppData\Local\Temp\claude\D--0A-study-A0-0-ACSAI-0-sem-4-AI-ML-ML-unit-2\13f11f40-7bf3-4475-bdab-4aadda964c01\scratchpad\shots2\16-members.png">    </p:cNvPr>
+          <p:cNvPicPr>
+            <a:picLocks noChangeAspect="1"/>
+          </p:cNvPicPr>
+          <p:nvPr/>
+        </p:nvPicPr>
+        <p:blipFill>
+          <a:blip r:embed="rId4"/>
+          <a:stretch>
+            <a:fillRect/>
+          </a:stretch>
+        </p:blipFill>
+        <p:spPr>
+          <a:xfrm>
+            <a:off x="9235440" y="1353312"/>
+            <a:ext cx="2057400" cy="4572000"/>
+          </a:xfrm>
+          <a:prstGeom prst="rect">
+            <a:avLst/>
+          </a:prstGeom>
+          <a:effectLst>
+            <a:outerShdw sx="100000" sy="100000" kx="0" ky="0" algn="bl" rotWithShape="0" blurRad="127000" dist="38100" dir="5400000">
+              <a:srgbClr val="1A1B2E">
+                <a:alpha val="22000"/>
+              </a:srgbClr>
+            </a:outerShdw>
+          </a:effectLst>
+        </p:spPr>
+      </p:pic>
+      <p:sp>
+        <p:nvSpPr>
+          <p:cNvPr id="18" name="Text 12"/>
+          <p:cNvSpPr txBox="1"/>
+          <p:nvPr/>
+        </p:nvSpPr>
+        <p:spPr>
+          <a:xfrm>
+            <a:off x="9121140" y="6236208"/>
+            <a:ext cx="2286000" cy="256032"/>
+          </a:xfrm>
+          <a:prstGeom prst="rect">
+            <a:avLst/>
+          </a:prstGeom>
+          <a:noFill/>
+          <a:ln/>
+        </p:spPr>
+        <p:txBody>
+          <a:bodyPr wrap="square" lIns="0" tIns="0" rIns="0" bIns="0" rtlCol="0" anchor="ctr"/>
+          <a:lstStyle/>
+          <a:p>
+            <a:pPr algn="ctr" indent="0" marL="0">
+              <a:buNone/>
+            </a:pPr>
+            <a:r>
+              <a:rPr lang="en-US" sz="1200" b="1" dirty="0">
+                <a:solidFill>
+                  <a:srgbClr val="1A1B2E"/>
+                </a:solidFill>
+                <a:latin typeface="Calibri" pitchFamily="34" charset="0"/>
+                <a:ea typeface="Calibri" pitchFamily="34" charset="-122"/>
+                <a:cs typeface="Calibri" pitchFamily="34" charset="-120"/>
+              </a:rPr>
+              <a:t>The household</a:t>
+            </a:r>
+            <a:endParaRPr lang="en-US" sz="1200" dirty="0"/>
+          </a:p>
+        </p:txBody>
+      </p:sp>
+      <p:sp>
+        <p:nvSpPr>
+          <p:cNvPr id="19" name="Text 13"/>
+          <p:cNvSpPr txBox="1"/>
+          <p:nvPr/>
+        </p:nvSpPr>
+        <p:spPr>
+          <a:xfrm>
+            <a:off x="9011412" y="6492240"/>
+            <a:ext cx="2505456" cy="384048"/>
+          </a:xfrm>
+          <a:prstGeom prst="rect">
+            <a:avLst/>
+          </a:prstGeom>
+          <a:noFill/>
+          <a:ln/>
+        </p:spPr>
+        <p:txBody>
+          <a:bodyPr wrap="square" lIns="0" tIns="0" rIns="0" bIns="0" rtlCol="0" anchor="ctr"/>
+          <a:lstStyle/>
+          <a:p>
+            <a:pPr algn="ctr" indent="0" marL="0">
+              <a:buNone/>
+            </a:pPr>
+            <a:r>
+              <a:rPr lang="en-US" sz="1000" dirty="0">
+                <a:solidFill>
+                  <a:srgbClr val="6B6F80"/>
+                </a:solidFill>
+                <a:latin typeface="Calibri" pitchFamily="34" charset="0"/>
+                <a:ea typeface="Calibri" pitchFamily="34" charset="-122"/>
+                <a:cs typeface="Calibri" pitchFamily="34" charset="-120"/>
+              </a:rPr>
+              <a:t>Away is shown; a pass never is</a:t>
+            </a:r>
+            <a:endParaRPr lang="en-US" sz="1000" dirty="0"/>
+          </a:p>
+        </p:txBody>
+      </p:sp>
+    </p:spTree>
+  </p:cSld>
+  <p:clrMapOvr>
+    <a:masterClrMapping/>
+  </p:clrMapOvr>
+</p:sld>
+</file>
+
+<file path=ppt/slides/slide7.xml><?xml version="1.0" encoding="utf-8"?>
+<p:sld xmlns:a="http://schemas.openxmlformats.org/drawingml/2006/main" xmlns:r="http://schemas.openxmlformats.org/officeDocument/2006/relationships" xmlns:p="http://schemas.openxmlformats.org/presentationml/2006/main">
+  <p:cSld name="Slide 7">
+    <p:bg>
+      <p:bgPr>
+        <a:solidFill>
+          <a:srgbClr val="FFFFFF"/>
+        </a:solidFill>
+      </p:bgPr>
+    </p:bg>
+    <p:spTree>
+      <p:nvGrpSpPr>
+        <p:cNvPr id="1" name=""/>
+        <p:cNvGrpSpPr/>
+        <p:nvPr/>
+      </p:nvGrpSpPr>
+      <p:grpSpPr>
+        <a:xfrm>
+          <a:off x="0" y="0"/>
+          <a:ext cx="0" cy="0"/>
+          <a:chOff x="0" y="0"/>
+          <a:chExt cx="0" cy="0"/>
+        </a:xfrm>
+      </p:grpSpPr>
+      <p:sp>
+        <p:nvSpPr>
+          <p:cNvPr id="2" name="Text 0"/>
+          <p:cNvSpPr txBox="1"/>
+          <p:nvPr/>
+        </p:nvSpPr>
+        <p:spPr>
+          <a:xfrm>
+            <a:off x="731520" y="292608"/>
+            <a:ext cx="10698480" cy="502920"/>
+          </a:xfrm>
+          <a:prstGeom prst="rect">
+            <a:avLst/>
+          </a:prstGeom>
+          <a:noFill/>
+          <a:ln/>
+        </p:spPr>
+        <p:txBody>
+          <a:bodyPr wrap="square" lIns="0" tIns="0" rIns="0" bIns="0" rtlCol="0" anchor="ctr"/>
+          <a:lstStyle/>
+          <a:p>
+            <a:pPr indent="0" marL="0">
+              <a:buNone/>
+            </a:pPr>
+            <a:r>
+              <a:rPr lang="en-US" sz="3400" b="1" dirty="0">
+                <a:solidFill>
+                  <a:srgbClr val="1A1B2E"/>
+                </a:solidFill>
+                <a:latin typeface="Calibri" pitchFamily="34" charset="0"/>
+                <a:ea typeface="Calibri" pitchFamily="34" charset="-122"/>
+                <a:cs typeface="Calibri" pitchFamily="34" charset="-120"/>
+              </a:rPr>
+              <a:t>What has happened</a:t>
+            </a:r>
+            <a:endParaRPr lang="en-US" sz="3400" dirty="0"/>
+          </a:p>
+        </p:txBody>
+      </p:sp>
+      <p:sp>
+        <p:nvSpPr>
+          <p:cNvPr id="3" name="Text 1"/>
+          <p:cNvSpPr txBox="1"/>
+          <p:nvPr/>
+        </p:nvSpPr>
+        <p:spPr>
+          <a:xfrm>
+            <a:off x="758952" y="786384"/>
+            <a:ext cx="10698480" cy="329184"/>
+          </a:xfrm>
+          <a:prstGeom prst="rect">
+            <a:avLst/>
+          </a:prstGeom>
+          <a:noFill/>
+          <a:ln/>
+        </p:spPr>
+        <p:txBody>
+          <a:bodyPr wrap="square" lIns="0" tIns="0" rIns="0" bIns="0" rtlCol="0" anchor="ctr"/>
+          <a:lstStyle/>
+          <a:p>
+            <a:pPr indent="0" marL="0">
+              <a:buNone/>
+            </a:pPr>
+            <a:r>
+              <a:rPr lang="en-US" sz="1300" dirty="0">
+                <a:solidFill>
+                  <a:srgbClr val="6B6F80"/>
+                </a:solidFill>
+                <a:latin typeface="Calibri" pitchFamily="34" charset="0"/>
+                <a:ea typeface="Calibri" pitchFamily="34" charset="-122"/>
+                <a:cs typeface="Calibri" pitchFamily="34" charset="-120"/>
+              </a:rPr>
+              <a:t>A record the household can point at. It counts, it does not rank, and it names no one as late.</a:t>
+            </a:r>
+            <a:endParaRPr lang="en-US" sz="1300" dirty="0"/>
+          </a:p>
+        </p:txBody>
+      </p:sp>
+      <p:sp>
+        <p:nvSpPr>
+          <p:cNvPr id="4" name="Shape 2"/>
+          <p:cNvSpPr/>
+          <p:nvPr/>
+        </p:nvSpPr>
+        <p:spPr>
+          <a:xfrm>
+            <a:off x="754380" y="1188720"/>
+            <a:ext cx="2286000" cy="4937760"/>
+          </a:xfrm>
+          <a:prstGeom prst="roundRect">
+            <a:avLst>
+              <a:gd name="adj" fmla="val 4800"/>
+            </a:avLst>
+          </a:prstGeom>
+          <a:solidFill>
+            <a:srgbClr val="F4F5FA"/>
+          </a:solidFill>
+          <a:ln w="12700">
+            <a:solidFill>
+              <a:srgbClr val="E4E6F0"/>
+            </a:solidFill>
+            <a:prstDash val="solid"/>
+          </a:ln>
+        </p:spPr>
+      </p:sp>
+      <p:pic>
+        <p:nvPicPr>
+          <p:cNvPr id="5" name="Image 0" descr="C:\Users\babak\AppData\Local\Temp\claude\D--0A-study-A0-0-ACSAI-0-sem-4-AI-ML-ML-unit-2\13f11f40-7bf3-4475-bdab-4aadda964c01\scratchpad\shots2\19-group-history.png">    </p:cNvPr>
+          <p:cNvPicPr>
+            <a:picLocks noChangeAspect="1"/>
+          </p:cNvPicPr>
+          <p:nvPr/>
+        </p:nvPicPr>
+        <p:blipFill>
+          <a:blip r:embed="rId1"/>
+          <a:stretch>
+            <a:fillRect/>
+          </a:stretch>
+        </p:blipFill>
+        <p:spPr>
+          <a:xfrm>
+            <a:off x="868680" y="1353312"/>
+            <a:ext cx="2057400" cy="4572000"/>
+          </a:xfrm>
+          <a:prstGeom prst="rect">
+            <a:avLst/>
+          </a:prstGeom>
+          <a:effectLst>
+            <a:outerShdw sx="100000" sy="100000" kx="0" ky="0" algn="bl" rotWithShape="0" blurRad="127000" dist="38100" dir="5400000">
+              <a:srgbClr val="1A1B2E">
+                <a:alpha val="22000"/>
+              </a:srgbClr>
+            </a:outerShdw>
+          </a:effectLst>
+        </p:spPr>
+      </p:pic>
+      <p:sp>
+        <p:nvSpPr>
+          <p:cNvPr id="6" name="Text 3"/>
+          <p:cNvSpPr txBox="1"/>
+          <p:nvPr/>
+        </p:nvSpPr>
+        <p:spPr>
+          <a:xfrm>
+            <a:off x="754380" y="6236208"/>
+            <a:ext cx="2286000" cy="256032"/>
+          </a:xfrm>
+          <a:prstGeom prst="rect">
+            <a:avLst/>
+          </a:prstGeom>
+          <a:noFill/>
+          <a:ln/>
+        </p:spPr>
+        <p:txBody>
+          <a:bodyPr wrap="square" lIns="0" tIns="0" rIns="0" bIns="0" rtlCol="0" anchor="ctr"/>
+          <a:lstStyle/>
+          <a:p>
+            <a:pPr algn="ctr" indent="0" marL="0">
+              <a:buNone/>
+            </a:pPr>
+            <a:r>
+              <a:rPr lang="en-US" sz="1200" b="1" dirty="0">
+                <a:solidFill>
+                  <a:srgbClr val="1A1B2E"/>
+                </a:solidFill>
+                <a:latin typeface="Calibri" pitchFamily="34" charset="0"/>
+                <a:ea typeface="Calibri" pitchFamily="34" charset="-122"/>
+                <a:cs typeface="Calibri" pitchFamily="34" charset="-120"/>
+              </a:rPr>
+              <a:t>What's been done</a:t>
+            </a:r>
+            <a:endParaRPr lang="en-US" sz="1200" dirty="0"/>
+          </a:p>
+        </p:txBody>
+      </p:sp>
+      <p:sp>
+        <p:nvSpPr>
+          <p:cNvPr id="7" name="Text 4"/>
+          <p:cNvSpPr txBox="1"/>
+          <p:nvPr/>
+        </p:nvSpPr>
+        <p:spPr>
+          <a:xfrm>
+            <a:off x="644652" y="6492240"/>
+            <a:ext cx="2505456" cy="384048"/>
+          </a:xfrm>
+          <a:prstGeom prst="rect">
+            <a:avLst/>
+          </a:prstGeom>
+          <a:noFill/>
+          <a:ln/>
+        </p:spPr>
+        <p:txBody>
+          <a:bodyPr wrap="square" lIns="0" tIns="0" rIns="0" bIns="0" rtlCol="0" anchor="ctr"/>
+          <a:lstStyle/>
+          <a:p>
+            <a:pPr algn="ctr" indent="0" marL="0">
+              <a:buNone/>
+            </a:pPr>
+            <a:r>
+              <a:rPr lang="en-US" sz="1000" dirty="0">
+                <a:solidFill>
+                  <a:srgbClr val="6B6F80"/>
+                </a:solidFill>
+                <a:latin typeface="Calibri" pitchFamily="34" charset="0"/>
+                <a:ea typeface="Calibri" pitchFamily="34" charset="-122"/>
+                <a:cs typeface="Calibri" pitchFamily="34" charset="-120"/>
+              </a:rPr>
+              <a:t>Counts, zeroes included, days away noted</a:t>
+            </a:r>
+            <a:endParaRPr lang="en-US" sz="1000" dirty="0"/>
+          </a:p>
+        </p:txBody>
+      </p:sp>
+      <p:sp>
+        <p:nvSpPr>
+          <p:cNvPr id="8" name="Shape 5"/>
+          <p:cNvSpPr/>
+          <p:nvPr/>
+        </p:nvSpPr>
+        <p:spPr>
+          <a:xfrm>
+            <a:off x="3543300" y="1188720"/>
+            <a:ext cx="2286000" cy="4937760"/>
+          </a:xfrm>
+          <a:prstGeom prst="roundRect">
+            <a:avLst>
+              <a:gd name="adj" fmla="val 4800"/>
+            </a:avLst>
+          </a:prstGeom>
+          <a:solidFill>
+            <a:srgbClr val="F4F5FA"/>
+          </a:solidFill>
+          <a:ln w="12700">
+            <a:solidFill>
+              <a:srgbClr val="E4E6F0"/>
+            </a:solidFill>
+            <a:prstDash val="solid"/>
+          </a:ln>
+        </p:spPr>
+      </p:sp>
+      <p:pic>
+        <p:nvPicPr>
+          <p:cNvPr id="9" name="Image 1" descr="C:\Users\babak\AppData\Local\Temp\claude\D--0A-study-A0-0-ACSAI-0-sem-4-AI-ML-ML-unit-2\13f11f40-7bf3-4475-bdab-4aadda964c01\scratchpad\shots2\17-activity.png">    </p:cNvPr>
+          <p:cNvPicPr>
+            <a:picLocks noChangeAspect="1"/>
+          </p:cNvPicPr>
+          <p:nvPr/>
+        </p:nvPicPr>
+        <p:blipFill>
+          <a:blip r:embed="rId2"/>
+          <a:stretch>
+            <a:fillRect/>
+          </a:stretch>
+        </p:blipFill>
+        <p:spPr>
+          <a:xfrm>
+            <a:off x="3657600" y="1353312"/>
+            <a:ext cx="2057400" cy="4572000"/>
+          </a:xfrm>
+          <a:prstGeom prst="rect">
+            <a:avLst/>
+          </a:prstGeom>
+          <a:effectLst>
+            <a:outerShdw sx="100000" sy="100000" kx="0" ky="0" algn="bl" rotWithShape="0" blurRad="127000" dist="38100" dir="5400000">
+              <a:srgbClr val="1A1B2E">
+                <a:alpha val="22000"/>
+              </a:srgbClr>
+            </a:outerShdw>
+          </a:effectLst>
+        </p:spPr>
+      </p:pic>
+      <p:sp>
+        <p:nvSpPr>
+          <p:cNvPr id="10" name="Text 6"/>
+          <p:cNvSpPr txBox="1"/>
+          <p:nvPr/>
+        </p:nvSpPr>
+        <p:spPr>
+          <a:xfrm>
+            <a:off x="3543300" y="6236208"/>
+            <a:ext cx="2286000" cy="256032"/>
+          </a:xfrm>
+          <a:prstGeom prst="rect">
+            <a:avLst/>
+          </a:prstGeom>
+          <a:noFill/>
+          <a:ln/>
+        </p:spPr>
+        <p:txBody>
+          <a:bodyPr wrap="square" lIns="0" tIns="0" rIns="0" bIns="0" rtlCol="0" anchor="ctr"/>
+          <a:lstStyle/>
+          <a:p>
+            <a:pPr algn="ctr" indent="0" marL="0">
+              <a:buNone/>
+            </a:pPr>
+            <a:r>
+              <a:rPr lang="en-US" sz="1200" b="1" dirty="0">
+                <a:solidFill>
+                  <a:srgbClr val="1A1B2E"/>
+                </a:solidFill>
+                <a:latin typeface="Calibri" pitchFamily="34" charset="0"/>
+                <a:ea typeface="Calibri" pitchFamily="34" charset="-122"/>
+                <a:cs typeface="Calibri" pitchFamily="34" charset="-120"/>
+              </a:rPr>
+              <a:t>Activity</a:t>
+            </a:r>
+            <a:endParaRPr lang="en-US" sz="1200" dirty="0"/>
+          </a:p>
+        </p:txBody>
+      </p:sp>
+      <p:sp>
+        <p:nvSpPr>
+          <p:cNvPr id="11" name="Text 7"/>
+          <p:cNvSpPr txBox="1"/>
+          <p:nvPr/>
+        </p:nvSpPr>
+        <p:spPr>
+          <a:xfrm>
+            <a:off x="3433572" y="6492240"/>
+            <a:ext cx="2505456" cy="384048"/>
+          </a:xfrm>
+          <a:prstGeom prst="rect">
+            <a:avLst/>
+          </a:prstGeom>
+          <a:noFill/>
+          <a:ln/>
+        </p:spPr>
+        <p:txBody>
+          <a:bodyPr wrap="square" lIns="0" tIns="0" rIns="0" bIns="0" rtlCol="0" anchor="ctr"/>
+          <a:lstStyle/>
+          <a:p>
+            <a:pPr algn="ctr" indent="0" marL="0">
+              <a:buNone/>
+            </a:pPr>
+            <a:r>
+              <a:rPr lang="en-US" sz="1000" dirty="0">
+                <a:solidFill>
+                  <a:srgbClr val="6B6F80"/>
+                </a:solidFill>
+                <a:latin typeface="Calibri" pitchFamily="34" charset="0"/>
+                <a:ea typeface="Calibri" pitchFamily="34" charset="-122"/>
+                <a:cs typeface="Calibri" pitchFamily="34" charset="-120"/>
+              </a:rPr>
+              <a:t>Every group-visible change, in words</a:t>
+            </a:r>
+            <a:endParaRPr lang="en-US" sz="1000" dirty="0"/>
+          </a:p>
+        </p:txBody>
+      </p:sp>
+      <p:sp>
+        <p:nvSpPr>
+          <p:cNvPr id="12" name="Shape 8"/>
+          <p:cNvSpPr/>
+          <p:nvPr/>
+        </p:nvSpPr>
+        <p:spPr>
+          <a:xfrm>
+            <a:off x="6332220" y="1188720"/>
+            <a:ext cx="2286000" cy="4937760"/>
+          </a:xfrm>
+          <a:prstGeom prst="roundRect">
+            <a:avLst>
+              <a:gd name="adj" fmla="val 4800"/>
+            </a:avLst>
+          </a:prstGeom>
+          <a:solidFill>
+            <a:srgbClr val="F4F5FA"/>
+          </a:solidFill>
+          <a:ln w="12700">
+            <a:solidFill>
+              <a:srgbClr val="E4E6F0"/>
+            </a:solidFill>
+            <a:prstDash val="solid"/>
+          </a:ln>
+        </p:spPr>
+      </p:sp>
+      <p:pic>
+        <p:nvPicPr>
+          <p:cNvPr id="13" name="Image 2" descr="C:\Users\babak\AppData\Local\Temp\claude\D--0A-study-A0-0-ACSAI-0-sem-4-AI-ML-ML-unit-2\13f11f40-7bf3-4475-bdab-4aadda964c01\scratchpad\shots2\18-group-menu.png">    </p:cNvPr>
+          <p:cNvPicPr>
+            <a:picLocks noChangeAspect="1"/>
+          </p:cNvPicPr>
+          <p:nvPr/>
+        </p:nvPicPr>
+        <p:blipFill>
+          <a:blip r:embed="rId3"/>
+          <a:stretch>
+            <a:fillRect/>
+          </a:stretch>
+        </p:blipFill>
+        <p:spPr>
+          <a:xfrm>
+            <a:off x="6446520" y="1353312"/>
+            <a:ext cx="2057400" cy="4572000"/>
+          </a:xfrm>
+          <a:prstGeom prst="rect">
+            <a:avLst/>
+          </a:prstGeom>
+          <a:effectLst>
+            <a:outerShdw sx="100000" sy="100000" kx="0" ky="0" algn="bl" rotWithShape="0" blurRad="127000" dist="38100" dir="5400000">
+              <a:srgbClr val="1A1B2E">
+                <a:alpha val="22000"/>
+              </a:srgbClr>
+            </a:outerShdw>
+          </a:effectLst>
+        </p:spPr>
+      </p:pic>
+      <p:sp>
+        <p:nvSpPr>
+          <p:cNvPr id="14" name="Text 9"/>
+          <p:cNvSpPr txBox="1"/>
+          <p:nvPr/>
+        </p:nvSpPr>
+        <p:spPr>
+          <a:xfrm>
+            <a:off x="6332220" y="6236208"/>
+            <a:ext cx="2286000" cy="256032"/>
+          </a:xfrm>
+          <a:prstGeom prst="rect">
+            <a:avLst/>
+          </a:prstGeom>
+          <a:noFill/>
+          <a:ln/>
+        </p:spPr>
+        <p:txBody>
+          <a:bodyPr wrap="square" lIns="0" tIns="0" rIns="0" bIns="0" rtlCol="0" anchor="ctr"/>
+          <a:lstStyle/>
+          <a:p>
+            <a:pPr algn="ctr" indent="0" marL="0">
+              <a:buNone/>
+            </a:pPr>
+            <a:r>
+              <a:rPr lang="en-US" sz="1200" b="1" dirty="0">
+                <a:solidFill>
+                  <a:srgbClr val="1A1B2E"/>
+                </a:solidFill>
+                <a:latin typeface="Calibri" pitchFamily="34" charset="0"/>
+                <a:ea typeface="Calibri" pitchFamily="34" charset="-122"/>
+                <a:cs typeface="Calibri" pitchFamily="34" charset="-120"/>
+              </a:rPr>
+              <a:t>The group's menu</a:t>
+            </a:r>
+            <a:endParaRPr lang="en-US" sz="1200" dirty="0"/>
+          </a:p>
+        </p:txBody>
+      </p:sp>
+      <p:sp>
+        <p:nvSpPr>
+          <p:cNvPr id="15" name="Text 10"/>
+          <p:cNvSpPr txBox="1"/>
+          <p:nvPr/>
+        </p:nvSpPr>
+        <p:spPr>
+          <a:xfrm>
+            <a:off x="6222492" y="6492240"/>
+            <a:ext cx="2505456" cy="384048"/>
+          </a:xfrm>
+          <a:prstGeom prst="rect">
+            <a:avLst/>
+          </a:prstGeom>
+          <a:noFill/>
+          <a:ln/>
+        </p:spPr>
+        <p:txBody>
+          <a:bodyPr wrap="square" lIns="0" tIns="0" rIns="0" bIns="0" rtlCol="0" anchor="ctr"/>
+          <a:lstStyle/>
+          <a:p>
+            <a:pPr algn="ctr" indent="0" marL="0">
+              <a:buNone/>
+            </a:pPr>
+            <a:r>
+              <a:rPr lang="en-US" sz="1000" dirty="0">
+                <a:solidFill>
+                  <a:srgbClr val="6B6F80"/>
+                </a:solidFill>
+                <a:latin typeface="Calibri" pitchFamily="34" charset="0"/>
+                <a:ea typeface="Calibri" pitchFamily="34" charset="-122"/>
+                <a:cs typeface="Calibri" pitchFamily="34" charset="-120"/>
+              </a:rPr>
+              <a:t>Inviting, the record, and going away</a:t>
+            </a:r>
+            <a:endParaRPr lang="en-US" sz="1000" dirty="0"/>
+          </a:p>
+        </p:txBody>
+      </p:sp>
+      <p:sp>
+        <p:nvSpPr>
+          <p:cNvPr id="16" name="Shape 11"/>
+          <p:cNvSpPr/>
+          <p:nvPr/>
+        </p:nvSpPr>
+        <p:spPr>
+          <a:xfrm>
+            <a:off x="9121140" y="1188720"/>
+            <a:ext cx="2286000" cy="4937760"/>
+          </a:xfrm>
+          <a:prstGeom prst="roundRect">
+            <a:avLst>
+              <a:gd name="adj" fmla="val 4800"/>
+            </a:avLst>
+          </a:prstGeom>
+          <a:solidFill>
+            <a:srgbClr val="F4F5FA"/>
+          </a:solidFill>
+          <a:ln w="12700">
+            <a:solidFill>
+              <a:srgbClr val="E4E6F0"/>
+            </a:solidFill>
+            <a:prstDash val="solid"/>
+          </a:ln>
+        </p:spPr>
+      </p:sp>
+      <p:pic>
+        <p:nvPicPr>
+          <p:cNvPr id="17" name="Image 3" descr="C:\Users\babak\AppData\Local\Temp\claude\D--0A-study-A0-0-ACSAI-0-sem-4-AI-ML-ML-unit-2\13f11f40-7bf3-4475-bdab-4aadda964c01\scratchpad\shots2\14-quiet-hours.png">    </p:cNvPr>
+          <p:cNvPicPr>
+            <a:picLocks noChangeAspect="1"/>
+          </p:cNvPicPr>
+          <p:nvPr/>
+        </p:nvPicPr>
+        <p:blipFill>
+          <a:blip r:embed="rId4"/>
+          <a:stretch>
+            <a:fillRect/>
+          </a:stretch>
+        </p:blipFill>
+        <p:spPr>
+          <a:xfrm>
+            <a:off x="9235440" y="1353312"/>
+            <a:ext cx="2057400" cy="4572000"/>
+          </a:xfrm>
+          <a:prstGeom prst="rect">
+            <a:avLst/>
+          </a:prstGeom>
+          <a:effectLst>
+            <a:outerShdw sx="100000" sy="100000" kx="0" ky="0" algn="bl" rotWithShape="0" blurRad="127000" dist="38100" dir="5400000">
+              <a:srgbClr val="1A1B2E">
+                <a:alpha val="22000"/>
+              </a:srgbClr>
+            </a:outerShdw>
+          </a:effectLst>
+        </p:spPr>
+      </p:pic>
+      <p:sp>
+        <p:nvSpPr>
+          <p:cNvPr id="18" name="Text 12"/>
+          <p:cNvSpPr txBox="1"/>
+          <p:nvPr/>
+        </p:nvSpPr>
+        <p:spPr>
+          <a:xfrm>
+            <a:off x="9121140" y="6236208"/>
+            <a:ext cx="2286000" cy="256032"/>
+          </a:xfrm>
+          <a:prstGeom prst="rect">
+            <a:avLst/>
+          </a:prstGeom>
+          <a:noFill/>
+          <a:ln/>
+        </p:spPr>
+        <p:txBody>
+          <a:bodyPr wrap="square" lIns="0" tIns="0" rIns="0" bIns="0" rtlCol="0" anchor="ctr"/>
+          <a:lstStyle/>
+          <a:p>
+            <a:pPr algn="ctr" indent="0" marL="0">
+              <a:buNone/>
+            </a:pPr>
+            <a:r>
+              <a:rPr lang="en-US" sz="1200" b="1" dirty="0">
+                <a:solidFill>
+                  <a:srgbClr val="1A1B2E"/>
+                </a:solidFill>
+                <a:latin typeface="Calibri" pitchFamily="34" charset="0"/>
+                <a:ea typeface="Calibri" pitchFamily="34" charset="-122"/>
+                <a:cs typeface="Calibri" pitchFamily="34" charset="-120"/>
+              </a:rPr>
+              <a:t>Quiet hours</a:t>
+            </a:r>
+            <a:endParaRPr lang="en-US" sz="1200" dirty="0"/>
+          </a:p>
+        </p:txBody>
+      </p:sp>
+      <p:sp>
+        <p:nvSpPr>
+          <p:cNvPr id="19" name="Text 13"/>
+          <p:cNvSpPr txBox="1"/>
+          <p:nvPr/>
+        </p:nvSpPr>
+        <p:spPr>
+          <a:xfrm>
+            <a:off x="9011412" y="6492240"/>
+            <a:ext cx="2505456" cy="384048"/>
+          </a:xfrm>
+          <a:prstGeom prst="rect">
+            <a:avLst/>
+          </a:prstGeom>
+          <a:noFill/>
+          <a:ln/>
+        </p:spPr>
+        <p:txBody>
+          <a:bodyPr wrap="square" lIns="0" tIns="0" rIns="0" bIns="0" rtlCol="0" anchor="ctr"/>
+          <a:lstStyle/>
+          <a:p>
+            <a:pPr algn="ctr" indent="0" marL="0">
+              <a:buNone/>
+            </a:pPr>
+            <a:r>
+              <a:rPr lang="en-US" sz="1000" dirty="0">
+                <a:solidFill>
+                  <a:srgbClr val="6B6F80"/>
+                </a:solidFill>
+                <a:latin typeface="Calibri" pitchFamily="34" charset="0"/>
+                <a:ea typeface="Calibri" pitchFamily="34" charset="-122"/>
+                <a:cs typeface="Calibri" pitchFamily="34" charset="-120"/>
+              </a:rPr>
+              <a:t>Held, not dropped: nothing is lost</a:t>
+            </a:r>
+            <a:endParaRPr lang="en-US" sz="1000" dirty="0"/>
+          </a:p>
+        </p:txBody>
+      </p:sp>
+    </p:spTree>
+  </p:cSld>
+  <p:clrMapOvr>
+    <a:masterClrMapping/>
+  </p:clrMapOvr>
+</p:sld>
+</file>
+
+<file path=ppt/slides/slide8.xml><?xml version="1.0" encoding="utf-8"?>
+<p:sld xmlns:a="http://schemas.openxmlformats.org/drawingml/2006/main" xmlns:r="http://schemas.openxmlformats.org/officeDocument/2006/relationships" xmlns:p="http://schemas.openxmlformats.org/presentationml/2006/main">
+  <p:cSld name="Slide 8">
+    <p:bg>
+      <p:bgPr>
+        <a:solidFill>
+          <a:srgbClr val="FFFFFF"/>
+        </a:solidFill>
+      </p:bgPr>
+    </p:bg>
+    <p:spTree>
+      <p:nvGrpSpPr>
+        <p:cNvPr id="1" name=""/>
+        <p:cNvGrpSpPr/>
+        <p:nvPr/>
+      </p:nvGrpSpPr>
+      <p:grpSpPr>
+        <a:xfrm>
+          <a:off x="0" y="0"/>
+          <a:ext cx="0" cy="0"/>
+          <a:chOff x="0" y="0"/>
+          <a:chExt cx="0" cy="0"/>
+        </a:xfrm>
+      </p:grpSpPr>
+      <p:sp>
+        <p:nvSpPr>
+          <p:cNvPr id="2" name="Text 0"/>
+          <p:cNvSpPr txBox="1"/>
+          <p:nvPr/>
+        </p:nvSpPr>
+        <p:spPr>
+          <a:xfrm>
+            <a:off x="731520" y="292608"/>
+            <a:ext cx="10698480" cy="502920"/>
+          </a:xfrm>
+          <a:prstGeom prst="rect">
+            <a:avLst/>
+          </a:prstGeom>
+          <a:noFill/>
+          <a:ln/>
+        </p:spPr>
+        <p:txBody>
+          <a:bodyPr wrap="square" lIns="0" tIns="0" rIns="0" bIns="0" rtlCol="0" anchor="ctr"/>
+          <a:lstStyle/>
+          <a:p>
+            <a:pPr indent="0" marL="0">
+              <a:buNone/>
+            </a:pPr>
+            <a:r>
+              <a:rPr lang="en-US" sz="3400" b="1" dirty="0">
+                <a:solidFill>
+                  <a:srgbClr val="1A1B2E"/>
+                </a:solidFill>
+                <a:latin typeface="Calibri" pitchFamily="34" charset="0"/>
+                <a:ea typeface="Calibri" pitchFamily="34" charset="-122"/>
+                <a:cs typeface="Calibri" pitchFamily="34" charset="-120"/>
+              </a:rPr>
+              <a:t>A household that has just started</a:t>
+            </a:r>
+            <a:endParaRPr lang="en-US" sz="3400" dirty="0"/>
+          </a:p>
+        </p:txBody>
+      </p:sp>
+      <p:sp>
+        <p:nvSpPr>
+          <p:cNvPr id="3" name="Text 1"/>
+          <p:cNvSpPr txBox="1"/>
+          <p:nvPr/>
+        </p:nvSpPr>
+        <p:spPr>
+          <a:xfrm>
+            <a:off x="758952" y="786384"/>
+            <a:ext cx="10698480" cy="329184"/>
+          </a:xfrm>
+          <a:prstGeom prst="rect">
+            <a:avLst/>
+          </a:prstGeom>
+          <a:noFill/>
+          <a:ln/>
+        </p:spPr>
+        <p:txBody>
+          <a:bodyPr wrap="square" lIns="0" tIns="0" rIns="0" bIns="0" rtlCol="0" anchor="ctr"/>
+          <a:lstStyle/>
+          <a:p>
+            <a:pPr indent="0" marL="0">
+              <a:buNone/>
+            </a:pPr>
+            <a:r>
+              <a:rPr lang="en-US" sz="1300" dirty="0">
+                <a:solidFill>
+                  <a:srgbClr val="6B6F80"/>
+                </a:solidFill>
+                <a:latin typeface="Calibri" pitchFamily="34" charset="0"/>
+                <a:ea typeface="Calibri" pitchFamily="34" charset="-122"/>
+                <a:cs typeface="Calibri" pitchFamily="34" charset="-120"/>
+              </a:rPr>
+              <a:t>An empty board teaches nothing, so a new group is offered chores to argue with rather than a blank page.</a:t>
+            </a:r>
+            <a:endParaRPr lang="en-US" sz="1300" dirty="0"/>
+          </a:p>
+        </p:txBody>
+      </p:sp>
+      <p:sp>
+        <p:nvSpPr>
+          <p:cNvPr id="4" name="Shape 2"/>
+          <p:cNvSpPr/>
+          <p:nvPr/>
+        </p:nvSpPr>
+        <p:spPr>
+          <a:xfrm>
+            <a:off x="754380" y="1188720"/>
+            <a:ext cx="2286000" cy="4937760"/>
+          </a:xfrm>
+          <a:prstGeom prst="roundRect">
+            <a:avLst>
+              <a:gd name="adj" fmla="val 4800"/>
+            </a:avLst>
+          </a:prstGeom>
+          <a:solidFill>
+            <a:srgbClr val="F4F5FA"/>
+          </a:solidFill>
+          <a:ln w="12700">
+            <a:solidFill>
+              <a:srgbClr val="E4E6F0"/>
+            </a:solidFill>
+            <a:prstDash val="solid"/>
+          </a:ln>
+        </p:spPr>
+      </p:sp>
+      <p:pic>
+        <p:nvPicPr>
+          <p:cNvPr id="5" name="Image 0" descr="C:\Users\babak\AppData\Local\Temp\claude\D--0A-study-A0-0-ACSAI-0-sem-4-AI-ML-ML-unit-2\13f11f40-7bf3-4475-bdab-4aadda964c01\scratchpad\shots2\28-create-group.png">    </p:cNvPr>
+          <p:cNvPicPr>
+            <a:picLocks noChangeAspect="1"/>
+          </p:cNvPicPr>
+          <p:nvPr/>
+        </p:nvPicPr>
+        <p:blipFill>
+          <a:blip r:embed="rId1"/>
+          <a:stretch>
+            <a:fillRect/>
+          </a:stretch>
+        </p:blipFill>
+        <p:spPr>
+          <a:xfrm>
+            <a:off x="868680" y="1353312"/>
+            <a:ext cx="2057400" cy="4572000"/>
+          </a:xfrm>
+          <a:prstGeom prst="rect">
+            <a:avLst/>
+          </a:prstGeom>
+          <a:effectLst>
+            <a:outerShdw sx="100000" sy="100000" kx="0" ky="0" algn="bl" rotWithShape="0" blurRad="127000" dist="38100" dir="5400000">
+              <a:srgbClr val="1A1B2E">
+                <a:alpha val="22000"/>
+              </a:srgbClr>
+            </a:outerShdw>
+          </a:effectLst>
+        </p:spPr>
+      </p:pic>
+      <p:sp>
+        <p:nvSpPr>
+          <p:cNvPr id="6" name="Text 3"/>
+          <p:cNvSpPr txBox="1"/>
+          <p:nvPr/>
+        </p:nvSpPr>
+        <p:spPr>
+          <a:xfrm>
+            <a:off x="754380" y="6236208"/>
+            <a:ext cx="2286000" cy="256032"/>
+          </a:xfrm>
+          <a:prstGeom prst="rect">
+            <a:avLst/>
+          </a:prstGeom>
+          <a:noFill/>
+          <a:ln/>
+        </p:spPr>
+        <p:txBody>
+          <a:bodyPr wrap="square" lIns="0" tIns="0" rIns="0" bIns="0" rtlCol="0" anchor="ctr"/>
+          <a:lstStyle/>
+          <a:p>
+            <a:pPr algn="ctr" indent="0" marL="0">
+              <a:buNone/>
+            </a:pPr>
+            <a:r>
+              <a:rPr lang="en-US" sz="1200" b="1" dirty="0">
+                <a:solidFill>
+                  <a:srgbClr val="1A1B2E"/>
+                </a:solidFill>
+                <a:latin typeface="Calibri" pitchFamily="34" charset="0"/>
+                <a:ea typeface="Calibri" pitchFamily="34" charset="-122"/>
+                <a:cs typeface="Calibri" pitchFamily="34" charset="-120"/>
+              </a:rPr>
+              <a:t>Naming the household</a:t>
+            </a:r>
+            <a:endParaRPr lang="en-US" sz="1200" dirty="0"/>
+          </a:p>
+        </p:txBody>
+      </p:sp>
+      <p:sp>
+        <p:nvSpPr>
+          <p:cNvPr id="7" name="Text 4"/>
+          <p:cNvSpPr txBox="1"/>
+          <p:nvPr/>
+        </p:nvSpPr>
+        <p:spPr>
+          <a:xfrm>
+            <a:off x="644652" y="6492240"/>
+            <a:ext cx="2505456" cy="384048"/>
+          </a:xfrm>
+          <a:prstGeom prst="rect">
+            <a:avLst/>
+          </a:prstGeom>
+          <a:noFill/>
+          <a:ln/>
+        </p:spPr>
+        <p:txBody>
+          <a:bodyPr wrap="square" lIns="0" tIns="0" rIns="0" bIns="0" rtlCol="0" anchor="ctr"/>
+          <a:lstStyle/>
+          <a:p>
+            <a:pPr algn="ctr" indent="0" marL="0">
+              <a:buNone/>
+            </a:pPr>
+            <a:r>
+              <a:rPr lang="en-US" sz="1000" dirty="0">
+                <a:solidFill>
+                  <a:srgbClr val="6B6F80"/>
+                </a:solidFill>
+                <a:latin typeface="Calibri" pitchFamily="34" charset="0"/>
+                <a:ea typeface="Calibri" pitchFamily="34" charset="-122"/>
+                <a:cs typeface="Calibri" pitchFamily="34" charset="-120"/>
+              </a:rPr>
+              <a:t>Two fields, one of them optional</a:t>
+            </a:r>
+            <a:endParaRPr lang="en-US" sz="1000" dirty="0"/>
+          </a:p>
+        </p:txBody>
+      </p:sp>
+      <p:sp>
+        <p:nvSpPr>
+          <p:cNvPr id="8" name="Shape 5"/>
+          <p:cNvSpPr/>
+          <p:nvPr/>
+        </p:nvSpPr>
+        <p:spPr>
+          <a:xfrm>
+            <a:off x="3543300" y="1188720"/>
+            <a:ext cx="2286000" cy="4937760"/>
+          </a:xfrm>
+          <a:prstGeom prst="roundRect">
+            <a:avLst>
+              <a:gd name="adj" fmla="val 4800"/>
+            </a:avLst>
+          </a:prstGeom>
+          <a:solidFill>
+            <a:srgbClr val="F4F5FA"/>
+          </a:solidFill>
+          <a:ln w="12700">
+            <a:solidFill>
+              <a:srgbClr val="E4E6F0"/>
+            </a:solidFill>
+            <a:prstDash val="solid"/>
+          </a:ln>
+        </p:spPr>
+      </p:sp>
+      <p:pic>
+        <p:nvPicPr>
+          <p:cNvPr id="9" name="Image 1" descr="C:\Users\babak\AppData\Local\Temp\claude\D--0A-study-A0-0-ACSAI-0-sem-4-AI-ML-ML-unit-2\13f11f40-7bf3-4475-bdab-4aadda964c01\scratchpad\shots2\29-starters.png">    </p:cNvPr>
+          <p:cNvPicPr>
+            <a:picLocks noChangeAspect="1"/>
+          </p:cNvPicPr>
+          <p:nvPr/>
+        </p:nvPicPr>
+        <p:blipFill>
+          <a:blip r:embed="rId2"/>
+          <a:stretch>
+            <a:fillRect/>
+          </a:stretch>
+        </p:blipFill>
+        <p:spPr>
+          <a:xfrm>
+            <a:off x="3657600" y="1353312"/>
+            <a:ext cx="2057400" cy="4572000"/>
+          </a:xfrm>
+          <a:prstGeom prst="rect">
+            <a:avLst/>
+          </a:prstGeom>
+          <a:effectLst>
+            <a:outerShdw sx="100000" sy="100000" kx="0" ky="0" algn="bl" rotWithShape="0" blurRad="127000" dist="38100" dir="5400000">
+              <a:srgbClr val="1A1B2E">
+                <a:alpha val="22000"/>
+              </a:srgbClr>
+            </a:outerShdw>
+          </a:effectLst>
+        </p:spPr>
+      </p:pic>
+      <p:sp>
+        <p:nvSpPr>
+          <p:cNvPr id="10" name="Text 6"/>
+          <p:cNvSpPr txBox="1"/>
+          <p:nvPr/>
+        </p:nvSpPr>
+        <p:spPr>
+          <a:xfrm>
+            <a:off x="3543300" y="6236208"/>
+            <a:ext cx="2286000" cy="256032"/>
+          </a:xfrm>
+          <a:prstGeom prst="rect">
+            <a:avLst/>
+          </a:prstGeom>
+          <a:noFill/>
+          <a:ln/>
+        </p:spPr>
+        <p:txBody>
+          <a:bodyPr wrap="square" lIns="0" tIns="0" rIns="0" bIns="0" rtlCol="0" anchor="ctr"/>
+          <a:lstStyle/>
+          <a:p>
+            <a:pPr algn="ctr" indent="0" marL="0">
+              <a:buNone/>
+            </a:pPr>
+            <a:r>
+              <a:rPr lang="en-US" sz="1200" b="1" dirty="0">
+                <a:solidFill>
+                  <a:srgbClr val="1A1B2E"/>
+                </a:solidFill>
+                <a:latin typeface="Calibri" pitchFamily="34" charset="0"/>
+                <a:ea typeface="Calibri" pitchFamily="34" charset="-122"/>
+                <a:cs typeface="Calibri" pitchFamily="34" charset="-120"/>
+              </a:rPr>
+              <a:t>Five to start with</a:t>
+            </a:r>
+            <a:endParaRPr lang="en-US" sz="1200" dirty="0"/>
+          </a:p>
+        </p:txBody>
+      </p:sp>
+      <p:sp>
+        <p:nvSpPr>
+          <p:cNvPr id="11" name="Text 7"/>
+          <p:cNvSpPr txBox="1"/>
+          <p:nvPr/>
+        </p:nvSpPr>
+        <p:spPr>
+          <a:xfrm>
+            <a:off x="3433572" y="6492240"/>
+            <a:ext cx="2505456" cy="384048"/>
+          </a:xfrm>
+          <a:prstGeom prst="rect">
+            <a:avLst/>
+          </a:prstGeom>
+          <a:noFill/>
+          <a:ln/>
+        </p:spPr>
+        <p:txBody>
+          <a:bodyPr wrap="square" lIns="0" tIns="0" rIns="0" bIns="0" rtlCol="0" anchor="ctr"/>
+          <a:lstStyle/>
+          <a:p>
+            <a:pPr algn="ctr" indent="0" marL="0">
+              <a:buNone/>
+            </a:pPr>
+            <a:r>
+              <a:rPr lang="en-US" sz="1000" dirty="0">
+                <a:solidFill>
+                  <a:srgbClr val="6B6F80"/>
+                </a:solidFill>
+                <a:latin typeface="Calibri" pitchFamily="34" charset="0"/>
+                <a:ea typeface="Calibri" pitchFamily="34" charset="-122"/>
+                <a:cs typeface="Calibri" pitchFamily="34" charset="-120"/>
+              </a:rPr>
+              <a:t>Renameable, because names are local</a:t>
+            </a:r>
+            <a:endParaRPr lang="en-US" sz="1000" dirty="0"/>
+          </a:p>
+        </p:txBody>
+      </p:sp>
+      <p:sp>
+        <p:nvSpPr>
+          <p:cNvPr id="12" name="Shape 8"/>
+          <p:cNvSpPr/>
+          <p:nvPr/>
+        </p:nvSpPr>
+        <p:spPr>
+          <a:xfrm>
+            <a:off x="6332220" y="1188720"/>
+            <a:ext cx="2286000" cy="4937760"/>
+          </a:xfrm>
+          <a:prstGeom prst="roundRect">
+            <a:avLst>
+              <a:gd name="adj" fmla="val 4800"/>
+            </a:avLst>
+          </a:prstGeom>
+          <a:solidFill>
+            <a:srgbClr val="F4F5FA"/>
+          </a:solidFill>
+          <a:ln w="12700">
+            <a:solidFill>
+              <a:srgbClr val="E4E6F0"/>
+            </a:solidFill>
+            <a:prstDash val="solid"/>
+          </a:ln>
+        </p:spPr>
+      </p:sp>
+      <p:pic>
+        <p:nvPicPr>
+          <p:cNvPr id="13" name="Image 2" descr="C:\Users\babak\AppData\Local\Temp\claude\D--0A-study-A0-0-ACSAI-0-sem-4-AI-ML-ML-unit-2\13f11f40-7bf3-4475-bdab-4aadda964c01\scratchpad\shots2\30-starters-deselected.png">    </p:cNvPr>
+          <p:cNvPicPr>
+            <a:picLocks noChangeAspect="1"/>
+          </p:cNvPicPr>
+          <p:nvPr/>
+        </p:nvPicPr>
+        <p:blipFill>
+          <a:blip r:embed="rId3"/>
+          <a:stretch>
+            <a:fillRect/>
+          </a:stretch>
+        </p:blipFill>
+        <p:spPr>
+          <a:xfrm>
+            <a:off x="6446520" y="1353312"/>
+            <a:ext cx="2057400" cy="4572000"/>
+          </a:xfrm>
+          <a:prstGeom prst="rect">
+            <a:avLst/>
+          </a:prstGeom>
+          <a:effectLst>
+            <a:outerShdw sx="100000" sy="100000" kx="0" ky="0" algn="bl" rotWithShape="0" blurRad="127000" dist="38100" dir="5400000">
+              <a:srgbClr val="1A1B2E">
+                <a:alpha val="22000"/>
+              </a:srgbClr>
+            </a:outerShdw>
+          </a:effectLst>
+        </p:spPr>
+      </p:pic>
+      <p:sp>
+        <p:nvSpPr>
+          <p:cNvPr id="14" name="Text 9"/>
+          <p:cNvSpPr txBox="1"/>
+          <p:nvPr/>
+        </p:nvSpPr>
+        <p:spPr>
+          <a:xfrm>
+            <a:off x="6332220" y="6236208"/>
+            <a:ext cx="2286000" cy="256032"/>
+          </a:xfrm>
+          <a:prstGeom prst="rect">
+            <a:avLst/>
+          </a:prstGeom>
+          <a:noFill/>
+          <a:ln/>
+        </p:spPr>
+        <p:txBody>
+          <a:bodyPr wrap="square" lIns="0" tIns="0" rIns="0" bIns="0" rtlCol="0" anchor="ctr"/>
+          <a:lstStyle/>
+          <a:p>
+            <a:pPr algn="ctr" indent="0" marL="0">
+              <a:buNone/>
+            </a:pPr>
+            <a:r>
+              <a:rPr lang="en-US" sz="1200" b="1" dirty="0">
+                <a:solidFill>
+                  <a:srgbClr val="1A1B2E"/>
+                </a:solidFill>
+                <a:latin typeface="Calibri" pitchFamily="34" charset="0"/>
+                <a:ea typeface="Calibri" pitchFamily="34" charset="-122"/>
+                <a:cs typeface="Calibri" pitchFamily="34" charset="-120"/>
+              </a:rPr>
+              <a:t>Take one off</a:t>
+            </a:r>
+            <a:endParaRPr lang="en-US" sz="1200" dirty="0"/>
+          </a:p>
+        </p:txBody>
+      </p:sp>
+      <p:sp>
+        <p:nvSpPr>
+          <p:cNvPr id="15" name="Text 10"/>
+          <p:cNvSpPr txBox="1"/>
+          <p:nvPr/>
+        </p:nvSpPr>
+        <p:spPr>
+          <a:xfrm>
+            <a:off x="6222492" y="6492240"/>
+            <a:ext cx="2505456" cy="384048"/>
+          </a:xfrm>
+          <a:prstGeom prst="rect">
+            <a:avLst/>
+          </a:prstGeom>
+          <a:noFill/>
+          <a:ln/>
+        </p:spPr>
+        <p:txBody>
+          <a:bodyPr wrap="square" lIns="0" tIns="0" rIns="0" bIns="0" rtlCol="0" anchor="ctr"/>
+          <a:lstStyle/>
+          <a:p>
+            <a:pPr algn="ctr" indent="0" marL="0">
+              <a:buNone/>
+            </a:pPr>
+            <a:r>
+              <a:rPr lang="en-US" sz="1000" dirty="0">
+                <a:solidFill>
+                  <a:srgbClr val="6B6F80"/>
+                </a:solidFill>
+                <a:latin typeface="Calibri" pitchFamily="34" charset="0"/>
+                <a:ea typeface="Calibri" pitchFamily="34" charset="-122"/>
+                <a:cs typeface="Calibri" pitchFamily="34" charset="-120"/>
+              </a:rPr>
+              <a:t>The count follows what you actually chose</a:t>
+            </a:r>
+            <a:endParaRPr lang="en-US" sz="1000" dirty="0"/>
+          </a:p>
+        </p:txBody>
+      </p:sp>
+      <p:sp>
+        <p:nvSpPr>
+          <p:cNvPr id="16" name="Shape 11"/>
+          <p:cNvSpPr/>
+          <p:nvPr/>
+        </p:nvSpPr>
+        <p:spPr>
+          <a:xfrm>
+            <a:off x="9121140" y="1188720"/>
+            <a:ext cx="2286000" cy="4937760"/>
+          </a:xfrm>
+          <a:prstGeom prst="roundRect">
+            <a:avLst>
+              <a:gd name="adj" fmla="val 4800"/>
+            </a:avLst>
+          </a:prstGeom>
+          <a:solidFill>
+            <a:srgbClr val="F4F5FA"/>
+          </a:solidFill>
+          <a:ln w="12700">
+            <a:solidFill>
+              <a:srgbClr val="E4E6F0"/>
+            </a:solidFill>
+            <a:prstDash val="solid"/>
+          </a:ln>
+        </p:spPr>
+      </p:sp>
+      <p:pic>
+        <p:nvPicPr>
+          <p:cNvPr id="17" name="Image 3" descr="C:\Users\babak\AppData\Local\Temp\claude\D--0A-study-A0-0-ACSAI-0-sem-4-AI-ML-ML-unit-2\13f11f40-7bf3-4475-bdab-4aadda964c01\scratchpad\shots2\31-empty-board.png">    </p:cNvPr>
+          <p:cNvPicPr>
+            <a:picLocks noChangeAspect="1"/>
+          </p:cNvPicPr>
+          <p:nvPr/>
+        </p:nvPicPr>
+        <p:blipFill>
+          <a:blip r:embed="rId4"/>
+          <a:stretch>
+            <a:fillRect/>
+          </a:stretch>
+        </p:blipFill>
+        <p:spPr>
+          <a:xfrm>
+            <a:off x="9235440" y="1353312"/>
+            <a:ext cx="2057400" cy="4572000"/>
+          </a:xfrm>
+          <a:prstGeom prst="rect">
+            <a:avLst/>
+          </a:prstGeom>
+          <a:effectLst>
+            <a:outerShdw sx="100000" sy="100000" kx="0" ky="0" algn="bl" rotWithShape="0" blurRad="127000" dist="38100" dir="5400000">
+              <a:srgbClr val="1A1B2E">
+                <a:alpha val="22000"/>
+              </a:srgbClr>
+            </a:outerShdw>
+          </a:effectLst>
+        </p:spPr>
+      </p:pic>
+      <p:sp>
+        <p:nvSpPr>
+          <p:cNvPr id="18" name="Text 12"/>
+          <p:cNvSpPr txBox="1"/>
+          <p:nvPr/>
+        </p:nvSpPr>
+        <p:spPr>
+          <a:xfrm>
+            <a:off x="9121140" y="6236208"/>
+            <a:ext cx="2286000" cy="256032"/>
+          </a:xfrm>
+          <a:prstGeom prst="rect">
+            <a:avLst/>
+          </a:prstGeom>
+          <a:noFill/>
+          <a:ln/>
+        </p:spPr>
+        <p:txBody>
+          <a:bodyPr wrap="square" lIns="0" tIns="0" rIns="0" bIns="0" rtlCol="0" anchor="ctr"/>
+          <a:lstStyle/>
+          <a:p>
+            <a:pPr algn="ctr" indent="0" marL="0">
+              <a:buNone/>
+            </a:pPr>
+            <a:r>
+              <a:rPr lang="en-US" sz="1200" b="1" dirty="0">
+                <a:solidFill>
+                  <a:srgbClr val="1A1B2E"/>
+                </a:solidFill>
+                <a:latin typeface="Calibri" pitchFamily="34" charset="0"/>
+                <a:ea typeface="Calibri" pitchFamily="34" charset="-122"/>
+                <a:cs typeface="Calibri" pitchFamily="34" charset="-120"/>
+              </a:rPr>
+              <a:t>Or skip entirely</a:t>
+            </a:r>
+            <a:endParaRPr lang="en-US" sz="1200" dirty="0"/>
+          </a:p>
+        </p:txBody>
+      </p:sp>
+      <p:sp>
+        <p:nvSpPr>
+          <p:cNvPr id="19" name="Text 13"/>
+          <p:cNvSpPr txBox="1"/>
+          <p:nvPr/>
+        </p:nvSpPr>
+        <p:spPr>
+          <a:xfrm>
+            <a:off x="9011412" y="6492240"/>
+            <a:ext cx="2505456" cy="384048"/>
+          </a:xfrm>
+          <a:prstGeom prst="rect">
+            <a:avLst/>
+          </a:prstGeom>
+          <a:noFill/>
+          <a:ln/>
+        </p:spPr>
+        <p:txBody>
+          <a:bodyPr wrap="square" lIns="0" tIns="0" rIns="0" bIns="0" rtlCol="0" anchor="ctr"/>
+          <a:lstStyle/>
+          <a:p>
+            <a:pPr algn="ctr" indent="0" marL="0">
+              <a:buNone/>
+            </a:pPr>
+            <a:r>
+              <a:rPr lang="en-US" sz="1000" dirty="0">
+                <a:solidFill>
+                  <a:srgbClr val="6B6F80"/>
+                </a:solidFill>
+                <a:latin typeface="Calibri" pitchFamily="34" charset="0"/>
+                <a:ea typeface="Calibri" pitchFamily="34" charset="-122"/>
+                <a:cs typeface="Calibri" pitchFamily="34" charset="-120"/>
+              </a:rPr>
+              <a:t>The empty board says what to do next</a:t>
+            </a:r>
+            <a:endParaRPr lang="en-US" sz="1000" dirty="0"/>
+          </a:p>
+        </p:txBody>
+      </p:sp>
+    </p:spTree>
+  </p:cSld>
+  <p:clrMapOvr>
+    <a:masterClrMapping/>
+  </p:clrMapOvr>
+</p:sld>
+</file>
+
+<file path=ppt/slides/slide9.xml><?xml version="1.0" encoding="utf-8"?>
+<p:sld xmlns:a="http://schemas.openxmlformats.org/drawingml/2006/main" xmlns:r="http://schemas.openxmlformats.org/officeDocument/2006/relationships" xmlns:p="http://schemas.openxmlformats.org/presentationml/2006/main">
+  <p:cSld name="Slide 9">
+    <p:bg>
+      <p:bgPr>
+        <a:solidFill>
+          <a:srgbClr val="FFFFFF"/>
+        </a:solidFill>
+      </p:bgPr>
+    </p:bg>
+    <p:spTree>
+      <p:nvGrpSpPr>
+        <p:cNvPr id="1" name=""/>
+        <p:cNvGrpSpPr/>
+        <p:nvPr/>
+      </p:nvGrpSpPr>
+      <p:grpSpPr>
+        <a:xfrm>
+          <a:off x="0" y="0"/>
+          <a:ext cx="0" cy="0"/>
+          <a:chOff x="0" y="0"/>
+          <a:chExt cx="0" cy="0"/>
+        </a:xfrm>
+      </p:grpSpPr>
+      <p:sp>
+        <p:nvSpPr>
+          <p:cNvPr id="2" name="Text 0"/>
+          <p:cNvSpPr txBox="1"/>
+          <p:nvPr/>
+        </p:nvSpPr>
+        <p:spPr>
+          <a:xfrm>
+            <a:off x="731520" y="292608"/>
+            <a:ext cx="10698480" cy="502920"/>
+          </a:xfrm>
+          <a:prstGeom prst="rect">
+            <a:avLst/>
+          </a:prstGeom>
+          <a:noFill/>
+          <a:ln/>
+        </p:spPr>
+        <p:txBody>
+          <a:bodyPr wrap="square" lIns="0" tIns="0" rIns="0" bIns="0" rtlCol="0" anchor="ctr"/>
+          <a:lstStyle/>
+          <a:p>
+            <a:pPr indent="0" marL="0">
+              <a:buNone/>
+            </a:pPr>
+            <a:r>
+              <a:rPr lang="en-US" sz="3400" b="1" dirty="0">
+                <a:solidFill>
+                  <a:srgbClr val="1A1B2E"/>
+                </a:solidFill>
+                <a:latin typeface="Calibri" pitchFamily="34" charset="0"/>
+                <a:ea typeface="Calibri" pitchFamily="34" charset="-122"/>
+                <a:cs typeface="Calibri" pitchFamily="34" charset="-120"/>
+              </a:rPr>
+              <a:t>Light or dark, the household's choice</a:t>
+            </a:r>
+            <a:endParaRPr lang="en-US" sz="3400" dirty="0"/>
+          </a:p>
+        </p:txBody>
+      </p:sp>
+      <p:sp>
+        <p:nvSpPr>
+          <p:cNvPr id="3" name="Text 1"/>
+          <p:cNvSpPr txBox="1"/>
+          <p:nvPr/>
+        </p:nvSpPr>
+        <p:spPr>
+          <a:xfrm>
+            <a:off x="758952" y="786384"/>
+            <a:ext cx="10698480" cy="329184"/>
+          </a:xfrm>
+          <a:prstGeom prst="rect">
+            <a:avLst/>
+          </a:prstGeom>
+          <a:noFill/>
+          <a:ln/>
+        </p:spPr>
+        <p:txBody>
+          <a:bodyPr wrap="square" lIns="0" tIns="0" rIns="0" bIns="0" rtlCol="0" anchor="ctr"/>
+          <a:lstStyle/>
+          <a:p>
+            <a:pPr indent="0" marL="0">
+              <a:buNone/>
+            </a:pPr>
+            <a:r>
+              <a:rPr lang="en-US" sz="1300" dirty="0">
+                <a:solidFill>
+                  <a:srgbClr val="6B6F80"/>
+                </a:solidFill>
+                <a:latin typeface="Calibri" pitchFamily="34" charset="0"/>
+                <a:ea typeface="Calibri" pitchFamily="34" charset="-122"/>
+                <a:cs typeface="Calibri" pitchFamily="34" charset="-120"/>
+              </a:rPr>
+              <a:t>One setting per phone. The overdue amber is picked from the theme, so it stays legible in either.</a:t>
+            </a:r>
+            <a:endParaRPr lang="en-US" sz="1300" dirty="0"/>
+          </a:p>
+        </p:txBody>
+      </p:sp>
+      <p:sp>
+        <p:nvSpPr>
+          <p:cNvPr id="4" name="Shape 2"/>
+          <p:cNvSpPr/>
+          <p:nvPr/>
+        </p:nvSpPr>
+        <p:spPr>
+          <a:xfrm>
+            <a:off x="3543300" y="1188720"/>
+            <a:ext cx="2286000" cy="4937760"/>
+          </a:xfrm>
+          <a:prstGeom prst="roundRect">
+            <a:avLst>
+              <a:gd name="adj" fmla="val 4800"/>
+            </a:avLst>
+          </a:prstGeom>
+          <a:solidFill>
+            <a:srgbClr val="F4F5FA"/>
+          </a:solidFill>
+          <a:ln w="12700">
+            <a:solidFill>
+              <a:srgbClr val="E4E6F0"/>
+            </a:solidFill>
+            <a:prstDash val="solid"/>
+          </a:ln>
+        </p:spPr>
+      </p:sp>
+      <p:pic>
+        <p:nvPicPr>
+          <p:cNvPr id="5" name="Image 0" descr="C:\Users\babak\AppData\Local\Temp\claude\D--0A-study-A0-0-ACSAI-0-sem-4-AI-ML-ML-unit-2\13f11f40-7bf3-4475-bdab-4aadda964c01\scratchpad\shots2\15-appearance.png">    </p:cNvPr>
+          <p:cNvPicPr>
+            <a:picLocks noChangeAspect="1"/>
+          </p:cNvPicPr>
+          <p:nvPr/>
+        </p:nvPicPr>
+        <p:blipFill>
+          <a:blip r:embed="rId1"/>
+          <a:stretch>
+            <a:fillRect/>
+          </a:stretch>
+        </p:blipFill>
+        <p:spPr>
+          <a:xfrm>
+            <a:off x="3657600" y="1353312"/>
+            <a:ext cx="2057400" cy="4572000"/>
+          </a:xfrm>
+          <a:prstGeom prst="rect">
+            <a:avLst/>
+          </a:prstGeom>
+          <a:effectLst>
+            <a:outerShdw sx="100000" sy="100000" kx="0" ky="0" algn="bl" rotWithShape="0" blurRad="127000" dist="38100" dir="5400000">
+              <a:srgbClr val="1A1B2E">
+                <a:alpha val="22000"/>
+              </a:srgbClr>
+            </a:outerShdw>
+          </a:effectLst>
+        </p:spPr>
+      </p:pic>
+      <p:sp>
+        <p:nvSpPr>
+          <p:cNvPr id="6" name="Text 3"/>
+          <p:cNvSpPr txBox="1"/>
+          <p:nvPr/>
+        </p:nvSpPr>
+        <p:spPr>
+          <a:xfrm>
+            <a:off x="3543300" y="6236208"/>
+            <a:ext cx="2286000" cy="256032"/>
+          </a:xfrm>
+          <a:prstGeom prst="rect">
+            <a:avLst/>
+          </a:prstGeom>
+          <a:noFill/>
+          <a:ln/>
+        </p:spPr>
+        <p:txBody>
+          <a:bodyPr wrap="square" lIns="0" tIns="0" rIns="0" bIns="0" rtlCol="0" anchor="ctr"/>
+          <a:lstStyle/>
+          <a:p>
+            <a:pPr algn="ctr" indent="0" marL="0">
+              <a:buNone/>
+            </a:pPr>
+            <a:r>
+              <a:rPr lang="en-US" sz="1200" b="1" dirty="0">
+                <a:solidFill>
+                  <a:srgbClr val="1A1B2E"/>
+                </a:solidFill>
+                <a:latin typeface="Calibri" pitchFamily="34" charset="0"/>
+                <a:ea typeface="Calibri" pitchFamily="34" charset="-122"/>
+                <a:cs typeface="Calibri" pitchFamily="34" charset="-120"/>
+              </a:rPr>
+              <a:t>Appearance</a:t>
+            </a:r>
+            <a:endParaRPr lang="en-US" sz="1200" dirty="0"/>
+          </a:p>
+        </p:txBody>
+      </p:sp>
+      <p:sp>
+        <p:nvSpPr>
+          <p:cNvPr id="7" name="Text 4"/>
+          <p:cNvSpPr txBox="1"/>
+          <p:nvPr/>
+        </p:nvSpPr>
+        <p:spPr>
+          <a:xfrm>
+            <a:off x="3433572" y="6492240"/>
+            <a:ext cx="2505456" cy="384048"/>
+          </a:xfrm>
+          <a:prstGeom prst="rect">
+            <a:avLst/>
+          </a:prstGeom>
+          <a:noFill/>
+          <a:ln/>
+        </p:spPr>
+        <p:txBody>
+          <a:bodyPr wrap="square" lIns="0" tIns="0" rIns="0" bIns="0" rtlCol="0" anchor="ctr"/>
+          <a:lstStyle/>
+          <a:p>
+            <a:pPr algn="ctr" indent="0" marL="0">
+              <a:buNone/>
+            </a:pPr>
+            <a:r>
+              <a:rPr lang="en-US" sz="1000" dirty="0">
+                <a:solidFill>
+                  <a:srgbClr val="6B6F80"/>
+                </a:solidFill>
+                <a:latin typeface="Calibri" pitchFamily="34" charset="0"/>
+                <a:ea typeface="Calibri" pitchFamily="34" charset="-122"/>
+                <a:cs typeface="Calibri" pitchFamily="34" charset="-120"/>
+              </a:rPr>
+              <a:t>System, light or dark; kept on the device</a:t>
+            </a:r>
+            <a:endParaRPr lang="en-US" sz="1000" dirty="0"/>
+          </a:p>
+        </p:txBody>
+      </p:sp>
+      <p:sp>
+        <p:nvSpPr>
+          <p:cNvPr id="8" name="Shape 5"/>
+          <p:cNvSpPr/>
+          <p:nvPr/>
+        </p:nvSpPr>
+        <p:spPr>
+          <a:xfrm>
+            <a:off x="6332220" y="1188720"/>
+            <a:ext cx="2286000" cy="4937760"/>
+          </a:xfrm>
+          <a:prstGeom prst="roundRect">
+            <a:avLst>
+              <a:gd name="adj" fmla="val 4800"/>
+            </a:avLst>
+          </a:prstGeom>
+          <a:solidFill>
+            <a:srgbClr val="F4F5FA"/>
+          </a:solidFill>
+          <a:ln w="12700">
+            <a:solidFill>
+              <a:srgbClr val="E4E6F0"/>
+            </a:solidFill>
+            <a:prstDash val="solid"/>
+          </a:ln>
+        </p:spPr>
+      </p:sp>
+      <p:pic>
+        <p:nvPicPr>
+          <p:cNvPr id="9" name="Image 1" descr="C:\Users\babak\AppData\Local\Temp\claude\D--0A-study-A0-0-ACSAI-0-sem-4-AI-ML-ML-unit-2\13f11f40-7bf3-4475-bdab-4aadda964c01\scratchpad\shots2\27-dark-board.png">    </p:cNvPr>
+          <p:cNvPicPr>
+            <a:picLocks noChangeAspect="1"/>
+          </p:cNvPicPr>
+          <p:nvPr/>
+        </p:nvPicPr>
+        <p:blipFill>
+          <a:blip r:embed="rId2"/>
+          <a:stretch>
+            <a:fillRect/>
+          </a:stretch>
+        </p:blipFill>
+        <p:spPr>
+          <a:xfrm>
+            <a:off x="6446520" y="1353312"/>
+            <a:ext cx="2057400" cy="4572000"/>
+          </a:xfrm>
+          <a:prstGeom prst="rect">
+            <a:avLst/>
+          </a:prstGeom>
+          <a:effectLst>
+            <a:outerShdw sx="100000" sy="100000" kx="0" ky="0" algn="bl" rotWithShape="0" blurRad="127000" dist="38100" dir="5400000">
+              <a:srgbClr val="1A1B2E">
+                <a:alpha val="22000"/>
+              </a:srgbClr>
+            </a:outerShdw>
+          </a:effectLst>
+        </p:spPr>
+      </p:pic>
+      <p:sp>
+        <p:nvSpPr>
+          <p:cNvPr id="10" name="Text 6"/>
+          <p:cNvSpPr txBox="1"/>
+          <p:nvPr/>
+        </p:nvSpPr>
+        <p:spPr>
+          <a:xfrm>
+            <a:off x="6332220" y="6236208"/>
+            <a:ext cx="2286000" cy="256032"/>
+          </a:xfrm>
+          <a:prstGeom prst="rect">
+            <a:avLst/>
+          </a:prstGeom>
+          <a:noFill/>
+          <a:ln/>
+        </p:spPr>
+        <p:txBody>
+          <a:bodyPr wrap="square" lIns="0" tIns="0" rIns="0" bIns="0" rtlCol="0" anchor="ctr"/>
+          <a:lstStyle/>
+          <a:p>
+            <a:pPr algn="ctr" indent="0" marL="0">
+              <a:buNone/>
+            </a:pPr>
+            <a:r>
+              <a:rPr lang="en-US" sz="1200" b="1" dirty="0">
+                <a:solidFill>
+                  <a:srgbClr val="1A1B2E"/>
+                </a:solidFill>
+                <a:latin typeface="Calibri" pitchFamily="34" charset="0"/>
+                <a:ea typeface="Calibri" pitchFamily="34" charset="-122"/>
+                <a:cs typeface="Calibri" pitchFamily="34" charset="-120"/>
+              </a:rPr>
+              <a:t>The board in dark</a:t>
+            </a:r>
+            <a:endParaRPr lang="en-US" sz="1200" dirty="0"/>
+          </a:p>
+        </p:txBody>
+      </p:sp>
+      <p:sp>
+        <p:nvSpPr>
+          <p:cNvPr id="11" name="Text 7"/>
+          <p:cNvSpPr txBox="1"/>
+          <p:nvPr/>
+        </p:nvSpPr>
+        <p:spPr>
+          <a:xfrm>
+            <a:off x="6222492" y="6492240"/>
+            <a:ext cx="2505456" cy="384048"/>
+          </a:xfrm>
+          <a:prstGeom prst="rect">
+            <a:avLst/>
+          </a:prstGeom>
+          <a:noFill/>
+          <a:ln/>
+        </p:spPr>
+        <p:txBody>
+          <a:bodyPr wrap="square" lIns="0" tIns="0" rIns="0" bIns="0" rtlCol="0" anchor="ctr"/>
+          <a:lstStyle/>
+          <a:p>
+            <a:pPr algn="ctr" indent="0" marL="0">
+              <a:buNone/>
+            </a:pPr>
+            <a:r>
+              <a:rPr lang="en-US" sz="1000" dirty="0">
+                <a:solidFill>
+                  <a:srgbClr val="6B6F80"/>
+                </a:solidFill>
+                <a:latin typeface="Calibri" pitchFamily="34" charset="0"/>
+                <a:ea typeface="Calibri" pitchFamily="34" charset="-122"/>
+                <a:cs typeface="Calibri" pitchFamily="34" charset="-120"/>
+              </a:rPr>
+              <a:t>Amber still amber; still nothing red</a:t>
             </a:r>
             <a:endParaRPr lang="en-US" sz="1000" dirty="0"/>
           </a:p>

--- a/TaskFlow_Screens.pptx
+++ b/TaskFlow_Screens.pptx
@@ -4730,7 +4730,7 @@
                 <a:ea typeface="Calibri" pitchFamily="34" charset="-122"/>
                 <a:cs typeface="Calibri" pitchFamily="34" charset="-120"/>
               </a:rPr>
-              <a:t>It moves, and it comes back next cycle</a:t>
+              <a:t>It moves, it returns next cycle, and Undo catches a mis-swipe</a:t>
             </a:r>
             <a:endParaRPr lang="en-US" sz="1000" dirty="0"/>
           </a:p>
